--- a/deck/PlainSight.pptx
+++ b/deck/PlainSight.pptx
@@ -17,9 +17,10 @@
     <p:sldId id="265" r:id="rId11"/>
     <p:sldId id="266" r:id="rId12"/>
     <p:sldId id="267" r:id="rId13"/>
+    <p:sldId id="268" r:id="rId14"/>
   </p:sldIdLst>
   <p:notesMasterIdLst>
-    <p:notesMasterId r:id="rId14"/>
+    <p:notesMasterId r:id="rId15"/>
   </p:notesMasterIdLst>
   <p:sldSz cx="12192000" cy="6858000"/>
   <p:notesSz cx="6858000" cy="12192000"/>
@@ -118,36 +119,37 @@
   <p:extLst>
     <p:ext uri="{521415D9-36F7-43E2-AB2F-B90AF26B5E84}">
       <p14:sectionLst xmlns:p14="http://schemas.microsoft.com/office/powerpoint/2010/main">
-        <p14:section name="Opening" id="{1dff9e23-897c-1abf-6966-820e3c62c38e}">
+        <p14:section name="Opening" id="{cfc6353a-1a8b-a5cb-e884-4adc0910cef9}">
           <p14:sldIdLst>
             <p14:sldId id="256"/>
           </p14:sldIdLst>
         </p14:section>
-        <p14:section name="Problem" id="{8c897e56-64b7-421f-cd5a-154b06c4ffa3}">
+        <p14:section name="Problem" id="{d897fe89-f4bd-02e5-3976-3ed2af9f3244}">
           <p14:sldIdLst>
             <p14:sldId id="257"/>
             <p14:sldId id="258"/>
           </p14:sldIdLst>
         </p14:section>
-        <p14:section name="Solution" id="{e310318f-242e-d513-5668-ea43e2b94ecb}">
+        <p14:section name="Solution" id="{4b41d7b6-7224-fa99-d585-3bd3c77a9da7}">
           <p14:sldIdLst>
             <p14:sldId id="259"/>
             <p14:sldId id="260"/>
             <p14:sldId id="261"/>
+            <p14:sldId id="262"/>
           </p14:sldIdLst>
         </p14:section>
-        <p14:section name="Evidence" id="{993ba5dc-bef5-62d8-79fb-a39659699181}">
+        <p14:section name="Evidence" id="{61ca1d63-d5a5-4203-34c8-0fe20da230de}">
           <p14:sldIdLst>
-            <p14:sldId id="262"/>
             <p14:sldId id="263"/>
             <p14:sldId id="264"/>
+            <p14:sldId id="265"/>
           </p14:sldIdLst>
         </p14:section>
-        <p14:section name="Next" id="{0addb5ac-a215-ba9e-67fe-d92a7bcdd8ad}">
+        <p14:section name="Next" id="{e72116b7-611a-2be5-9003-0f85d73c096d}">
           <p14:sldIdLst>
-            <p14:sldId id="265"/>
             <p14:sldId id="266"/>
             <p14:sldId id="267"/>
+            <p14:sldId id="268"/>
           </p14:sldIdLst>
         </p14:section>
       </p14:sectionLst>
@@ -642,7 +644,7 @@
           <a:p>
             <a:r>
               <a:rPr lang="en-US" dirty="0"/>
-              <a:t>Next is the fidelity layer: stop asking the model to remember exact data through a paraphrase; carry it deterministically under the key and let the model only write the cover. Then make everything keyed and varied so a seized model is useless. The long tail is the judge's own list of later items.</a:t>
+              <a:t>The judge asked for honest acknowledgement of challenges, so here they are, all measured by our own harness. The biggest is that a language model paraphrasing exact data is lossy, which is exactly what the next stage fixes. The two face cards are the honest limits of the face key: it proves who is at the camera, not that they are there willingly.</a:t>
             </a:r>
             <a:endParaRPr lang="en-US" dirty="0"/>
           </a:p>
@@ -730,7 +732,7 @@
           <a:p>
             <a:r>
               <a:rPr lang="en-US" dirty="0"/>
-              <a:t>Where this goes: small per-user models that mask and unmask on the device, keyed so possessing the model is not enough, deployable to people living under censorship. Nothing in the MVP closes that door.</a:t>
+              <a:t>Next is the fidelity layer: stop asking the model to remember exact data through a paraphrase; carry it deterministically under the key and let the model only write the cover. Then make everything keyed and varied so a seized model is useless; the face-locked vault is the first piece of that and is already built. The long tail is the judge's own list of later items.</a:t>
             </a:r>
             <a:endParaRPr lang="en-US" dirty="0"/>
           </a:p>
@@ -818,7 +820,7 @@
           <a:p>
             <a:r>
               <a:rPr lang="en-US" dirty="0"/>
-              <a:t>Thank the judge. Offer to rerun the demo with a message they type.</a:t>
+              <a:t>Where this goes: small per-user models that mask and unmask on the device, keyed so possessing the model is not enough, deployable to people living under censorship. Nothing in the MVP closes that door.</a:t>
             </a:r>
             <a:endParaRPr lang="en-US" dirty="0"/>
           </a:p>
@@ -842,6 +844,94 @@
             <a:fld id="{F7021451-1387-4CA6-816F-3879F97B5CBC}" type="slidenum">
               <a:rPr lang="en-US"/>
               <a:t>12</a:t>
+            </a:fld>
+            <a:endParaRPr lang="en-US"/>
+          </a:p>
+        </p:txBody>
+      </p:sp>
+    </p:spTree>
+    <p:extLst>
+      <p:ext uri="{BB962C8B-B14F-4D97-AF65-F5344CB8AC3E}">
+        <p14:creationId xmlns:p14="http://schemas.microsoft.com/office/powerpoint/2010/main" val="1024086991"/>
+      </p:ext>
+    </p:extLst>
+  </p:cSld>
+  <p:clrMapOvr>
+    <a:masterClrMapping/>
+  </p:clrMapOvr>
+</p:notes>
+</file>
+
+<file path=ppt/notesSlides/notesSlide13.xml><?xml version="1.0" encoding="utf-8"?>
+<p:notes xmlns:a="http://schemas.openxmlformats.org/drawingml/2006/main" xmlns:r="http://schemas.openxmlformats.org/officeDocument/2006/relationships" xmlns:p="http://schemas.openxmlformats.org/presentationml/2006/main">
+  <p:cSld>
+    <p:spTree>
+      <p:nvGrpSpPr>
+        <p:cNvPr id="1" name=""/>
+        <p:cNvGrpSpPr/>
+        <p:nvPr/>
+      </p:nvGrpSpPr>
+      <p:grpSpPr>
+        <a:xfrm>
+          <a:off x="0" y="0"/>
+          <a:ext cx="0" cy="0"/>
+          <a:chOff x="0" y="0"/>
+          <a:chExt cx="0" cy="0"/>
+        </a:xfrm>
+      </p:grpSpPr>
+      <p:sp>
+        <p:nvSpPr>
+          <p:cNvPr id="2" name="Slide Image Placeholder 1"/>
+          <p:cNvSpPr>
+            <a:spLocks noGrp="1" noRot="1" noChangeAspect="1"/>
+          </p:cNvSpPr>
+          <p:nvPr>
+            <p:ph type="sldImg"/>
+          </p:nvPr>
+        </p:nvSpPr>
+        <p:spPr/>
+      </p:sp>
+      <p:sp>
+        <p:nvSpPr>
+          <p:cNvPr id="3" name="Notes Placeholder 2"/>
+          <p:cNvSpPr>
+            <a:spLocks noGrp="1"/>
+          </p:cNvSpPr>
+          <p:nvPr>
+            <p:ph type="body" idx="1"/>
+          </p:nvPr>
+        </p:nvSpPr>
+        <p:spPr/>
+        <p:txBody>
+          <a:bodyPr/>
+          <a:lstStyle/>
+          <a:p>
+            <a:r>
+              <a:rPr lang="en-US" dirty="0"/>
+              <a:t>Thank the judge. Offer to rerun the demo with a message they type.</a:t>
+            </a:r>
+            <a:endParaRPr lang="en-US" dirty="0"/>
+          </a:p>
+        </p:txBody>
+      </p:sp>
+      <p:sp>
+        <p:nvSpPr>
+          <p:cNvPr id="4" name="Slide Number Placeholder 3"/>
+          <p:cNvSpPr>
+            <a:spLocks noGrp="1"/>
+          </p:cNvSpPr>
+          <p:nvPr>
+            <p:ph type="sldNum" sz="quarter" idx="10"/>
+          </p:nvPr>
+        </p:nvSpPr>
+        <p:spPr/>
+        <p:txBody>
+          <a:bodyPr/>
+          <a:lstStyle/>
+          <a:p>
+            <a:fld id="{F7021451-1387-4CA6-816F-3879F97B5CBC}" type="slidenum">
+              <a:rPr lang="en-US"/>
+              <a:t>13</a:t>
             </a:fld>
             <a:endParaRPr lang="en-US"/>
           </a:p>
@@ -1258,7 +1348,7 @@
           <a:p>
             <a:r>
               <a:rPr lang="en-US" dirty="0"/>
-              <a:t>Switch to the live app now: streamlit run demo/app.py. Click Warm up model first, use the book-swap preset. Narrate left to right: what the sender typed, what an eavesdropper sees (and the keyword scan coming back clean), what the receiver gets back with the exact details ticked off. If the model misbehaves, flip on Recorded replay, which replays this exact recorded output. Backup video: demo/demo-fallback.gif.</a:t>
+              <a:t>Why a face: if the device is seized, the shared key must not be sitting on it in the clear. The partner can't share your face, so the face doesn't BECOME the shared key; it unlocks a local vault that holds it. Two open OpenCV models do the vision. The clever part is the fuzzy commitment: every capture of your face is a little different, yet it rebuilds the exact same 128-bit secret, and a different face doesn't. Live test on our laptop webcam: three unlocks at similarity 0.84 to 0.96, an impostor photo at 0.05 rejected, wrong PIN rejected. Honest limits are on the limits slide: no liveness check yet, and a face can be compelled, which is why the PIN exists.</a:t>
             </a:r>
             <a:endParaRPr lang="en-US" dirty="0"/>
           </a:p>
@@ -1346,7 +1436,7 @@
           <a:p>
             <a:r>
               <a:rPr lang="en-US" dirty="0"/>
-              <a:t>Numbers come from python -m evaluation.run_eval. Test cases are the three frozen cases the prompts were tuned on, so 100% is expected there. The honest number is the unseen one: 92% on three new fictional messages for both codecs; the two-prompt codec leaked 'choir practice' into one cover, the single prompt did not.</a:t>
+              <a:t>Switch to the live app now: streamlit run demo/app.py. Click Warm up model first, use the book-swap preset. Narrate left to right: what the sender typed, what an eavesdropper sees (and the keyword scan coming back clean), what the receiver gets back with the exact details ticked off. If the model misbehaves, flip on Recorded replay, which replays this exact recorded output. Backup video: demo/demo-fallback.gif. Face key: in the sidebar click Unlock (or Enroll face the first time) and point out the live landmark tracking; the header then shows Key: face vault and the encrypt/decrypt panel appears.</a:t>
             </a:r>
             <a:endParaRPr lang="en-US" dirty="0"/>
           </a:p>
@@ -1434,7 +1524,7 @@
           <a:p>
             <a:r>
               <a:rPr lang="en-US" dirty="0"/>
-              <a:t>Feasibility: everything you just saw ran on a laptop CPU with an open 7B model and no API key. The architecture has two seams, Codec and Provider; on-device, multilingual, keyed and image carriers all plug in at one of them.</a:t>
+              <a:t>Numbers come from python -m evaluation.run_eval. Test cases are the three frozen cases the prompts were tuned on, so 100% is expected there. The honest number is the unseen one: 92% on three new fictional messages for both codecs; the two-prompt codec leaked 'choir practice' into one cover, the single prompt did not.</a:t>
             </a:r>
             <a:endParaRPr lang="en-US" dirty="0"/>
           </a:p>
@@ -1522,7 +1612,7 @@
           <a:p>
             <a:r>
               <a:rPr lang="en-US" dirty="0"/>
-              <a:t>The judge asked for honest acknowledgement of challenges, so here they are, all measured by our own harness. The biggest is that a language model paraphrasing exact data is lossy, which is exactly what the next stage fixes.</a:t>
+              <a:t>Feasibility: everything you just saw ran on a laptop CPU with an open 7B model and no API key. The architecture has two seams, Codec and Provider; on-device, multilingual, keyed and image carriers all plug in at one of them. The face vault sits beside them: it only decides where the shared key comes from.</a:t>
             </a:r>
             <a:endParaRPr lang="en-US" dirty="0"/>
           </a:p>
@@ -2425,7 +2515,7 @@
                   <a:schemeClr val="bg2"/>
                 </a:solidFill>
               </a:rPr>
-              <a:t>Roadmap: exact, keyed, then everywhere</a:t>
+              <a:t>What still breaks, and how we know</a:t>
             </a:r>
             <a:endParaRPr lang="en-US" sz="3200" dirty="0"/>
           </a:p>
@@ -2433,104 +2523,18 @@
       </p:sp>
       <p:sp>
         <p:nvSpPr>
-          <p:cNvPr id="3" name="timeline"/>
+          <p:cNvPr id="3" name="Vocabulary gaps card"/>
           <p:cNvSpPr/>
           <p:nvPr/>
         </p:nvSpPr>
         <p:spPr>
           <a:xfrm>
-            <a:off x="868680" y="1874520"/>
-            <a:ext cx="10424160" cy="0"/>
-          </a:xfrm>
-          <a:prstGeom prst="line">
-            <a:avLst/>
-          </a:prstGeom>
-          <a:noFill/>
-          <a:ln w="25400">
-            <a:solidFill>
-              <a:schemeClr val="accent6"/>
-            </a:solidFill>
-            <a:prstDash val="solid"/>
-          </a:ln>
-        </p:spPr>
-      </p:sp>
-      <p:sp>
-        <p:nvSpPr>
-          <p:cNvPr id="4" name="NEXT dot"/>
-          <p:cNvSpPr/>
-          <p:nvPr/>
-        </p:nvSpPr>
-        <p:spPr>
-          <a:xfrm>
-            <a:off x="731520" y="1719072"/>
-            <a:ext cx="310896" cy="310896"/>
-          </a:xfrm>
-          <a:prstGeom prst="ellipse">
-            <a:avLst/>
-          </a:prstGeom>
-          <a:solidFill>
-            <a:schemeClr val="accent2"/>
-          </a:solidFill>
-          <a:ln w="38100">
-            <a:solidFill>
-              <a:schemeClr val="tx1"/>
-            </a:solidFill>
-            <a:prstDash val="solid"/>
-          </a:ln>
-        </p:spPr>
-      </p:sp>
-      <p:sp>
-        <p:nvSpPr>
-          <p:cNvPr id="5" name="NEXT label"/>
-          <p:cNvSpPr txBox="1"/>
-          <p:nvPr/>
-        </p:nvSpPr>
-        <p:spPr>
-          <a:xfrm>
-            <a:off x="1115568" y="1691640"/>
-            <a:ext cx="1051560" cy="365760"/>
-          </a:xfrm>
-          <a:prstGeom prst="rect">
-            <a:avLst/>
-          </a:prstGeom>
-          <a:solidFill>
-            <a:schemeClr val="tx1"/>
-          </a:solidFill>
-          <a:ln/>
-        </p:spPr>
-        <p:txBody>
-          <a:bodyPr wrap="square" lIns="0" tIns="76200" rIns="0" bIns="0" rtlCol="0" anchor="ctr"/>
-          <a:lstStyle/>
-          <a:p>
-            <a:pPr indent="0" marL="0">
-              <a:buNone/>
-            </a:pPr>
-            <a:r>
-              <a:rPr lang="en-US" sz="1300" b="1" spc="200" kern="0" dirty="0">
-                <a:solidFill>
-                  <a:schemeClr val="accent2"/>
-                </a:solidFill>
-              </a:rPr>
-              <a:t>NEXT</a:t>
-            </a:r>
-            <a:endParaRPr lang="en-US" sz="1300" dirty="0"/>
-          </a:p>
-        </p:txBody>
-      </p:sp>
-      <p:sp>
-        <p:nvSpPr>
-          <p:cNvPr id="6" name="Fidelity layer card"/>
-          <p:cNvSpPr/>
-          <p:nvPr/>
-        </p:nvSpPr>
-        <p:spPr>
-          <a:xfrm>
-            <a:off x="548640" y="2377440"/>
-            <a:ext cx="3474720" cy="3291840"/>
+            <a:off x="548640" y="1463040"/>
+            <a:ext cx="3474720" cy="2194560"/>
           </a:xfrm>
           <a:prstGeom prst="roundRect">
             <a:avLst>
-              <a:gd name="adj" fmla="val 3889"/>
+              <a:gd name="adj" fmla="val 5833"/>
             </a:avLst>
           </a:prstGeom>
           <a:solidFill>
@@ -2546,14 +2550,60 @@
       </p:sp>
       <p:sp>
         <p:nvSpPr>
-          <p:cNvPr id="7" name="Fidelity layer"/>
+          <p:cNvPr id="4" name="FiAlertTriangle circle"/>
+          <p:cNvSpPr/>
+          <p:nvPr/>
+        </p:nvSpPr>
+        <p:spPr>
+          <a:xfrm>
+            <a:off x="822960" y="1737360"/>
+            <a:ext cx="502920" cy="502920"/>
+          </a:xfrm>
+          <a:prstGeom prst="ellipse">
+            <a:avLst/>
+          </a:prstGeom>
+          <a:solidFill>
+            <a:schemeClr val="accent1">
+              <a:alpha val="18000"/>
+            </a:schemeClr>
+          </a:solidFill>
+          <a:ln/>
+        </p:spPr>
+      </p:sp>
+      <p:pic>
+        <p:nvPicPr>
+          <p:cNvPr id="5" name="FiAlertTriangle icon" descr="preencoded.png">    </p:cNvPr>
+          <p:cNvPicPr>
+            <a:picLocks noChangeAspect="1"/>
+          </p:cNvPicPr>
+          <p:nvPr/>
+        </p:nvPicPr>
+        <p:blipFill>
+          <a:blip r:embed="rId1"/>
+          <a:stretch>
+            <a:fillRect/>
+          </a:stretch>
+        </p:blipFill>
+        <p:spPr>
+          <a:xfrm>
+            <a:off x="953719" y="1868119"/>
+            <a:ext cx="241402" cy="241402"/>
+          </a:xfrm>
+          <a:prstGeom prst="rect">
+            <a:avLst/>
+          </a:prstGeom>
+        </p:spPr>
+      </p:pic>
+      <p:sp>
+        <p:nvSpPr>
+          <p:cNvPr id="6" name="Vocabulary gaps"/>
           <p:cNvSpPr txBox="1"/>
           <p:nvPr/>
         </p:nvSpPr>
         <p:spPr>
           <a:xfrm>
-            <a:off x="868680" y="2606040"/>
-            <a:ext cx="2834640" cy="457200"/>
+            <a:off x="1463040" y="1737360"/>
+            <a:ext cx="2423160" cy="502920"/>
           </a:xfrm>
           <a:prstGeom prst="rect">
             <a:avLst/>
@@ -2569,27 +2619,27 @@
               <a:buNone/>
             </a:pPr>
             <a:r>
-              <a:rPr lang="en-US" sz="2000" b="1" dirty="0">
+              <a:rPr lang="en-US" sz="1700" b="1" dirty="0">
                 <a:solidFill>
                   <a:schemeClr val="bg2"/>
                 </a:solidFill>
               </a:rPr>
-              <a:t>Fidelity layer</a:t>
-            </a:r>
-            <a:endParaRPr lang="en-US" sz="2000" dirty="0"/>
-          </a:p>
-        </p:txBody>
-      </p:sp>
-      <p:sp>
-        <p:nvSpPr>
-          <p:cNvPr id="8" name="Fidelity layer body"/>
+              <a:t>Vocabulary gaps</a:t>
+            </a:r>
+            <a:endParaRPr lang="en-US" sz="1700" dirty="0"/>
+          </a:p>
+        </p:txBody>
+      </p:sp>
+      <p:sp>
+        <p:nvSpPr>
+          <p:cNvPr id="7" name="Vocabulary gaps body"/>
           <p:cNvSpPr txBox="1"/>
           <p:nvPr/>
         </p:nvSpPr>
         <p:spPr>
           <a:xfrm>
-            <a:off x="868680" y="3154680"/>
-            <a:ext cx="2880360" cy="2377440"/>
+            <a:off x="822960" y="2423160"/>
+            <a:ext cx="2971800" cy="1143000"/>
           </a:xfrm>
           <a:prstGeom prst="rect">
             <a:avLst/>
@@ -2605,94 +2655,31 @@
               <a:buNone/>
             </a:pPr>
             <a:r>
-              <a:rPr lang="en-US" sz="1700" dirty="0">
+              <a:rPr lang="en-US" sz="1400" dirty="0">
                 <a:solidFill>
                   <a:schemeClr val="accent5"/>
                 </a:solidFill>
               </a:rPr>
-              <a:t>Pull exact fields (coordinates, times, names) out of the note, pack them under the shared key, and let the model write only the small talk. Target: 98%+ exact recovery.</a:t>
-            </a:r>
-            <a:endParaRPr lang="en-US" sz="1700" dirty="0"/>
-          </a:p>
-        </p:txBody>
-      </p:sp>
-      <p:sp>
-        <p:nvSpPr>
-          <p:cNvPr id="9" name="THEN dot"/>
+              <a:t>Topic words outside the shared codebook can leak into the cover (“choir practice” got through once).</a:t>
+            </a:r>
+            <a:endParaRPr lang="en-US" sz="1400" dirty="0"/>
+          </a:p>
+        </p:txBody>
+      </p:sp>
+      <p:sp>
+        <p:nvSpPr>
+          <p:cNvPr id="8" name="Paraphrase drift card"/>
           <p:cNvSpPr/>
           <p:nvPr/>
         </p:nvSpPr>
         <p:spPr>
           <a:xfrm>
-            <a:off x="4526280" y="1719072"/>
-            <a:ext cx="310896" cy="310896"/>
-          </a:xfrm>
-          <a:prstGeom prst="ellipse">
-            <a:avLst/>
-          </a:prstGeom>
-          <a:solidFill>
-            <a:schemeClr val="accent1"/>
-          </a:solidFill>
-          <a:ln w="38100">
-            <a:solidFill>
-              <a:schemeClr val="tx1"/>
-            </a:solidFill>
-            <a:prstDash val="solid"/>
-          </a:ln>
-        </p:spPr>
-      </p:sp>
-      <p:sp>
-        <p:nvSpPr>
-          <p:cNvPr id="10" name="THEN label"/>
-          <p:cNvSpPr txBox="1"/>
-          <p:nvPr/>
-        </p:nvSpPr>
-        <p:spPr>
-          <a:xfrm>
-            <a:off x="4910328" y="1691640"/>
-            <a:ext cx="1051560" cy="365760"/>
-          </a:xfrm>
-          <a:prstGeom prst="rect">
-            <a:avLst/>
-          </a:prstGeom>
-          <a:solidFill>
-            <a:schemeClr val="tx1"/>
-          </a:solidFill>
-          <a:ln/>
-        </p:spPr>
-        <p:txBody>
-          <a:bodyPr wrap="square" lIns="0" tIns="76200" rIns="0" bIns="0" rtlCol="0" anchor="ctr"/>
-          <a:lstStyle/>
-          <a:p>
-            <a:pPr indent="0" marL="0">
-              <a:buNone/>
-            </a:pPr>
-            <a:r>
-              <a:rPr lang="en-US" sz="1300" b="1" spc="200" kern="0" dirty="0">
-                <a:solidFill>
-                  <a:schemeClr val="accent1"/>
-                </a:solidFill>
-              </a:rPr>
-              <a:t>THEN</a:t>
-            </a:r>
-            <a:endParaRPr lang="en-US" sz="1300" dirty="0"/>
-          </a:p>
-        </p:txBody>
-      </p:sp>
-      <p:sp>
-        <p:nvSpPr>
-          <p:cNvPr id="11" name="Keyed and varied card"/>
-          <p:cNvSpPr/>
-          <p:nvPr/>
-        </p:nvSpPr>
-        <p:spPr>
-          <a:xfrm>
-            <a:off x="4343400" y="2377440"/>
-            <a:ext cx="3474720" cy="3291840"/>
+            <a:off x="4343400" y="1463040"/>
+            <a:ext cx="3474720" cy="2194560"/>
           </a:xfrm>
           <a:prstGeom prst="roundRect">
             <a:avLst>
-              <a:gd name="adj" fmla="val 3889"/>
+              <a:gd name="adj" fmla="val 5833"/>
             </a:avLst>
           </a:prstGeom>
           <a:solidFill>
@@ -2708,14 +2695,60 @@
       </p:sp>
       <p:sp>
         <p:nvSpPr>
-          <p:cNvPr id="12" name="Keyed and varied"/>
+          <p:cNvPr id="9" name="FiAlertTriangle circle"/>
+          <p:cNvSpPr/>
+          <p:nvPr/>
+        </p:nvSpPr>
+        <p:spPr>
+          <a:xfrm>
+            <a:off x="4617720" y="1737360"/>
+            <a:ext cx="502920" cy="502920"/>
+          </a:xfrm>
+          <a:prstGeom prst="ellipse">
+            <a:avLst/>
+          </a:prstGeom>
+          <a:solidFill>
+            <a:schemeClr val="accent1">
+              <a:alpha val="18000"/>
+            </a:schemeClr>
+          </a:solidFill>
+          <a:ln/>
+        </p:spPr>
+      </p:sp>
+      <p:pic>
+        <p:nvPicPr>
+          <p:cNvPr id="10" name="FiAlertTriangle icon" descr="preencoded.png">    </p:cNvPr>
+          <p:cNvPicPr>
+            <a:picLocks noChangeAspect="1"/>
+          </p:cNvPicPr>
+          <p:nvPr/>
+        </p:nvPicPr>
+        <p:blipFill>
+          <a:blip r:embed="rId2"/>
+          <a:stretch>
+            <a:fillRect/>
+          </a:stretch>
+        </p:blipFill>
+        <p:spPr>
+          <a:xfrm>
+            <a:off x="4748479" y="1868119"/>
+            <a:ext cx="241402" cy="241402"/>
+          </a:xfrm>
+          <a:prstGeom prst="rect">
+            <a:avLst/>
+          </a:prstGeom>
+        </p:spPr>
+      </p:pic>
+      <p:sp>
+        <p:nvSpPr>
+          <p:cNvPr id="11" name="Paraphrase drift"/>
           <p:cNvSpPr txBox="1"/>
           <p:nvPr/>
         </p:nvSpPr>
         <p:spPr>
           <a:xfrm>
-            <a:off x="4663440" y="2606040"/>
-            <a:ext cx="2834640" cy="457200"/>
+            <a:off x="5257800" y="1737360"/>
+            <a:ext cx="2423160" cy="502920"/>
           </a:xfrm>
           <a:prstGeom prst="rect">
             <a:avLst/>
@@ -2731,27 +2764,27 @@
               <a:buNone/>
             </a:pPr>
             <a:r>
-              <a:rPr lang="en-US" sz="2000" b="1" dirty="0">
+              <a:rPr lang="en-US" sz="1700" b="1" dirty="0">
                 <a:solidFill>
                   <a:schemeClr val="bg2"/>
                 </a:solidFill>
               </a:rPr>
-              <a:t>Keyed and varied</a:t>
-            </a:r>
-            <a:endParaRPr lang="en-US" sz="2000" dirty="0"/>
-          </a:p>
-        </p:txBody>
-      </p:sp>
-      <p:sp>
-        <p:nvSpPr>
-          <p:cNvPr id="13" name="Keyed and varied body"/>
+              <a:t>Paraphrase drift</a:t>
+            </a:r>
+            <a:endParaRPr lang="en-US" sz="1700" dirty="0"/>
+          </a:p>
+        </p:txBody>
+      </p:sp>
+      <p:sp>
+        <p:nvSpPr>
+          <p:cNvPr id="12" name="Paraphrase drift body"/>
           <p:cNvSpPr txBox="1"/>
           <p:nvPr/>
         </p:nvSpPr>
         <p:spPr>
           <a:xfrm>
-            <a:off x="4663440" y="3154680"/>
-            <a:ext cx="2880360" cy="2377440"/>
+            <a:off x="4617720" y="2423160"/>
+            <a:ext cx="2971800" cy="1143000"/>
           </a:xfrm>
           <a:prstGeom prst="rect">
             <a:avLst/>
@@ -2767,94 +2800,31 @@
               <a:buNone/>
             </a:pPr>
             <a:r>
-              <a:rPr lang="en-US" sz="1700" dirty="0">
+              <a:rPr lang="en-US" sz="1400" dirty="0">
                 <a:solidFill>
                   <a:schemeClr val="accent5"/>
                 </a:solidFill>
               </a:rPr>
-              <a:t>Per-user codebooks derived from the key, so a seized prompt decodes nothing. Key-seeded randomness so a note never yields the same cover twice. A real benign-ness scorer.</a:t>
-            </a:r>
-            <a:endParaRPr lang="en-US" sz="1700" dirty="0"/>
-          </a:p>
-        </p:txBody>
-      </p:sp>
-      <p:sp>
-        <p:nvSpPr>
-          <p:cNvPr id="14" name="LATER dot"/>
+              <a:t>Times can shift (1705 came back wrong) and places get invented (“road work”). We score fields, not topic.</a:t>
+            </a:r>
+            <a:endParaRPr lang="en-US" sz="1400" dirty="0"/>
+          </a:p>
+        </p:txBody>
+      </p:sp>
+      <p:sp>
+        <p:nvSpPr>
+          <p:cNvPr id="13" name="Patterns card"/>
           <p:cNvSpPr/>
           <p:nvPr/>
         </p:nvSpPr>
         <p:spPr>
           <a:xfrm>
-            <a:off x="8321040" y="1719072"/>
-            <a:ext cx="310896" cy="310896"/>
-          </a:xfrm>
-          <a:prstGeom prst="ellipse">
-            <a:avLst/>
-          </a:prstGeom>
-          <a:solidFill>
-            <a:schemeClr val="accent3"/>
-          </a:solidFill>
-          <a:ln w="38100">
-            <a:solidFill>
-              <a:schemeClr val="tx1"/>
-            </a:solidFill>
-            <a:prstDash val="solid"/>
-          </a:ln>
-        </p:spPr>
-      </p:sp>
-      <p:sp>
-        <p:nvSpPr>
-          <p:cNvPr id="15" name="LATER label"/>
-          <p:cNvSpPr txBox="1"/>
-          <p:nvPr/>
-        </p:nvSpPr>
-        <p:spPr>
-          <a:xfrm>
-            <a:off x="8705088" y="1691640"/>
-            <a:ext cx="1051560" cy="365760"/>
-          </a:xfrm>
-          <a:prstGeom prst="rect">
-            <a:avLst/>
-          </a:prstGeom>
-          <a:solidFill>
-            <a:schemeClr val="tx1"/>
-          </a:solidFill>
-          <a:ln/>
-        </p:spPr>
-        <p:txBody>
-          <a:bodyPr wrap="square" lIns="0" tIns="76200" rIns="0" bIns="0" rtlCol="0" anchor="ctr"/>
-          <a:lstStyle/>
-          <a:p>
-            <a:pPr indent="0" marL="0">
-              <a:buNone/>
-            </a:pPr>
-            <a:r>
-              <a:rPr lang="en-US" sz="1300" b="1" spc="200" kern="0" dirty="0">
-                <a:solidFill>
-                  <a:schemeClr val="accent3"/>
-                </a:solidFill>
-              </a:rPr>
-              <a:t>LATER</a:t>
-            </a:r>
-            <a:endParaRPr lang="en-US" sz="1300" dirty="0"/>
-          </a:p>
-        </p:txBody>
-      </p:sp>
-      <p:sp>
-        <p:nvSpPr>
-          <p:cNvPr id="16" name="Blend in anywhere card"/>
-          <p:cNvSpPr/>
-          <p:nvPr/>
-        </p:nvSpPr>
-        <p:spPr>
-          <a:xfrm>
-            <a:off x="8138160" y="2377440"/>
-            <a:ext cx="3474720" cy="3291840"/>
+            <a:off x="8138160" y="1463040"/>
+            <a:ext cx="3474720" cy="2194560"/>
           </a:xfrm>
           <a:prstGeom prst="roundRect">
             <a:avLst>
-              <a:gd name="adj" fmla="val 3889"/>
+              <a:gd name="adj" fmla="val 5833"/>
             </a:avLst>
           </a:prstGeom>
           <a:solidFill>
@@ -2870,14 +2840,60 @@
       </p:sp>
       <p:sp>
         <p:nvSpPr>
-          <p:cNvPr id="17" name="Blend in anywhere"/>
+          <p:cNvPr id="14" name="FiAlertTriangle circle"/>
+          <p:cNvSpPr/>
+          <p:nvPr/>
+        </p:nvSpPr>
+        <p:spPr>
+          <a:xfrm>
+            <a:off x="8412480" y="1737360"/>
+            <a:ext cx="502920" cy="502920"/>
+          </a:xfrm>
+          <a:prstGeom prst="ellipse">
+            <a:avLst/>
+          </a:prstGeom>
+          <a:solidFill>
+            <a:schemeClr val="accent1">
+              <a:alpha val="18000"/>
+            </a:schemeClr>
+          </a:solidFill>
+          <a:ln/>
+        </p:spPr>
+      </p:sp>
+      <p:pic>
+        <p:nvPicPr>
+          <p:cNvPr id="15" name="FiAlertTriangle icon" descr="preencoded.png">    </p:cNvPr>
+          <p:cNvPicPr>
+            <a:picLocks noChangeAspect="1"/>
+          </p:cNvPicPr>
+          <p:nvPr/>
+        </p:nvPicPr>
+        <p:blipFill>
+          <a:blip r:embed="rId3"/>
+          <a:stretch>
+            <a:fillRect/>
+          </a:stretch>
+        </p:blipFill>
+        <p:spPr>
+          <a:xfrm>
+            <a:off x="8543239" y="1868119"/>
+            <a:ext cx="241402" cy="241402"/>
+          </a:xfrm>
+          <a:prstGeom prst="rect">
+            <a:avLst/>
+          </a:prstGeom>
+        </p:spPr>
+      </p:pic>
+      <p:sp>
+        <p:nvSpPr>
+          <p:cNvPr id="16" name="Patterns"/>
           <p:cNvSpPr txBox="1"/>
           <p:nvPr/>
         </p:nvSpPr>
         <p:spPr>
           <a:xfrm>
-            <a:off x="8458200" y="2606040"/>
-            <a:ext cx="2834640" cy="457200"/>
+            <a:off x="9052560" y="1737360"/>
+            <a:ext cx="2423160" cy="502920"/>
           </a:xfrm>
           <a:prstGeom prst="rect">
             <a:avLst/>
@@ -2893,27 +2909,27 @@
               <a:buNone/>
             </a:pPr>
             <a:r>
-              <a:rPr lang="en-US" sz="2000" b="1" dirty="0">
+              <a:rPr lang="en-US" sz="1700" b="1" dirty="0">
                 <a:solidFill>
                   <a:schemeClr val="bg2"/>
                 </a:solidFill>
               </a:rPr>
-              <a:t>Blend in anywhere</a:t>
-            </a:r>
-            <a:endParaRPr lang="en-US" sz="2000" dirty="0"/>
-          </a:p>
-        </p:txBody>
-      </p:sp>
-      <p:sp>
-        <p:nvSpPr>
-          <p:cNvPr id="18" name="Blend in anywhere body"/>
+              <a:t>Patterns</a:t>
+            </a:r>
+            <a:endParaRPr lang="en-US" sz="1700" dirty="0"/>
+          </a:p>
+        </p:txBody>
+      </p:sp>
+      <p:sp>
+        <p:nvSpPr>
+          <p:cNvPr id="17" name="Patterns body"/>
           <p:cNvSpPr txBox="1"/>
           <p:nvPr/>
         </p:nvSpPr>
         <p:spPr>
           <a:xfrm>
-            <a:off x="8458200" y="3154680"/>
-            <a:ext cx="2880360" cy="2377440"/>
+            <a:off x="8412480" y="2423160"/>
+            <a:ext cx="2971800" cy="1143000"/>
           </a:xfrm>
           <a:prstGeom prst="rect">
             <a:avLst/>
@@ -2929,14 +2945,449 @@
               <a:buNone/>
             </a:pPr>
             <a:r>
-              <a:rPr lang="en-US" sz="1700" dirty="0">
+              <a:rPr lang="en-US" sz="1400" dirty="0">
                 <a:solidFill>
                   <a:schemeClr val="accent5"/>
                 </a:solidFill>
               </a:rPr>
-              <a:t>Multiple languages, covers shaped by real channel traffic, photo and caption carriers, and tests against an adversary who rewrites messages in transit.</a:t>
+              <a:t>Same note, same cover every time, and odd “gift codes” are a tell for a statistical analyst.</a:t>
+            </a:r>
+            <a:endParaRPr lang="en-US" sz="1400" dirty="0"/>
+          </a:p>
+        </p:txBody>
+      </p:sp>
+      <p:sp>
+        <p:nvSpPr>
+          <p:cNvPr id="18" name="The rules are static card"/>
+          <p:cNvSpPr/>
+          <p:nvPr/>
+        </p:nvSpPr>
+        <p:spPr>
+          <a:xfrm>
+            <a:off x="548640" y="3840480"/>
+            <a:ext cx="3474720" cy="2194560"/>
+          </a:xfrm>
+          <a:prstGeom prst="roundRect">
+            <a:avLst>
+              <a:gd name="adj" fmla="val 5833"/>
+            </a:avLst>
+          </a:prstGeom>
+          <a:solidFill>
+            <a:schemeClr val="tx2"/>
+          </a:solidFill>
+          <a:ln w="12700">
+            <a:solidFill>
+              <a:schemeClr val="accent6"/>
+            </a:solidFill>
+            <a:prstDash val="solid"/>
+          </a:ln>
+        </p:spPr>
+      </p:sp>
+      <p:sp>
+        <p:nvSpPr>
+          <p:cNvPr id="19" name="FiAlertTriangle circle"/>
+          <p:cNvSpPr/>
+          <p:nvPr/>
+        </p:nvSpPr>
+        <p:spPr>
+          <a:xfrm>
+            <a:off x="822960" y="4114800"/>
+            <a:ext cx="502920" cy="502920"/>
+          </a:xfrm>
+          <a:prstGeom prst="ellipse">
+            <a:avLst/>
+          </a:prstGeom>
+          <a:solidFill>
+            <a:schemeClr val="accent1">
+              <a:alpha val="18000"/>
+            </a:schemeClr>
+          </a:solidFill>
+          <a:ln/>
+        </p:spPr>
+      </p:sp>
+      <p:pic>
+        <p:nvPicPr>
+          <p:cNvPr id="20" name="FiAlertTriangle icon" descr="preencoded.png">    </p:cNvPr>
+          <p:cNvPicPr>
+            <a:picLocks noChangeAspect="1"/>
+          </p:cNvPicPr>
+          <p:nvPr/>
+        </p:nvPicPr>
+        <p:blipFill>
+          <a:blip r:embed="rId4"/>
+          <a:stretch>
+            <a:fillRect/>
+          </a:stretch>
+        </p:blipFill>
+        <p:spPr>
+          <a:xfrm>
+            <a:off x="953719" y="4245559"/>
+            <a:ext cx="241402" cy="241402"/>
+          </a:xfrm>
+          <a:prstGeom prst="rect">
+            <a:avLst/>
+          </a:prstGeom>
+        </p:spPr>
+      </p:pic>
+      <p:sp>
+        <p:nvSpPr>
+          <p:cNvPr id="21" name="The rules are static"/>
+          <p:cNvSpPr txBox="1"/>
+          <p:nvPr/>
+        </p:nvSpPr>
+        <p:spPr>
+          <a:xfrm>
+            <a:off x="1463040" y="4114800"/>
+            <a:ext cx="2423160" cy="502920"/>
+          </a:xfrm>
+          <a:prstGeom prst="rect">
+            <a:avLst/>
+          </a:prstGeom>
+          <a:noFill/>
+          <a:ln/>
+        </p:spPr>
+        <p:txBody>
+          <a:bodyPr wrap="square" lIns="0" tIns="0" rIns="0" bIns="0" rtlCol="0" anchor="ctr"/>
+          <a:lstStyle/>
+          <a:p>
+            <a:pPr indent="0" marL="0">
+              <a:buNone/>
+            </a:pPr>
+            <a:r>
+              <a:rPr lang="en-US" sz="1700" b="1" dirty="0">
+                <a:solidFill>
+                  <a:schemeClr val="bg2"/>
+                </a:solidFill>
+              </a:rPr>
+              <a:t>The rules are static</a:t>
             </a:r>
             <a:endParaRPr lang="en-US" sz="1700" dirty="0"/>
+          </a:p>
+        </p:txBody>
+      </p:sp>
+      <p:sp>
+        <p:nvSpPr>
+          <p:cNvPr id="22" name="The rules are static body"/>
+          <p:cNvSpPr txBox="1"/>
+          <p:nvPr/>
+        </p:nvSpPr>
+        <p:spPr>
+          <a:xfrm>
+            <a:off x="822960" y="4800600"/>
+            <a:ext cx="2971800" cy="1143000"/>
+          </a:xfrm>
+          <a:prstGeom prst="rect">
+            <a:avLst/>
+          </a:prstGeom>
+          <a:noFill/>
+          <a:ln/>
+        </p:spPr>
+        <p:txBody>
+          <a:bodyPr wrap="square" lIns="0" tIns="0" rIns="0" bIns="0" rtlCol="0" anchor="t"/>
+          <a:lstStyle/>
+          <a:p>
+            <a:pPr indent="0" marL="0">
+              <a:buNone/>
+            </a:pPr>
+            <a:r>
+              <a:rPr lang="en-US" sz="1400" dirty="0">
+                <a:solidFill>
+                  <a:schemeClr val="accent5"/>
+                </a:solidFill>
+              </a:rPr>
+              <a:t>Seize the prompt and you can decode everything sent with it. Per-user keyed codebooks fix this.</a:t>
+            </a:r>
+            <a:endParaRPr lang="en-US" sz="1400" dirty="0"/>
+          </a:p>
+        </p:txBody>
+      </p:sp>
+      <p:sp>
+        <p:nvSpPr>
+          <p:cNvPr id="23" name="Faces can be photographed card"/>
+          <p:cNvSpPr/>
+          <p:nvPr/>
+        </p:nvSpPr>
+        <p:spPr>
+          <a:xfrm>
+            <a:off x="4343400" y="3840480"/>
+            <a:ext cx="3474720" cy="2194560"/>
+          </a:xfrm>
+          <a:prstGeom prst="roundRect">
+            <a:avLst>
+              <a:gd name="adj" fmla="val 5833"/>
+            </a:avLst>
+          </a:prstGeom>
+          <a:solidFill>
+            <a:schemeClr val="tx2"/>
+          </a:solidFill>
+          <a:ln w="12700">
+            <a:solidFill>
+              <a:schemeClr val="accent6"/>
+            </a:solidFill>
+            <a:prstDash val="solid"/>
+          </a:ln>
+        </p:spPr>
+      </p:sp>
+      <p:sp>
+        <p:nvSpPr>
+          <p:cNvPr id="24" name="FiAlertTriangle circle"/>
+          <p:cNvSpPr/>
+          <p:nvPr/>
+        </p:nvSpPr>
+        <p:spPr>
+          <a:xfrm>
+            <a:off x="4617720" y="4114800"/>
+            <a:ext cx="502920" cy="502920"/>
+          </a:xfrm>
+          <a:prstGeom prst="ellipse">
+            <a:avLst/>
+          </a:prstGeom>
+          <a:solidFill>
+            <a:schemeClr val="accent1">
+              <a:alpha val="18000"/>
+            </a:schemeClr>
+          </a:solidFill>
+          <a:ln/>
+        </p:spPr>
+      </p:sp>
+      <p:pic>
+        <p:nvPicPr>
+          <p:cNvPr id="25" name="FiAlertTriangle icon" descr="preencoded.png">    </p:cNvPr>
+          <p:cNvPicPr>
+            <a:picLocks noChangeAspect="1"/>
+          </p:cNvPicPr>
+          <p:nvPr/>
+        </p:nvPicPr>
+        <p:blipFill>
+          <a:blip r:embed="rId5"/>
+          <a:stretch>
+            <a:fillRect/>
+          </a:stretch>
+        </p:blipFill>
+        <p:spPr>
+          <a:xfrm>
+            <a:off x="4748479" y="4245559"/>
+            <a:ext cx="241402" cy="241402"/>
+          </a:xfrm>
+          <a:prstGeom prst="rect">
+            <a:avLst/>
+          </a:prstGeom>
+        </p:spPr>
+      </p:pic>
+      <p:sp>
+        <p:nvSpPr>
+          <p:cNvPr id="26" name="Faces can be photographed"/>
+          <p:cNvSpPr txBox="1"/>
+          <p:nvPr/>
+        </p:nvSpPr>
+        <p:spPr>
+          <a:xfrm>
+            <a:off x="5257800" y="4114800"/>
+            <a:ext cx="2423160" cy="502920"/>
+          </a:xfrm>
+          <a:prstGeom prst="rect">
+            <a:avLst/>
+          </a:prstGeom>
+          <a:noFill/>
+          <a:ln/>
+        </p:spPr>
+        <p:txBody>
+          <a:bodyPr wrap="square" lIns="0" tIns="0" rIns="0" bIns="0" rtlCol="0" anchor="ctr"/>
+          <a:lstStyle/>
+          <a:p>
+            <a:pPr indent="0" marL="0">
+              <a:buNone/>
+            </a:pPr>
+            <a:r>
+              <a:rPr lang="en-US" sz="1700" b="1" dirty="0">
+                <a:solidFill>
+                  <a:schemeClr val="bg2"/>
+                </a:solidFill>
+              </a:rPr>
+              <a:t>Faces can be photographed</a:t>
+            </a:r>
+            <a:endParaRPr lang="en-US" sz="1700" dirty="0"/>
+          </a:p>
+        </p:txBody>
+      </p:sp>
+      <p:sp>
+        <p:nvSpPr>
+          <p:cNvPr id="27" name="Faces can be photographed body"/>
+          <p:cNvSpPr txBox="1"/>
+          <p:nvPr/>
+        </p:nvSpPr>
+        <p:spPr>
+          <a:xfrm>
+            <a:off x="4617720" y="4800600"/>
+            <a:ext cx="2971800" cy="1143000"/>
+          </a:xfrm>
+          <a:prstGeom prst="rect">
+            <a:avLst/>
+          </a:prstGeom>
+          <a:noFill/>
+          <a:ln/>
+        </p:spPr>
+        <p:txBody>
+          <a:bodyPr wrap="square" lIns="0" tIns="0" rIns="0" bIns="0" rtlCol="0" anchor="t"/>
+          <a:lstStyle/>
+          <a:p>
+            <a:pPr indent="0" marL="0">
+              <a:buNone/>
+            </a:pPr>
+            <a:r>
+              <a:rPr lang="en-US" sz="1400" dirty="0">
+                <a:solidFill>
+                  <a:schemeClr val="accent5"/>
+                </a:solidFill>
+              </a:rPr>
+              <a:t>No liveness check yet: a good photo of you could open the vault. Next: a blink or head-turn check.</a:t>
+            </a:r>
+            <a:endParaRPr lang="en-US" sz="1400" dirty="0"/>
+          </a:p>
+        </p:txBody>
+      </p:sp>
+      <p:sp>
+        <p:nvSpPr>
+          <p:cNvPr id="28" name="Faces can be compelled card"/>
+          <p:cNvSpPr/>
+          <p:nvPr/>
+        </p:nvSpPr>
+        <p:spPr>
+          <a:xfrm>
+            <a:off x="8138160" y="3840480"/>
+            <a:ext cx="3474720" cy="2194560"/>
+          </a:xfrm>
+          <a:prstGeom prst="roundRect">
+            <a:avLst>
+              <a:gd name="adj" fmla="val 5833"/>
+            </a:avLst>
+          </a:prstGeom>
+          <a:solidFill>
+            <a:schemeClr val="tx2"/>
+          </a:solidFill>
+          <a:ln w="12700">
+            <a:solidFill>
+              <a:schemeClr val="accent6"/>
+            </a:solidFill>
+            <a:prstDash val="solid"/>
+          </a:ln>
+        </p:spPr>
+      </p:sp>
+      <p:sp>
+        <p:nvSpPr>
+          <p:cNvPr id="29" name="FiAlertTriangle circle"/>
+          <p:cNvSpPr/>
+          <p:nvPr/>
+        </p:nvSpPr>
+        <p:spPr>
+          <a:xfrm>
+            <a:off x="8412480" y="4114800"/>
+            <a:ext cx="502920" cy="502920"/>
+          </a:xfrm>
+          <a:prstGeom prst="ellipse">
+            <a:avLst/>
+          </a:prstGeom>
+          <a:solidFill>
+            <a:schemeClr val="accent1">
+              <a:alpha val="18000"/>
+            </a:schemeClr>
+          </a:solidFill>
+          <a:ln/>
+        </p:spPr>
+      </p:sp>
+      <p:pic>
+        <p:nvPicPr>
+          <p:cNvPr id="30" name="FiAlertTriangle icon" descr="preencoded.png">    </p:cNvPr>
+          <p:cNvPicPr>
+            <a:picLocks noChangeAspect="1"/>
+          </p:cNvPicPr>
+          <p:nvPr/>
+        </p:nvPicPr>
+        <p:blipFill>
+          <a:blip r:embed="rId6"/>
+          <a:stretch>
+            <a:fillRect/>
+          </a:stretch>
+        </p:blipFill>
+        <p:spPr>
+          <a:xfrm>
+            <a:off x="8543239" y="4245559"/>
+            <a:ext cx="241402" cy="241402"/>
+          </a:xfrm>
+          <a:prstGeom prst="rect">
+            <a:avLst/>
+          </a:prstGeom>
+        </p:spPr>
+      </p:pic>
+      <p:sp>
+        <p:nvSpPr>
+          <p:cNvPr id="31" name="Faces can be compelled"/>
+          <p:cNvSpPr txBox="1"/>
+          <p:nvPr/>
+        </p:nvSpPr>
+        <p:spPr>
+          <a:xfrm>
+            <a:off x="9052560" y="4114800"/>
+            <a:ext cx="2423160" cy="502920"/>
+          </a:xfrm>
+          <a:prstGeom prst="rect">
+            <a:avLst/>
+          </a:prstGeom>
+          <a:noFill/>
+          <a:ln/>
+        </p:spPr>
+        <p:txBody>
+          <a:bodyPr wrap="square" lIns="0" tIns="0" rIns="0" bIns="0" rtlCol="0" anchor="ctr"/>
+          <a:lstStyle/>
+          <a:p>
+            <a:pPr indent="0" marL="0">
+              <a:buNone/>
+            </a:pPr>
+            <a:r>
+              <a:rPr lang="en-US" sz="1700" b="1" dirty="0">
+                <a:solidFill>
+                  <a:schemeClr val="bg2"/>
+                </a:solidFill>
+              </a:rPr>
+              <a:t>Faces can be compelled</a:t>
+            </a:r>
+            <a:endParaRPr lang="en-US" sz="1700" dirty="0"/>
+          </a:p>
+        </p:txBody>
+      </p:sp>
+      <p:sp>
+        <p:nvSpPr>
+          <p:cNvPr id="32" name="Faces can be compelled body"/>
+          <p:cNvSpPr txBox="1"/>
+          <p:nvPr/>
+        </p:nvSpPr>
+        <p:spPr>
+          <a:xfrm>
+            <a:off x="8412480" y="4800600"/>
+            <a:ext cx="2971800" cy="1143000"/>
+          </a:xfrm>
+          <a:prstGeom prst="rect">
+            <a:avLst/>
+          </a:prstGeom>
+          <a:noFill/>
+          <a:ln/>
+        </p:spPr>
+        <p:txBody>
+          <a:bodyPr wrap="square" lIns="0" tIns="0" rIns="0" bIns="0" rtlCol="0" anchor="t"/>
+          <a:lstStyle/>
+          <a:p>
+            <a:pPr indent="0" marL="0">
+              <a:buNone/>
+            </a:pPr>
+            <a:r>
+              <a:rPr lang="en-US" sz="1400" dirty="0">
+                <a:solidFill>
+                  <a:schemeClr val="accent5"/>
+                </a:solidFill>
+              </a:rPr>
+              <a:t>In detention your face is easy to force. The optional PIN is what still protects the key.</a:t>
+            </a:r>
+            <a:endParaRPr lang="en-US" sz="1400" dirty="0"/>
           </a:p>
         </p:txBody>
       </p:sp>
@@ -3042,91 +3493,135 @@
                   <a:schemeClr val="bg2"/>
                 </a:solidFill>
               </a:rPr>
-              <a:t>The end state: a small keyed model in every pocket</a:t>
+              <a:t>Roadmap: exact, keyed, then everywhere</a:t>
             </a:r>
             <a:endParaRPr lang="en-US" sz="3200" dirty="0"/>
           </a:p>
         </p:txBody>
       </p:sp>
-      <p:pic>
-        <p:nvPicPr>
-          <p:cNvPr id="3" name="on-device chip image" descr="C:\Users\pulic\SprintHack-ND\assets\us-chip-circuit.jpg">    </p:cNvPr>
-          <p:cNvPicPr>
-            <a:picLocks noChangeAspect="1"/>
-          </p:cNvPicPr>
-          <p:nvPr/>
-        </p:nvPicPr>
-        <p:blipFill>
-          <a:blip r:embed="rId1"/>
-          <a:srcRect l="0" r="0" t="0" b="0"/>
-          <a:stretch/>
-        </p:blipFill>
-        <p:spPr>
-          <a:xfrm>
-            <a:off x="7434072" y="1463040"/>
-            <a:ext cx="4206240" cy="4526280"/>
-          </a:xfrm>
-          <a:prstGeom prst="rect">
-            <a:avLst/>
-          </a:prstGeom>
-        </p:spPr>
-      </p:pic>
-      <p:sp>
-        <p:nvSpPr>
-          <p:cNvPr id="4" name="FiSmartphone circle"/>
+      <p:sp>
+        <p:nvSpPr>
+          <p:cNvPr id="3" name="timeline"/>
           <p:cNvSpPr/>
           <p:nvPr/>
         </p:nvSpPr>
         <p:spPr>
           <a:xfrm>
-            <a:off x="548640" y="1508760"/>
-            <a:ext cx="566928" cy="566928"/>
+            <a:off x="868680" y="1874520"/>
+            <a:ext cx="10424160" cy="0"/>
+          </a:xfrm>
+          <a:prstGeom prst="line">
+            <a:avLst/>
+          </a:prstGeom>
+          <a:noFill/>
+          <a:ln w="25400">
+            <a:solidFill>
+              <a:schemeClr val="accent6"/>
+            </a:solidFill>
+            <a:prstDash val="solid"/>
+          </a:ln>
+        </p:spPr>
+      </p:sp>
+      <p:sp>
+        <p:nvSpPr>
+          <p:cNvPr id="4" name="NEXT dot"/>
+          <p:cNvSpPr/>
+          <p:nvPr/>
+        </p:nvSpPr>
+        <p:spPr>
+          <a:xfrm>
+            <a:off x="731520" y="1719072"/>
+            <a:ext cx="310896" cy="310896"/>
           </a:xfrm>
           <a:prstGeom prst="ellipse">
             <a:avLst/>
           </a:prstGeom>
           <a:solidFill>
-            <a:schemeClr val="accent2">
-              <a:alpha val="18000"/>
-            </a:schemeClr>
+            <a:schemeClr val="accent2"/>
           </a:solidFill>
-          <a:ln/>
-        </p:spPr>
-      </p:sp>
-      <p:pic>
-        <p:nvPicPr>
-          <p:cNvPr id="5" name="FiSmartphone icon" descr="preencoded.png">    </p:cNvPr>
-          <p:cNvPicPr>
-            <a:picLocks noChangeAspect="1"/>
-          </p:cNvPicPr>
-          <p:nvPr/>
-        </p:nvPicPr>
-        <p:blipFill>
-          <a:blip r:embed="rId2"/>
-          <a:stretch>
-            <a:fillRect/>
-          </a:stretch>
-        </p:blipFill>
-        <p:spPr>
-          <a:xfrm>
-            <a:off x="696041" y="1656161"/>
-            <a:ext cx="272125" cy="272125"/>
-          </a:xfrm>
-          <a:prstGeom prst="rect">
-            <a:avLst/>
-          </a:prstGeom>
-        </p:spPr>
-      </p:pic>
-      <p:sp>
-        <p:nvSpPr>
-          <p:cNvPr id="6" name="On-device header"/>
+          <a:ln w="38100">
+            <a:solidFill>
+              <a:schemeClr val="tx1"/>
+            </a:solidFill>
+            <a:prstDash val="solid"/>
+          </a:ln>
+        </p:spPr>
+      </p:sp>
+      <p:sp>
+        <p:nvSpPr>
+          <p:cNvPr id="5" name="NEXT label"/>
           <p:cNvSpPr txBox="1"/>
           <p:nvPr/>
         </p:nvSpPr>
         <p:spPr>
           <a:xfrm>
-            <a:off x="1325880" y="1490472"/>
-            <a:ext cx="5623560" cy="329184"/>
+            <a:off x="1115568" y="1691640"/>
+            <a:ext cx="1051560" cy="365760"/>
+          </a:xfrm>
+          <a:prstGeom prst="rect">
+            <a:avLst/>
+          </a:prstGeom>
+          <a:solidFill>
+            <a:schemeClr val="tx1"/>
+          </a:solidFill>
+          <a:ln/>
+        </p:spPr>
+        <p:txBody>
+          <a:bodyPr wrap="square" lIns="0" tIns="76200" rIns="0" bIns="0" rtlCol="0" anchor="ctr"/>
+          <a:lstStyle/>
+          <a:p>
+            <a:pPr indent="0" marL="0">
+              <a:buNone/>
+            </a:pPr>
+            <a:r>
+              <a:rPr lang="en-US" sz="1300" b="1" spc="200" kern="0" dirty="0">
+                <a:solidFill>
+                  <a:schemeClr val="accent2"/>
+                </a:solidFill>
+              </a:rPr>
+              <a:t>NEXT</a:t>
+            </a:r>
+            <a:endParaRPr lang="en-US" sz="1300" dirty="0"/>
+          </a:p>
+        </p:txBody>
+      </p:sp>
+      <p:sp>
+        <p:nvSpPr>
+          <p:cNvPr id="6" name="Fidelity layer card"/>
+          <p:cNvSpPr/>
+          <p:nvPr/>
+        </p:nvSpPr>
+        <p:spPr>
+          <a:xfrm>
+            <a:off x="548640" y="2377440"/>
+            <a:ext cx="3474720" cy="3291840"/>
+          </a:xfrm>
+          <a:prstGeom prst="roundRect">
+            <a:avLst>
+              <a:gd name="adj" fmla="val 3889"/>
+            </a:avLst>
+          </a:prstGeom>
+          <a:solidFill>
+            <a:schemeClr val="tx2"/>
+          </a:solidFill>
+          <a:ln w="12700">
+            <a:solidFill>
+              <a:schemeClr val="accent6"/>
+            </a:solidFill>
+            <a:prstDash val="solid"/>
+          </a:ln>
+        </p:spPr>
+      </p:sp>
+      <p:sp>
+        <p:nvSpPr>
+          <p:cNvPr id="7" name="Fidelity layer"/>
+          <p:cNvSpPr txBox="1"/>
+          <p:nvPr/>
+        </p:nvSpPr>
+        <p:spPr>
+          <a:xfrm>
+            <a:off x="868680" y="2606040"/>
+            <a:ext cx="2834640" cy="457200"/>
           </a:xfrm>
           <a:prstGeom prst="rect">
             <a:avLst/>
@@ -3142,27 +3637,27 @@
               <a:buNone/>
             </a:pPr>
             <a:r>
-              <a:rPr lang="en-US" sz="1800" b="1" dirty="0">
+              <a:rPr lang="en-US" sz="2000" b="1" dirty="0">
                 <a:solidFill>
                   <a:schemeClr val="bg2"/>
                 </a:solidFill>
               </a:rPr>
-              <a:t>On-device</a:t>
-            </a:r>
-            <a:endParaRPr lang="en-US" sz="1800" dirty="0"/>
-          </a:p>
-        </p:txBody>
-      </p:sp>
-      <p:sp>
-        <p:nvSpPr>
-          <p:cNvPr id="7" name="On-device body"/>
+              <a:t>Fidelity layer</a:t>
+            </a:r>
+            <a:endParaRPr lang="en-US" sz="2000" dirty="0"/>
+          </a:p>
+        </p:txBody>
+      </p:sp>
+      <p:sp>
+        <p:nvSpPr>
+          <p:cNvPr id="8" name="Fidelity layer body"/>
           <p:cNvSpPr txBox="1"/>
           <p:nvPr/>
         </p:nvSpPr>
         <p:spPr>
           <a:xfrm>
-            <a:off x="1325880" y="1837944"/>
-            <a:ext cx="5623560" cy="548640"/>
+            <a:off x="868680" y="3154680"/>
+            <a:ext cx="2880360" cy="2377440"/>
           </a:xfrm>
           <a:prstGeom prst="rect">
             <a:avLst/>
@@ -3178,73 +3673,117 @@
               <a:buNone/>
             </a:pPr>
             <a:r>
-              <a:rPr lang="en-US" sz="1500" dirty="0">
+              <a:rPr lang="en-US" sz="1700" dirty="0">
                 <a:solidFill>
                   <a:schemeClr val="accent5"/>
                 </a:solidFill>
               </a:rPr>
-              <a:t>Runs locally. Nothing leaves the phone except small talk.</a:t>
-            </a:r>
-            <a:endParaRPr lang="en-US" sz="1500" dirty="0"/>
-          </a:p>
-        </p:txBody>
-      </p:sp>
-      <p:sp>
-        <p:nvSpPr>
-          <p:cNvPr id="8" name="FiKey circle"/>
+              <a:t>Pull exact fields (coordinates, times, names) out of the note, pack them under the shared key, and let the model write only the small talk. Target: 98%+ exact recovery.</a:t>
+            </a:r>
+            <a:endParaRPr lang="en-US" sz="1700" dirty="0"/>
+          </a:p>
+        </p:txBody>
+      </p:sp>
+      <p:sp>
+        <p:nvSpPr>
+          <p:cNvPr id="9" name="THEN dot"/>
           <p:cNvSpPr/>
           <p:nvPr/>
         </p:nvSpPr>
         <p:spPr>
           <a:xfrm>
-            <a:off x="548640" y="2651760"/>
-            <a:ext cx="566928" cy="566928"/>
+            <a:off x="4526280" y="1719072"/>
+            <a:ext cx="310896" cy="310896"/>
           </a:xfrm>
           <a:prstGeom prst="ellipse">
             <a:avLst/>
           </a:prstGeom>
           <a:solidFill>
-            <a:schemeClr val="accent1">
-              <a:alpha val="18000"/>
-            </a:schemeClr>
+            <a:schemeClr val="accent1"/>
           </a:solidFill>
-          <a:ln/>
-        </p:spPr>
-      </p:sp>
-      <p:pic>
-        <p:nvPicPr>
-          <p:cNvPr id="9" name="FiKey icon" descr="preencoded.png">    </p:cNvPr>
-          <p:cNvPicPr>
-            <a:picLocks noChangeAspect="1"/>
-          </p:cNvPicPr>
-          <p:nvPr/>
-        </p:nvPicPr>
-        <p:blipFill>
-          <a:blip r:embed="rId3"/>
-          <a:stretch>
-            <a:fillRect/>
-          </a:stretch>
-        </p:blipFill>
-        <p:spPr>
-          <a:xfrm>
-            <a:off x="696041" y="2799161"/>
-            <a:ext cx="272125" cy="272125"/>
-          </a:xfrm>
-          <a:prstGeom prst="rect">
-            <a:avLst/>
-          </a:prstGeom>
-        </p:spPr>
-      </p:pic>
-      <p:sp>
-        <p:nvSpPr>
-          <p:cNvPr id="10" name="Keyed header"/>
+          <a:ln w="38100">
+            <a:solidFill>
+              <a:schemeClr val="tx1"/>
+            </a:solidFill>
+            <a:prstDash val="solid"/>
+          </a:ln>
+        </p:spPr>
+      </p:sp>
+      <p:sp>
+        <p:nvSpPr>
+          <p:cNvPr id="10" name="THEN label"/>
           <p:cNvSpPr txBox="1"/>
           <p:nvPr/>
         </p:nvSpPr>
         <p:spPr>
           <a:xfrm>
-            <a:off x="1325880" y="2633472"/>
-            <a:ext cx="5623560" cy="329184"/>
+            <a:off x="4910328" y="1691640"/>
+            <a:ext cx="1051560" cy="365760"/>
+          </a:xfrm>
+          <a:prstGeom prst="rect">
+            <a:avLst/>
+          </a:prstGeom>
+          <a:solidFill>
+            <a:schemeClr val="tx1"/>
+          </a:solidFill>
+          <a:ln/>
+        </p:spPr>
+        <p:txBody>
+          <a:bodyPr wrap="square" lIns="0" tIns="76200" rIns="0" bIns="0" rtlCol="0" anchor="ctr"/>
+          <a:lstStyle/>
+          <a:p>
+            <a:pPr indent="0" marL="0">
+              <a:buNone/>
+            </a:pPr>
+            <a:r>
+              <a:rPr lang="en-US" sz="1300" b="1" spc="200" kern="0" dirty="0">
+                <a:solidFill>
+                  <a:schemeClr val="accent1"/>
+                </a:solidFill>
+              </a:rPr>
+              <a:t>THEN</a:t>
+            </a:r>
+            <a:endParaRPr lang="en-US" sz="1300" dirty="0"/>
+          </a:p>
+        </p:txBody>
+      </p:sp>
+      <p:sp>
+        <p:nvSpPr>
+          <p:cNvPr id="11" name="Keyed and varied card"/>
+          <p:cNvSpPr/>
+          <p:nvPr/>
+        </p:nvSpPr>
+        <p:spPr>
+          <a:xfrm>
+            <a:off x="4343400" y="2377440"/>
+            <a:ext cx="3474720" cy="3291840"/>
+          </a:xfrm>
+          <a:prstGeom prst="roundRect">
+            <a:avLst>
+              <a:gd name="adj" fmla="val 3889"/>
+            </a:avLst>
+          </a:prstGeom>
+          <a:solidFill>
+            <a:schemeClr val="tx2"/>
+          </a:solidFill>
+          <a:ln w="12700">
+            <a:solidFill>
+              <a:schemeClr val="accent6"/>
+            </a:solidFill>
+            <a:prstDash val="solid"/>
+          </a:ln>
+        </p:spPr>
+      </p:sp>
+      <p:sp>
+        <p:nvSpPr>
+          <p:cNvPr id="12" name="Keyed and varied"/>
+          <p:cNvSpPr txBox="1"/>
+          <p:nvPr/>
+        </p:nvSpPr>
+        <p:spPr>
+          <a:xfrm>
+            <a:off x="4663440" y="2606040"/>
+            <a:ext cx="2834640" cy="457200"/>
           </a:xfrm>
           <a:prstGeom prst="rect">
             <a:avLst/>
@@ -3260,27 +3799,27 @@
               <a:buNone/>
             </a:pPr>
             <a:r>
-              <a:rPr lang="en-US" sz="1800" b="1" dirty="0">
+              <a:rPr lang="en-US" sz="2000" b="1" dirty="0">
                 <a:solidFill>
                   <a:schemeClr val="bg2"/>
                 </a:solidFill>
               </a:rPr>
-              <a:t>Keyed</a:t>
-            </a:r>
-            <a:endParaRPr lang="en-US" sz="1800" dirty="0"/>
-          </a:p>
-        </p:txBody>
-      </p:sp>
-      <p:sp>
-        <p:nvSpPr>
-          <p:cNvPr id="11" name="Keyed body"/>
+              <a:t>Keyed and varied</a:t>
+            </a:r>
+            <a:endParaRPr lang="en-US" sz="2000" dirty="0"/>
+          </a:p>
+        </p:txBody>
+      </p:sp>
+      <p:sp>
+        <p:nvSpPr>
+          <p:cNvPr id="13" name="Keyed and varied body"/>
           <p:cNvSpPr txBox="1"/>
           <p:nvPr/>
         </p:nvSpPr>
         <p:spPr>
           <a:xfrm>
-            <a:off x="1325880" y="2980944"/>
-            <a:ext cx="5623560" cy="548640"/>
+            <a:off x="4663440" y="3154680"/>
+            <a:ext cx="2880360" cy="2377440"/>
           </a:xfrm>
           <a:prstGeom prst="rect">
             <a:avLst/>
@@ -3296,73 +3835,117 @@
               <a:buNone/>
             </a:pPr>
             <a:r>
-              <a:rPr lang="en-US" sz="1500" dirty="0">
+              <a:rPr lang="en-US" sz="1700" dirty="0">
                 <a:solidFill>
                   <a:schemeClr val="accent5"/>
                 </a:solidFill>
               </a:rPr>
-              <a:t>The model alone decodes nothing; you also need your partner's key.</a:t>
-            </a:r>
-            <a:endParaRPr lang="en-US" sz="1500" dirty="0"/>
-          </a:p>
-        </p:txBody>
-      </p:sp>
-      <p:sp>
-        <p:nvSpPr>
-          <p:cNvPr id="12" name="FiShuffle circle"/>
+              <a:t>Per-user codebooks derived from the key, so a seized prompt decodes nothing. Key-seeded randomness so a note never yields the same cover twice. A liveness check for the face key.</a:t>
+            </a:r>
+            <a:endParaRPr lang="en-US" sz="1700" dirty="0"/>
+          </a:p>
+        </p:txBody>
+      </p:sp>
+      <p:sp>
+        <p:nvSpPr>
+          <p:cNvPr id="14" name="LATER dot"/>
           <p:cNvSpPr/>
           <p:nvPr/>
         </p:nvSpPr>
         <p:spPr>
           <a:xfrm>
-            <a:off x="548640" y="3794760"/>
-            <a:ext cx="566928" cy="566928"/>
+            <a:off x="8321040" y="1719072"/>
+            <a:ext cx="310896" cy="310896"/>
           </a:xfrm>
           <a:prstGeom prst="ellipse">
             <a:avLst/>
           </a:prstGeom>
           <a:solidFill>
-            <a:schemeClr val="accent3">
-              <a:alpha val="18000"/>
-            </a:schemeClr>
+            <a:schemeClr val="accent3"/>
           </a:solidFill>
-          <a:ln/>
-        </p:spPr>
-      </p:sp>
-      <p:pic>
-        <p:nvPicPr>
-          <p:cNvPr id="13" name="FiShuffle icon" descr="preencoded.png">    </p:cNvPr>
-          <p:cNvPicPr>
-            <a:picLocks noChangeAspect="1"/>
-          </p:cNvPicPr>
-          <p:nvPr/>
-        </p:nvPicPr>
-        <p:blipFill>
-          <a:blip r:embed="rId4"/>
-          <a:stretch>
-            <a:fillRect/>
-          </a:stretch>
-        </p:blipFill>
-        <p:spPr>
-          <a:xfrm>
-            <a:off x="696041" y="3942161"/>
-            <a:ext cx="272125" cy="272125"/>
-          </a:xfrm>
-          <a:prstGeom prst="rect">
-            <a:avLst/>
-          </a:prstGeom>
-        </p:spPr>
-      </p:pic>
-      <p:sp>
-        <p:nvSpPr>
-          <p:cNvPr id="14" name="Different for every user header"/>
+          <a:ln w="38100">
+            <a:solidFill>
+              <a:schemeClr val="tx1"/>
+            </a:solidFill>
+            <a:prstDash val="solid"/>
+          </a:ln>
+        </p:spPr>
+      </p:sp>
+      <p:sp>
+        <p:nvSpPr>
+          <p:cNvPr id="15" name="LATER label"/>
           <p:cNvSpPr txBox="1"/>
           <p:nvPr/>
         </p:nvSpPr>
         <p:spPr>
           <a:xfrm>
-            <a:off x="1325880" y="3776472"/>
-            <a:ext cx="5623560" cy="329184"/>
+            <a:off x="8705088" y="1691640"/>
+            <a:ext cx="1051560" cy="365760"/>
+          </a:xfrm>
+          <a:prstGeom prst="rect">
+            <a:avLst/>
+          </a:prstGeom>
+          <a:solidFill>
+            <a:schemeClr val="tx1"/>
+          </a:solidFill>
+          <a:ln/>
+        </p:spPr>
+        <p:txBody>
+          <a:bodyPr wrap="square" lIns="0" tIns="76200" rIns="0" bIns="0" rtlCol="0" anchor="ctr"/>
+          <a:lstStyle/>
+          <a:p>
+            <a:pPr indent="0" marL="0">
+              <a:buNone/>
+            </a:pPr>
+            <a:r>
+              <a:rPr lang="en-US" sz="1300" b="1" spc="200" kern="0" dirty="0">
+                <a:solidFill>
+                  <a:schemeClr val="accent3"/>
+                </a:solidFill>
+              </a:rPr>
+              <a:t>LATER</a:t>
+            </a:r>
+            <a:endParaRPr lang="en-US" sz="1300" dirty="0"/>
+          </a:p>
+        </p:txBody>
+      </p:sp>
+      <p:sp>
+        <p:nvSpPr>
+          <p:cNvPr id="16" name="Blend in anywhere card"/>
+          <p:cNvSpPr/>
+          <p:nvPr/>
+        </p:nvSpPr>
+        <p:spPr>
+          <a:xfrm>
+            <a:off x="8138160" y="2377440"/>
+            <a:ext cx="3474720" cy="3291840"/>
+          </a:xfrm>
+          <a:prstGeom prst="roundRect">
+            <a:avLst>
+              <a:gd name="adj" fmla="val 3889"/>
+            </a:avLst>
+          </a:prstGeom>
+          <a:solidFill>
+            <a:schemeClr val="tx2"/>
+          </a:solidFill>
+          <a:ln w="12700">
+            <a:solidFill>
+              <a:schemeClr val="accent6"/>
+            </a:solidFill>
+            <a:prstDash val="solid"/>
+          </a:ln>
+        </p:spPr>
+      </p:sp>
+      <p:sp>
+        <p:nvSpPr>
+          <p:cNvPr id="17" name="Blend in anywhere"/>
+          <p:cNvSpPr txBox="1"/>
+          <p:nvPr/>
+        </p:nvSpPr>
+        <p:spPr>
+          <a:xfrm>
+            <a:off x="8458200" y="2606040"/>
+            <a:ext cx="2834640" cy="457200"/>
           </a:xfrm>
           <a:prstGeom prst="rect">
             <a:avLst/>
@@ -3378,27 +3961,27 @@
               <a:buNone/>
             </a:pPr>
             <a:r>
-              <a:rPr lang="en-US" sz="1800" b="1" dirty="0">
+              <a:rPr lang="en-US" sz="2000" b="1" dirty="0">
                 <a:solidFill>
                   <a:schemeClr val="bg2"/>
                 </a:solidFill>
               </a:rPr>
-              <a:t>Different for every user</a:t>
-            </a:r>
-            <a:endParaRPr lang="en-US" sz="1800" dirty="0"/>
-          </a:p>
-        </p:txBody>
-      </p:sp>
-      <p:sp>
-        <p:nvSpPr>
-          <p:cNvPr id="15" name="Different for every user body"/>
+              <a:t>Blend in anywhere</a:t>
+            </a:r>
+            <a:endParaRPr lang="en-US" sz="2000" dirty="0"/>
+          </a:p>
+        </p:txBody>
+      </p:sp>
+      <p:sp>
+        <p:nvSpPr>
+          <p:cNvPr id="18" name="Blend in anywhere body"/>
           <p:cNvSpPr txBox="1"/>
           <p:nvPr/>
         </p:nvSpPr>
         <p:spPr>
           <a:xfrm>
-            <a:off x="1325880" y="4123944"/>
-            <a:ext cx="5623560" cy="548640"/>
+            <a:off x="8458200" y="3154680"/>
+            <a:ext cx="2880360" cy="2377440"/>
           </a:xfrm>
           <a:prstGeom prst="rect">
             <a:avLst/>
@@ -3414,132 +3997,14 @@
               <a:buNone/>
             </a:pPr>
             <a:r>
-              <a:rPr lang="en-US" sz="1500" dirty="0">
+              <a:rPr lang="en-US" sz="1700" dirty="0">
                 <a:solidFill>
                   <a:schemeClr val="accent5"/>
                 </a:solidFill>
               </a:rPr>
-              <a:t>One seized phone doesn't compromise anyone else.</a:t>
-            </a:r>
-            <a:endParaRPr lang="en-US" sz="1500" dirty="0"/>
-          </a:p>
-        </p:txBody>
-      </p:sp>
-      <p:sp>
-        <p:nvSpPr>
-          <p:cNvPr id="16" name="FiMessageSquare circle"/>
-          <p:cNvSpPr/>
-          <p:nvPr/>
-        </p:nvSpPr>
-        <p:spPr>
-          <a:xfrm>
-            <a:off x="548640" y="4937760"/>
-            <a:ext cx="566928" cy="566928"/>
-          </a:xfrm>
-          <a:prstGeom prst="ellipse">
-            <a:avLst/>
-          </a:prstGeom>
-          <a:solidFill>
-            <a:schemeClr val="accent2">
-              <a:alpha val="18000"/>
-            </a:schemeClr>
-          </a:solidFill>
-          <a:ln/>
-        </p:spPr>
-      </p:sp>
-      <p:pic>
-        <p:nvPicPr>
-          <p:cNvPr id="17" name="FiMessageSquare icon" descr="preencoded.png">    </p:cNvPr>
-          <p:cNvPicPr>
-            <a:picLocks noChangeAspect="1"/>
-          </p:cNvPicPr>
-          <p:nvPr/>
-        </p:nvPicPr>
-        <p:blipFill>
-          <a:blip r:embed="rId5"/>
-          <a:stretch>
-            <a:fillRect/>
-          </a:stretch>
-        </p:blipFill>
-        <p:spPr>
-          <a:xfrm>
-            <a:off x="696041" y="5085161"/>
-            <a:ext cx="272125" cy="272125"/>
-          </a:xfrm>
-          <a:prstGeom prst="rect">
-            <a:avLst/>
-          </a:prstGeom>
-        </p:spPr>
-      </p:pic>
-      <p:sp>
-        <p:nvSpPr>
-          <p:cNvPr id="18" name="Deniable header"/>
-          <p:cNvSpPr txBox="1"/>
-          <p:nvPr/>
-        </p:nvSpPr>
-        <p:spPr>
-          <a:xfrm>
-            <a:off x="1325880" y="4919472"/>
-            <a:ext cx="5623560" cy="329184"/>
-          </a:xfrm>
-          <a:prstGeom prst="rect">
-            <a:avLst/>
-          </a:prstGeom>
-          <a:noFill/>
-          <a:ln/>
-        </p:spPr>
-        <p:txBody>
-          <a:bodyPr wrap="square" lIns="0" tIns="0" rIns="0" bIns="0" rtlCol="0" anchor="ctr"/>
-          <a:lstStyle/>
-          <a:p>
-            <a:pPr indent="0" marL="0">
-              <a:buNone/>
-            </a:pPr>
-            <a:r>
-              <a:rPr lang="en-US" sz="1800" b="1" dirty="0">
-                <a:solidFill>
-                  <a:schemeClr val="bg2"/>
-                </a:solidFill>
-              </a:rPr>
-              <a:t>Deniable</a:t>
-            </a:r>
-            <a:endParaRPr lang="en-US" sz="1800" dirty="0"/>
-          </a:p>
-        </p:txBody>
-      </p:sp>
-      <p:sp>
-        <p:nvSpPr>
-          <p:cNvPr id="19" name="Deniable body"/>
-          <p:cNvSpPr txBox="1"/>
-          <p:nvPr/>
-        </p:nvSpPr>
-        <p:spPr>
-          <a:xfrm>
-            <a:off x="1325880" y="5266944"/>
-            <a:ext cx="5623560" cy="548640"/>
-          </a:xfrm>
-          <a:prstGeom prst="rect">
-            <a:avLst/>
-          </a:prstGeom>
-          <a:noFill/>
-          <a:ln/>
-        </p:spPr>
-        <p:txBody>
-          <a:bodyPr wrap="square" lIns="0" tIns="0" rIns="0" bIns="0" rtlCol="0" anchor="t"/>
-          <a:lstStyle/>
-          <a:p>
-            <a:pPr indent="0" marL="0">
-              <a:buNone/>
-            </a:pPr>
-            <a:r>
-              <a:rPr lang="en-US" sz="1500" dirty="0">
-                <a:solidFill>
-                  <a:schemeClr val="accent5"/>
-                </a:solidFill>
-              </a:rPr>
-              <a:t>On inspection it is an ordinary chat assistant, not a cipher.</a:t>
-            </a:r>
-            <a:endParaRPr lang="en-US" sz="1500" dirty="0"/>
+              <a:t>Multiple languages, covers shaped by real channel traffic, photo carriers, a stronger benign check, and tests against an adversary who rewrites messages.</a:t>
+            </a:r>
+            <a:endParaRPr lang="en-US" sz="1700" dirty="0"/>
           </a:p>
         </p:txBody>
       </p:sp>
@@ -3645,6 +4110,609 @@
                   <a:schemeClr val="bg2"/>
                 </a:solidFill>
               </a:rPr>
+              <a:t>The end state: a small keyed model in every pocket</a:t>
+            </a:r>
+            <a:endParaRPr lang="en-US" sz="3200" dirty="0"/>
+          </a:p>
+        </p:txBody>
+      </p:sp>
+      <p:pic>
+        <p:nvPicPr>
+          <p:cNvPr id="3" name="on-device chip image" descr="C:\Users\pulic\SprintHack-ND\assets\us-chip-circuit.jpg">    </p:cNvPr>
+          <p:cNvPicPr>
+            <a:picLocks noChangeAspect="1"/>
+          </p:cNvPicPr>
+          <p:nvPr/>
+        </p:nvPicPr>
+        <p:blipFill>
+          <a:blip r:embed="rId1"/>
+          <a:srcRect l="0" r="0" t="0" b="0"/>
+          <a:stretch/>
+        </p:blipFill>
+        <p:spPr>
+          <a:xfrm>
+            <a:off x="7434072" y="1463040"/>
+            <a:ext cx="4206240" cy="4526280"/>
+          </a:xfrm>
+          <a:prstGeom prst="rect">
+            <a:avLst/>
+          </a:prstGeom>
+        </p:spPr>
+      </p:pic>
+      <p:sp>
+        <p:nvSpPr>
+          <p:cNvPr id="4" name="FiSmartphone circle"/>
+          <p:cNvSpPr/>
+          <p:nvPr/>
+        </p:nvSpPr>
+        <p:spPr>
+          <a:xfrm>
+            <a:off x="548640" y="1508760"/>
+            <a:ext cx="566928" cy="566928"/>
+          </a:xfrm>
+          <a:prstGeom prst="ellipse">
+            <a:avLst/>
+          </a:prstGeom>
+          <a:solidFill>
+            <a:schemeClr val="accent2">
+              <a:alpha val="18000"/>
+            </a:schemeClr>
+          </a:solidFill>
+          <a:ln/>
+        </p:spPr>
+      </p:sp>
+      <p:pic>
+        <p:nvPicPr>
+          <p:cNvPr id="5" name="FiSmartphone icon" descr="preencoded.png">    </p:cNvPr>
+          <p:cNvPicPr>
+            <a:picLocks noChangeAspect="1"/>
+          </p:cNvPicPr>
+          <p:nvPr/>
+        </p:nvPicPr>
+        <p:blipFill>
+          <a:blip r:embed="rId2"/>
+          <a:stretch>
+            <a:fillRect/>
+          </a:stretch>
+        </p:blipFill>
+        <p:spPr>
+          <a:xfrm>
+            <a:off x="696041" y="1656161"/>
+            <a:ext cx="272125" cy="272125"/>
+          </a:xfrm>
+          <a:prstGeom prst="rect">
+            <a:avLst/>
+          </a:prstGeom>
+        </p:spPr>
+      </p:pic>
+      <p:sp>
+        <p:nvSpPr>
+          <p:cNvPr id="6" name="On-device header"/>
+          <p:cNvSpPr txBox="1"/>
+          <p:nvPr/>
+        </p:nvSpPr>
+        <p:spPr>
+          <a:xfrm>
+            <a:off x="1325880" y="1490472"/>
+            <a:ext cx="5623560" cy="329184"/>
+          </a:xfrm>
+          <a:prstGeom prst="rect">
+            <a:avLst/>
+          </a:prstGeom>
+          <a:noFill/>
+          <a:ln/>
+        </p:spPr>
+        <p:txBody>
+          <a:bodyPr wrap="square" lIns="0" tIns="0" rIns="0" bIns="0" rtlCol="0" anchor="ctr"/>
+          <a:lstStyle/>
+          <a:p>
+            <a:pPr indent="0" marL="0">
+              <a:buNone/>
+            </a:pPr>
+            <a:r>
+              <a:rPr lang="en-US" sz="1800" b="1" dirty="0">
+                <a:solidFill>
+                  <a:schemeClr val="bg2"/>
+                </a:solidFill>
+              </a:rPr>
+              <a:t>On-device</a:t>
+            </a:r>
+            <a:endParaRPr lang="en-US" sz="1800" dirty="0"/>
+          </a:p>
+        </p:txBody>
+      </p:sp>
+      <p:sp>
+        <p:nvSpPr>
+          <p:cNvPr id="7" name="On-device body"/>
+          <p:cNvSpPr txBox="1"/>
+          <p:nvPr/>
+        </p:nvSpPr>
+        <p:spPr>
+          <a:xfrm>
+            <a:off x="1325880" y="1837944"/>
+            <a:ext cx="5623560" cy="548640"/>
+          </a:xfrm>
+          <a:prstGeom prst="rect">
+            <a:avLst/>
+          </a:prstGeom>
+          <a:noFill/>
+          <a:ln/>
+        </p:spPr>
+        <p:txBody>
+          <a:bodyPr wrap="square" lIns="0" tIns="0" rIns="0" bIns="0" rtlCol="0" anchor="t"/>
+          <a:lstStyle/>
+          <a:p>
+            <a:pPr indent="0" marL="0">
+              <a:buNone/>
+            </a:pPr>
+            <a:r>
+              <a:rPr lang="en-US" sz="1500" dirty="0">
+                <a:solidFill>
+                  <a:schemeClr val="accent5"/>
+                </a:solidFill>
+              </a:rPr>
+              <a:t>Runs locally. Nothing leaves the phone except small talk.</a:t>
+            </a:r>
+            <a:endParaRPr lang="en-US" sz="1500" dirty="0"/>
+          </a:p>
+        </p:txBody>
+      </p:sp>
+      <p:sp>
+        <p:nvSpPr>
+          <p:cNvPr id="8" name="FiKey circle"/>
+          <p:cNvSpPr/>
+          <p:nvPr/>
+        </p:nvSpPr>
+        <p:spPr>
+          <a:xfrm>
+            <a:off x="548640" y="2651760"/>
+            <a:ext cx="566928" cy="566928"/>
+          </a:xfrm>
+          <a:prstGeom prst="ellipse">
+            <a:avLst/>
+          </a:prstGeom>
+          <a:solidFill>
+            <a:schemeClr val="accent1">
+              <a:alpha val="18000"/>
+            </a:schemeClr>
+          </a:solidFill>
+          <a:ln/>
+        </p:spPr>
+      </p:sp>
+      <p:pic>
+        <p:nvPicPr>
+          <p:cNvPr id="9" name="FiKey icon" descr="preencoded.png">    </p:cNvPr>
+          <p:cNvPicPr>
+            <a:picLocks noChangeAspect="1"/>
+          </p:cNvPicPr>
+          <p:nvPr/>
+        </p:nvPicPr>
+        <p:blipFill>
+          <a:blip r:embed="rId3"/>
+          <a:stretch>
+            <a:fillRect/>
+          </a:stretch>
+        </p:blipFill>
+        <p:spPr>
+          <a:xfrm>
+            <a:off x="696041" y="2799161"/>
+            <a:ext cx="272125" cy="272125"/>
+          </a:xfrm>
+          <a:prstGeom prst="rect">
+            <a:avLst/>
+          </a:prstGeom>
+        </p:spPr>
+      </p:pic>
+      <p:sp>
+        <p:nvSpPr>
+          <p:cNvPr id="10" name="Keyed, and locked to your face header"/>
+          <p:cNvSpPr txBox="1"/>
+          <p:nvPr/>
+        </p:nvSpPr>
+        <p:spPr>
+          <a:xfrm>
+            <a:off x="1325880" y="2633472"/>
+            <a:ext cx="5623560" cy="329184"/>
+          </a:xfrm>
+          <a:prstGeom prst="rect">
+            <a:avLst/>
+          </a:prstGeom>
+          <a:noFill/>
+          <a:ln/>
+        </p:spPr>
+        <p:txBody>
+          <a:bodyPr wrap="square" lIns="0" tIns="0" rIns="0" bIns="0" rtlCol="0" anchor="ctr"/>
+          <a:lstStyle/>
+          <a:p>
+            <a:pPr indent="0" marL="0">
+              <a:buNone/>
+            </a:pPr>
+            <a:r>
+              <a:rPr lang="en-US" sz="1800" b="1" dirty="0">
+                <a:solidFill>
+                  <a:schemeClr val="bg2"/>
+                </a:solidFill>
+              </a:rPr>
+              <a:t>Keyed, and locked to your face</a:t>
+            </a:r>
+            <a:endParaRPr lang="en-US" sz="1800" dirty="0"/>
+          </a:p>
+        </p:txBody>
+      </p:sp>
+      <p:sp>
+        <p:nvSpPr>
+          <p:cNvPr id="11" name="Keyed, and locked to your face body"/>
+          <p:cNvSpPr txBox="1"/>
+          <p:nvPr/>
+        </p:nvSpPr>
+        <p:spPr>
+          <a:xfrm>
+            <a:off x="1325880" y="2980944"/>
+            <a:ext cx="5623560" cy="548640"/>
+          </a:xfrm>
+          <a:prstGeom prst="rect">
+            <a:avLst/>
+          </a:prstGeom>
+          <a:noFill/>
+          <a:ln/>
+        </p:spPr>
+        <p:txBody>
+          <a:bodyPr wrap="square" lIns="0" tIns="0" rIns="0" bIns="0" rtlCol="0" anchor="t"/>
+          <a:lstStyle/>
+          <a:p>
+            <a:pPr indent="0" marL="0">
+              <a:buNone/>
+            </a:pPr>
+            <a:r>
+              <a:rPr lang="en-US" sz="1500" dirty="0">
+                <a:solidFill>
+                  <a:schemeClr val="accent5"/>
+                </a:solidFill>
+              </a:rPr>
+              <a:t>The model alone decodes nothing. The key sits in a vault only your face and PIN open (built today).</a:t>
+            </a:r>
+            <a:endParaRPr lang="en-US" sz="1500" dirty="0"/>
+          </a:p>
+        </p:txBody>
+      </p:sp>
+      <p:sp>
+        <p:nvSpPr>
+          <p:cNvPr id="12" name="FiShuffle circle"/>
+          <p:cNvSpPr/>
+          <p:nvPr/>
+        </p:nvSpPr>
+        <p:spPr>
+          <a:xfrm>
+            <a:off x="548640" y="3794760"/>
+            <a:ext cx="566928" cy="566928"/>
+          </a:xfrm>
+          <a:prstGeom prst="ellipse">
+            <a:avLst/>
+          </a:prstGeom>
+          <a:solidFill>
+            <a:schemeClr val="accent3">
+              <a:alpha val="18000"/>
+            </a:schemeClr>
+          </a:solidFill>
+          <a:ln/>
+        </p:spPr>
+      </p:sp>
+      <p:pic>
+        <p:nvPicPr>
+          <p:cNvPr id="13" name="FiShuffle icon" descr="preencoded.png">    </p:cNvPr>
+          <p:cNvPicPr>
+            <a:picLocks noChangeAspect="1"/>
+          </p:cNvPicPr>
+          <p:nvPr/>
+        </p:nvPicPr>
+        <p:blipFill>
+          <a:blip r:embed="rId4"/>
+          <a:stretch>
+            <a:fillRect/>
+          </a:stretch>
+        </p:blipFill>
+        <p:spPr>
+          <a:xfrm>
+            <a:off x="696041" y="3942161"/>
+            <a:ext cx="272125" cy="272125"/>
+          </a:xfrm>
+          <a:prstGeom prst="rect">
+            <a:avLst/>
+          </a:prstGeom>
+        </p:spPr>
+      </p:pic>
+      <p:sp>
+        <p:nvSpPr>
+          <p:cNvPr id="14" name="Different for every user header"/>
+          <p:cNvSpPr txBox="1"/>
+          <p:nvPr/>
+        </p:nvSpPr>
+        <p:spPr>
+          <a:xfrm>
+            <a:off x="1325880" y="3776472"/>
+            <a:ext cx="5623560" cy="329184"/>
+          </a:xfrm>
+          <a:prstGeom prst="rect">
+            <a:avLst/>
+          </a:prstGeom>
+          <a:noFill/>
+          <a:ln/>
+        </p:spPr>
+        <p:txBody>
+          <a:bodyPr wrap="square" lIns="0" tIns="0" rIns="0" bIns="0" rtlCol="0" anchor="ctr"/>
+          <a:lstStyle/>
+          <a:p>
+            <a:pPr indent="0" marL="0">
+              <a:buNone/>
+            </a:pPr>
+            <a:r>
+              <a:rPr lang="en-US" sz="1800" b="1" dirty="0">
+                <a:solidFill>
+                  <a:schemeClr val="bg2"/>
+                </a:solidFill>
+              </a:rPr>
+              <a:t>Different for every user</a:t>
+            </a:r>
+            <a:endParaRPr lang="en-US" sz="1800" dirty="0"/>
+          </a:p>
+        </p:txBody>
+      </p:sp>
+      <p:sp>
+        <p:nvSpPr>
+          <p:cNvPr id="15" name="Different for every user body"/>
+          <p:cNvSpPr txBox="1"/>
+          <p:nvPr/>
+        </p:nvSpPr>
+        <p:spPr>
+          <a:xfrm>
+            <a:off x="1325880" y="4123944"/>
+            <a:ext cx="5623560" cy="548640"/>
+          </a:xfrm>
+          <a:prstGeom prst="rect">
+            <a:avLst/>
+          </a:prstGeom>
+          <a:noFill/>
+          <a:ln/>
+        </p:spPr>
+        <p:txBody>
+          <a:bodyPr wrap="square" lIns="0" tIns="0" rIns="0" bIns="0" rtlCol="0" anchor="t"/>
+          <a:lstStyle/>
+          <a:p>
+            <a:pPr indent="0" marL="0">
+              <a:buNone/>
+            </a:pPr>
+            <a:r>
+              <a:rPr lang="en-US" sz="1500" dirty="0">
+                <a:solidFill>
+                  <a:schemeClr val="accent5"/>
+                </a:solidFill>
+              </a:rPr>
+              <a:t>One seized phone doesn't compromise anyone else.</a:t>
+            </a:r>
+            <a:endParaRPr lang="en-US" sz="1500" dirty="0"/>
+          </a:p>
+        </p:txBody>
+      </p:sp>
+      <p:sp>
+        <p:nvSpPr>
+          <p:cNvPr id="16" name="FiMessageSquare circle"/>
+          <p:cNvSpPr/>
+          <p:nvPr/>
+        </p:nvSpPr>
+        <p:spPr>
+          <a:xfrm>
+            <a:off x="548640" y="4937760"/>
+            <a:ext cx="566928" cy="566928"/>
+          </a:xfrm>
+          <a:prstGeom prst="ellipse">
+            <a:avLst/>
+          </a:prstGeom>
+          <a:solidFill>
+            <a:schemeClr val="accent2">
+              <a:alpha val="18000"/>
+            </a:schemeClr>
+          </a:solidFill>
+          <a:ln/>
+        </p:spPr>
+      </p:sp>
+      <p:pic>
+        <p:nvPicPr>
+          <p:cNvPr id="17" name="FiMessageSquare icon" descr="preencoded.png">    </p:cNvPr>
+          <p:cNvPicPr>
+            <a:picLocks noChangeAspect="1"/>
+          </p:cNvPicPr>
+          <p:nvPr/>
+        </p:nvPicPr>
+        <p:blipFill>
+          <a:blip r:embed="rId5"/>
+          <a:stretch>
+            <a:fillRect/>
+          </a:stretch>
+        </p:blipFill>
+        <p:spPr>
+          <a:xfrm>
+            <a:off x="696041" y="5085161"/>
+            <a:ext cx="272125" cy="272125"/>
+          </a:xfrm>
+          <a:prstGeom prst="rect">
+            <a:avLst/>
+          </a:prstGeom>
+        </p:spPr>
+      </p:pic>
+      <p:sp>
+        <p:nvSpPr>
+          <p:cNvPr id="18" name="Deniable header"/>
+          <p:cNvSpPr txBox="1"/>
+          <p:nvPr/>
+        </p:nvSpPr>
+        <p:spPr>
+          <a:xfrm>
+            <a:off x="1325880" y="4919472"/>
+            <a:ext cx="5623560" cy="329184"/>
+          </a:xfrm>
+          <a:prstGeom prst="rect">
+            <a:avLst/>
+          </a:prstGeom>
+          <a:noFill/>
+          <a:ln/>
+        </p:spPr>
+        <p:txBody>
+          <a:bodyPr wrap="square" lIns="0" tIns="0" rIns="0" bIns="0" rtlCol="0" anchor="ctr"/>
+          <a:lstStyle/>
+          <a:p>
+            <a:pPr indent="0" marL="0">
+              <a:buNone/>
+            </a:pPr>
+            <a:r>
+              <a:rPr lang="en-US" sz="1800" b="1" dirty="0">
+                <a:solidFill>
+                  <a:schemeClr val="bg2"/>
+                </a:solidFill>
+              </a:rPr>
+              <a:t>Deniable</a:t>
+            </a:r>
+            <a:endParaRPr lang="en-US" sz="1800" dirty="0"/>
+          </a:p>
+        </p:txBody>
+      </p:sp>
+      <p:sp>
+        <p:nvSpPr>
+          <p:cNvPr id="19" name="Deniable body"/>
+          <p:cNvSpPr txBox="1"/>
+          <p:nvPr/>
+        </p:nvSpPr>
+        <p:spPr>
+          <a:xfrm>
+            <a:off x="1325880" y="5266944"/>
+            <a:ext cx="5623560" cy="548640"/>
+          </a:xfrm>
+          <a:prstGeom prst="rect">
+            <a:avLst/>
+          </a:prstGeom>
+          <a:noFill/>
+          <a:ln/>
+        </p:spPr>
+        <p:txBody>
+          <a:bodyPr wrap="square" lIns="0" tIns="0" rIns="0" bIns="0" rtlCol="0" anchor="t"/>
+          <a:lstStyle/>
+          <a:p>
+            <a:pPr indent="0" marL="0">
+              <a:buNone/>
+            </a:pPr>
+            <a:r>
+              <a:rPr lang="en-US" sz="1500" dirty="0">
+                <a:solidFill>
+                  <a:schemeClr val="accent5"/>
+                </a:solidFill>
+              </a:rPr>
+              <a:t>On inspection it is an ordinary chat assistant, not a cipher.</a:t>
+            </a:r>
+            <a:endParaRPr lang="en-US" sz="1500" dirty="0"/>
+          </a:p>
+        </p:txBody>
+      </p:sp>
+      <p:sp>
+        <p:nvSpPr>
+          <p:cNvPr id="25" name="Slide Number Placeholder 0"/>
+          <p:cNvSpPr>
+            <a:spLocks noGrp="1"/>
+          </p:cNvSpPr>
+          <p:nvPr>
+            <p:ph type="sldNum" sz="quarter" idx="4294967295"/>
+          </p:nvPr>
+        </p:nvSpPr>
+        <p:spPr>
+          <a:xfrm>
+            <a:off x="11091672" y="6382512"/>
+            <a:ext cx="548640" cy="274320"/>
+          </a:xfrm>
+          <a:prstGeom prst="rect">
+            <a:avLst/>
+          </a:prstGeom>
+          <a:extLst>
+            <a:ext uri="{C572A759-6A51-4108-AA02-DFA0A04FC94B}">
+              <ma14:wrappingTextBoxFlag xmlns:ma14="http://schemas.microsoft.com/office/mac/drawingml/2011/main" val="0"/>
+            </a:ext>
+          </a:extLst>
+        </p:spPr>
+        <p:txBody>
+          <a:bodyPr/>
+          <a:lstStyle>
+            <a:lvl1pPr>
+              <a:defRPr sz="1000">
+                <a:solidFill>
+                  <a:srgbClr val="8B97AE"/>
+                </a:solidFill>
+              </a:defRPr>
+            </a:lvl1pPr>
+          </a:lstStyle>
+          <a:p>
+            <a:pPr algn="r"/>
+            <a:fld id="{F7021451-1387-4CA6-816F-3879F97B5CBC}" type="slidenum">
+              <a:rPr b="0" lang="en-US"/>
+              <a:t>12</a:t>
+            </a:fld>
+            <a:endParaRPr lang="en-US"/>
+          </a:p>
+        </p:txBody>
+      </p:sp>
+    </p:spTree>
+  </p:cSld>
+  <p:clrMapOvr>
+    <a:masterClrMapping/>
+  </p:clrMapOvr>
+</p:sld>
+</file>
+
+<file path=ppt/slides/slide13.xml><?xml version="1.0" encoding="utf-8"?>
+<p:sld xmlns:a="http://schemas.openxmlformats.org/drawingml/2006/main" xmlns:r="http://schemas.openxmlformats.org/officeDocument/2006/relationships" xmlns:p="http://schemas.openxmlformats.org/presentationml/2006/main">
+  <p:cSld name="Slide 13">
+    <p:spTree>
+      <p:nvGrpSpPr>
+        <p:cNvPr id="1" name=""/>
+        <p:cNvGrpSpPr/>
+        <p:nvPr/>
+      </p:nvGrpSpPr>
+      <p:grpSpPr>
+        <a:xfrm>
+          <a:off x="0" y="0"/>
+          <a:ext cx="0" cy="0"/>
+          <a:chOff x="0" y="0"/>
+          <a:chExt cx="0" cy="0"/>
+        </a:xfrm>
+      </p:grpSpPr>
+      <p:sp>
+        <p:nvSpPr>
+          <p:cNvPr id="2" name="Text 0"/>
+          <p:cNvSpPr/>
+          <p:nvPr>
+            <p:ph idx="100" type="title" hasCustomPrompt="1"/>
+          </p:nvPr>
+        </p:nvSpPr>
+        <p:spPr>
+          <a:xfrm>
+            <a:off x="548640" y="365760"/>
+            <a:ext cx="11064240" cy="777240"/>
+          </a:xfrm>
+          <a:prstGeom prst="rect">
+            <a:avLst/>
+          </a:prstGeom>
+          <a:noFill/>
+          <a:ln/>
+        </p:spPr>
+        <p:txBody>
+          <a:bodyPr wrap="square" lIns="0" tIns="0" rIns="0" bIns="0" rtlCol="0" anchor="ctr"/>
+          <a:lstStyle/>
+          <a:p>
+            <a:pPr algn="l" indent="0" marL="0">
+              <a:buNone/>
+            </a:pPr>
+            <a:r>
+              <a:rPr lang="en-US" sz="3200" b="1" dirty="0">
+                <a:solidFill>
+                  <a:schemeClr val="bg2"/>
+                </a:solidFill>
+              </a:rPr>
               <a:t>Thank you. Questions?</a:t>
             </a:r>
             <a:endParaRPr lang="en-US" sz="3200" dirty="0"/>
@@ -3859,7 +4927,7 @@
             <a:pPr algn="r"/>
             <a:fld id="{F7021451-1387-4CA6-816F-3879F97B5CBC}" type="slidenum">
               <a:rPr b="0" lang="en-US"/>
-              <a:t>12</a:t>
+              <a:t>13</a:t>
             </a:fld>
             <a:endParaRPr lang="en-US"/>
           </a:p>
@@ -7013,7 +8081,7 @@
                   <a:schemeClr val="bg2"/>
                 </a:solidFill>
               </a:rPr>
-              <a:t>Live demo: one message, three views</a:t>
+              <a:t>Your face unlocks the key, and nothing else does</a:t>
             </a:r>
             <a:endParaRPr lang="en-US" sz="3200" dirty="0"/>
           </a:p>
@@ -7021,22 +8089,22 @@
       </p:sp>
       <p:sp>
         <p:nvSpPr>
-          <p:cNvPr id="3" name="Sender pane"/>
+          <p:cNvPr id="3" name="tracking view"/>
           <p:cNvSpPr/>
           <p:nvPr/>
         </p:nvSpPr>
         <p:spPr>
           <a:xfrm>
-            <a:off x="548640" y="1417320"/>
-            <a:ext cx="3474720" cy="4617720"/>
+            <a:off x="548640" y="1463040"/>
+            <a:ext cx="3611880" cy="4526280"/>
           </a:xfrm>
           <a:prstGeom prst="roundRect">
             <a:avLst>
-              <a:gd name="adj" fmla="val 3684"/>
+              <a:gd name="adj" fmla="val 3544"/>
             </a:avLst>
           </a:prstGeom>
           <a:solidFill>
-            <a:schemeClr val="tx2"/>
+            <a:schemeClr val="tx1"/>
           </a:solidFill>
           <a:ln w="12700">
             <a:solidFill>
@@ -7048,34 +8116,61 @@
       </p:sp>
       <p:sp>
         <p:nvSpPr>
-          <p:cNvPr id="4" name="Sender number dot"/>
+          <p:cNvPr id="4" name="face outline"/>
           <p:cNvSpPr/>
           <p:nvPr/>
         </p:nvSpPr>
         <p:spPr>
           <a:xfrm>
-            <a:off x="822960" y="1645920"/>
-            <a:ext cx="365760" cy="365760"/>
+            <a:off x="1261872" y="1874520"/>
+            <a:ext cx="2194560" cy="2743200"/>
           </a:xfrm>
           <a:prstGeom prst="ellipse">
             <a:avLst/>
           </a:prstGeom>
           <a:solidFill>
-            <a:schemeClr val="accent1"/>
+            <a:schemeClr val="tx2"/>
           </a:solidFill>
-          <a:ln/>
-        </p:spPr>
-      </p:sp>
-      <p:sp>
-        <p:nvSpPr>
-          <p:cNvPr id="5" name="Sender number"/>
+          <a:ln w="12700">
+            <a:solidFill>
+              <a:schemeClr val="accent5"/>
+            </a:solidFill>
+            <a:prstDash val="solid"/>
+          </a:ln>
+        </p:spPr>
+      </p:sp>
+      <p:sp>
+        <p:nvSpPr>
+          <p:cNvPr id="5" name="face box"/>
+          <p:cNvSpPr/>
+          <p:nvPr/>
+        </p:nvSpPr>
+        <p:spPr>
+          <a:xfrm>
+            <a:off x="1097280" y="1783080"/>
+            <a:ext cx="2523744" cy="2926080"/>
+          </a:xfrm>
+          <a:prstGeom prst="rect">
+            <a:avLst/>
+          </a:prstGeom>
+          <a:ln w="25400">
+            <a:solidFill>
+              <a:schemeClr val="accent2"/>
+            </a:solidFill>
+            <a:prstDash val="solid"/>
+          </a:ln>
+        </p:spPr>
+      </p:sp>
+      <p:sp>
+        <p:nvSpPr>
+          <p:cNvPr id="6" name="detection score"/>
           <p:cNvSpPr txBox="1"/>
           <p:nvPr/>
         </p:nvSpPr>
         <p:spPr>
           <a:xfrm>
-            <a:off x="822960" y="1645920"/>
-            <a:ext cx="365760" cy="365760"/>
+            <a:off x="1097280" y="1517904"/>
+            <a:ext cx="914400" cy="256032"/>
           </a:xfrm>
           <a:prstGeom prst="rect">
             <a:avLst/>
@@ -7087,16 +8182,335 @@
           <a:bodyPr wrap="square" lIns="0" tIns="0" rIns="0" bIns="0" rtlCol="0" anchor="ctr"/>
           <a:lstStyle/>
           <a:p>
-            <a:pPr algn="ctr" indent="0" marL="0">
-              <a:buNone/>
-            </a:pPr>
-            <a:r>
-              <a:rPr lang="en-US" sz="1300" b="1" dirty="0">
-                <a:solidFill>
-                  <a:schemeClr val="tx1"/>
-                </a:solidFill>
-              </a:rPr>
-              <a:t>1</a:t>
+            <a:pPr indent="0" marL="0">
+              <a:buNone/>
+            </a:pPr>
+            <a:r>
+              <a:rPr lang="en-US" sz="1100" dirty="0">
+                <a:solidFill>
+                  <a:schemeClr val="accent2"/>
+                </a:solidFill>
+              </a:rPr>
+              <a:t>0.95</a:t>
+            </a:r>
+            <a:endParaRPr lang="en-US" sz="1100" dirty="0"/>
+          </a:p>
+        </p:txBody>
+      </p:sp>
+      <p:sp>
+        <p:nvSpPr>
+          <p:cNvPr id="7" name="landmark link 0-2"/>
+          <p:cNvSpPr/>
+          <p:nvPr/>
+        </p:nvSpPr>
+        <p:spPr>
+          <a:xfrm>
+            <a:off x="1874520" y="2788920"/>
+            <a:ext cx="484632" cy="548640"/>
+          </a:xfrm>
+          <a:prstGeom prst="line">
+            <a:avLst/>
+          </a:prstGeom>
+          <a:noFill/>
+          <a:ln w="12700">
+            <a:solidFill>
+              <a:schemeClr val="accent2"/>
+            </a:solidFill>
+            <a:prstDash val="solid"/>
+          </a:ln>
+        </p:spPr>
+      </p:sp>
+      <p:sp>
+        <p:nvSpPr>
+          <p:cNvPr id="8" name="landmark link 1-2"/>
+          <p:cNvSpPr/>
+          <p:nvPr/>
+        </p:nvSpPr>
+        <p:spPr>
+          <a:xfrm flipH="1">
+            <a:off x="2359152" y="2788920"/>
+            <a:ext cx="484632" cy="548640"/>
+          </a:xfrm>
+          <a:prstGeom prst="line">
+            <a:avLst/>
+          </a:prstGeom>
+          <a:noFill/>
+          <a:ln w="12700">
+            <a:solidFill>
+              <a:schemeClr val="accent2"/>
+            </a:solidFill>
+            <a:prstDash val="solid"/>
+          </a:ln>
+        </p:spPr>
+      </p:sp>
+      <p:sp>
+        <p:nvSpPr>
+          <p:cNvPr id="9" name="landmark link 2-3"/>
+          <p:cNvSpPr/>
+          <p:nvPr/>
+        </p:nvSpPr>
+        <p:spPr>
+          <a:xfrm flipH="1">
+            <a:off x="1965960" y="3337560"/>
+            <a:ext cx="393192" cy="502920"/>
+          </a:xfrm>
+          <a:prstGeom prst="line">
+            <a:avLst/>
+          </a:prstGeom>
+          <a:noFill/>
+          <a:ln w="12700">
+            <a:solidFill>
+              <a:schemeClr val="accent2"/>
+            </a:solidFill>
+            <a:prstDash val="solid"/>
+          </a:ln>
+        </p:spPr>
+      </p:sp>
+      <p:sp>
+        <p:nvSpPr>
+          <p:cNvPr id="10" name="landmark link 2-4"/>
+          <p:cNvSpPr/>
+          <p:nvPr/>
+        </p:nvSpPr>
+        <p:spPr>
+          <a:xfrm>
+            <a:off x="2359152" y="3337560"/>
+            <a:ext cx="393192" cy="502920"/>
+          </a:xfrm>
+          <a:prstGeom prst="line">
+            <a:avLst/>
+          </a:prstGeom>
+          <a:noFill/>
+          <a:ln w="12700">
+            <a:solidFill>
+              <a:schemeClr val="accent2"/>
+            </a:solidFill>
+            <a:prstDash val="solid"/>
+          </a:ln>
+        </p:spPr>
+      </p:sp>
+      <p:sp>
+        <p:nvSpPr>
+          <p:cNvPr id="11" name="landmark link 3-4"/>
+          <p:cNvSpPr/>
+          <p:nvPr/>
+        </p:nvSpPr>
+        <p:spPr>
+          <a:xfrm>
+            <a:off x="1965960" y="3840480"/>
+            <a:ext cx="786384" cy="914"/>
+          </a:xfrm>
+          <a:prstGeom prst="line">
+            <a:avLst/>
+          </a:prstGeom>
+          <a:noFill/>
+          <a:ln w="12700">
+            <a:solidFill>
+              <a:schemeClr val="accent2"/>
+            </a:solidFill>
+            <a:prstDash val="solid"/>
+          </a:ln>
+        </p:spPr>
+      </p:sp>
+      <p:sp>
+        <p:nvSpPr>
+          <p:cNvPr id="12" name="landmark link 0-1"/>
+          <p:cNvSpPr/>
+          <p:nvPr/>
+        </p:nvSpPr>
+        <p:spPr>
+          <a:xfrm>
+            <a:off x="1874520" y="2788920"/>
+            <a:ext cx="969264" cy="914"/>
+          </a:xfrm>
+          <a:prstGeom prst="line">
+            <a:avLst/>
+          </a:prstGeom>
+          <a:noFill/>
+          <a:ln w="12700">
+            <a:solidFill>
+              <a:schemeClr val="accent2"/>
+            </a:solidFill>
+            <a:prstDash val="solid"/>
+          </a:ln>
+        </p:spPr>
+      </p:sp>
+      <p:sp>
+        <p:nvSpPr>
+          <p:cNvPr id="13" name="landmark 0"/>
+          <p:cNvSpPr/>
+          <p:nvPr/>
+        </p:nvSpPr>
+        <p:spPr>
+          <a:xfrm>
+            <a:off x="1801368" y="2715768"/>
+            <a:ext cx="146304" cy="146304"/>
+          </a:xfrm>
+          <a:prstGeom prst="ellipse">
+            <a:avLst/>
+          </a:prstGeom>
+          <a:solidFill>
+            <a:schemeClr val="bg1"/>
+          </a:solidFill>
+          <a:ln w="19050">
+            <a:solidFill>
+              <a:schemeClr val="accent2"/>
+            </a:solidFill>
+            <a:prstDash val="solid"/>
+          </a:ln>
+        </p:spPr>
+      </p:sp>
+      <p:sp>
+        <p:nvSpPr>
+          <p:cNvPr id="14" name="landmark 1"/>
+          <p:cNvSpPr/>
+          <p:nvPr/>
+        </p:nvSpPr>
+        <p:spPr>
+          <a:xfrm>
+            <a:off x="2770632" y="2715768"/>
+            <a:ext cx="146304" cy="146304"/>
+          </a:xfrm>
+          <a:prstGeom prst="ellipse">
+            <a:avLst/>
+          </a:prstGeom>
+          <a:solidFill>
+            <a:schemeClr val="bg1"/>
+          </a:solidFill>
+          <a:ln w="19050">
+            <a:solidFill>
+              <a:schemeClr val="accent2"/>
+            </a:solidFill>
+            <a:prstDash val="solid"/>
+          </a:ln>
+        </p:spPr>
+      </p:sp>
+      <p:sp>
+        <p:nvSpPr>
+          <p:cNvPr id="15" name="landmark 2"/>
+          <p:cNvSpPr/>
+          <p:nvPr/>
+        </p:nvSpPr>
+        <p:spPr>
+          <a:xfrm>
+            <a:off x="2286000" y="3264408"/>
+            <a:ext cx="146304" cy="146304"/>
+          </a:xfrm>
+          <a:prstGeom prst="ellipse">
+            <a:avLst/>
+          </a:prstGeom>
+          <a:solidFill>
+            <a:schemeClr val="bg1"/>
+          </a:solidFill>
+          <a:ln w="19050">
+            <a:solidFill>
+              <a:schemeClr val="accent2"/>
+            </a:solidFill>
+            <a:prstDash val="solid"/>
+          </a:ln>
+        </p:spPr>
+      </p:sp>
+      <p:sp>
+        <p:nvSpPr>
+          <p:cNvPr id="16" name="landmark 3"/>
+          <p:cNvSpPr/>
+          <p:nvPr/>
+        </p:nvSpPr>
+        <p:spPr>
+          <a:xfrm>
+            <a:off x="1892808" y="3767328"/>
+            <a:ext cx="146304" cy="146304"/>
+          </a:xfrm>
+          <a:prstGeom prst="ellipse">
+            <a:avLst/>
+          </a:prstGeom>
+          <a:solidFill>
+            <a:schemeClr val="bg1"/>
+          </a:solidFill>
+          <a:ln w="19050">
+            <a:solidFill>
+              <a:schemeClr val="accent2"/>
+            </a:solidFill>
+            <a:prstDash val="solid"/>
+          </a:ln>
+        </p:spPr>
+      </p:sp>
+      <p:sp>
+        <p:nvSpPr>
+          <p:cNvPr id="17" name="landmark 4"/>
+          <p:cNvSpPr/>
+          <p:nvPr/>
+        </p:nvSpPr>
+        <p:spPr>
+          <a:xfrm>
+            <a:off x="2679192" y="3767328"/>
+            <a:ext cx="146304" cy="146304"/>
+          </a:xfrm>
+          <a:prstGeom prst="ellipse">
+            <a:avLst/>
+          </a:prstGeom>
+          <a:solidFill>
+            <a:schemeClr val="bg1"/>
+          </a:solidFill>
+          <a:ln w="19050">
+            <a:solidFill>
+              <a:schemeClr val="accent2"/>
+            </a:solidFill>
+            <a:prstDash val="solid"/>
+          </a:ln>
+        </p:spPr>
+      </p:sp>
+      <p:sp>
+        <p:nvSpPr>
+          <p:cNvPr id="18" name="status bar"/>
+          <p:cNvSpPr/>
+          <p:nvPr/>
+        </p:nvSpPr>
+        <p:spPr>
+          <a:xfrm>
+            <a:off x="685800" y="5029200"/>
+            <a:ext cx="3337560" cy="411480"/>
+          </a:xfrm>
+          <a:prstGeom prst="rect">
+            <a:avLst/>
+          </a:prstGeom>
+          <a:solidFill>
+            <a:schemeClr val="tx2"/>
+          </a:solidFill>
+          <a:ln/>
+        </p:spPr>
+      </p:sp>
+      <p:sp>
+        <p:nvSpPr>
+          <p:cNvPr id="19" name="status text"/>
+          <p:cNvSpPr txBox="1"/>
+          <p:nvPr/>
+        </p:nvSpPr>
+        <p:spPr>
+          <a:xfrm>
+            <a:off x="822960" y="5029200"/>
+            <a:ext cx="3108960" cy="411480"/>
+          </a:xfrm>
+          <a:prstGeom prst="rect">
+            <a:avLst/>
+          </a:prstGeom>
+          <a:noFill/>
+          <a:ln/>
+        </p:spPr>
+        <p:txBody>
+          <a:bodyPr wrap="square" lIns="0" tIns="0" rIns="0" bIns="0" rtlCol="0" anchor="ctr"/>
+          <a:lstStyle/>
+          <a:p>
+            <a:pPr indent="0" marL="0">
+              <a:buNone/>
+            </a:pPr>
+            <a:r>
+              <a:rPr lang="en-US" sz="1300" dirty="0">
+                <a:solidFill>
+                  <a:schemeClr val="bg2"/>
+                </a:solidFill>
+              </a:rPr>
+              <a:t>captured 12/12</a:t>
             </a:r>
             <a:endParaRPr lang="en-US" sz="1300" dirty="0"/>
           </a:p>
@@ -7104,14 +8518,14 @@
       </p:sp>
       <p:sp>
         <p:nvSpPr>
-          <p:cNvPr id="6" name="Sender title"/>
+          <p:cNvPr id="20" name="tracking caption"/>
           <p:cNvSpPr txBox="1"/>
           <p:nvPr/>
         </p:nvSpPr>
         <p:spPr>
           <a:xfrm>
-            <a:off x="1325880" y="1627632"/>
-            <a:ext cx="2606040" cy="402336"/>
+            <a:off x="685800" y="5532120"/>
+            <a:ext cx="3337560" cy="320040"/>
           </a:xfrm>
           <a:prstGeom prst="rect">
             <a:avLst/>
@@ -7127,27 +8541,191 @@
               <a:buNone/>
             </a:pPr>
             <a:r>
-              <a:rPr lang="en-US" sz="1600" b="1" dirty="0">
+              <a:rPr lang="en-US" sz="1200" dirty="0">
+                <a:solidFill>
+                  <a:schemeClr val="accent5"/>
+                </a:solidFill>
+              </a:rPr>
+              <a:t>Live tracking: 5 landmarks per frame</a:t>
+            </a:r>
+            <a:endParaRPr lang="en-US" sz="1200" dirty="0"/>
+          </a:p>
+        </p:txBody>
+      </p:sp>
+      <p:sp>
+        <p:nvSpPr>
+          <p:cNvPr id="21" name="FiCamera circle"/>
+          <p:cNvSpPr/>
+          <p:nvPr/>
+        </p:nvSpPr>
+        <p:spPr>
+          <a:xfrm>
+            <a:off x="4526280" y="1463040"/>
+            <a:ext cx="566928" cy="566928"/>
+          </a:xfrm>
+          <a:prstGeom prst="ellipse">
+            <a:avLst/>
+          </a:prstGeom>
+          <a:solidFill>
+            <a:schemeClr val="accent2">
+              <a:alpha val="18000"/>
+            </a:schemeClr>
+          </a:solidFill>
+          <a:ln/>
+        </p:spPr>
+      </p:sp>
+      <p:pic>
+        <p:nvPicPr>
+          <p:cNvPr id="22" name="FiCamera icon" descr="preencoded.png">    </p:cNvPr>
+          <p:cNvPicPr>
+            <a:picLocks noChangeAspect="1"/>
+          </p:cNvPicPr>
+          <p:nvPr/>
+        </p:nvPicPr>
+        <p:blipFill>
+          <a:blip r:embed="rId1"/>
+          <a:stretch>
+            <a:fillRect/>
+          </a:stretch>
+        </p:blipFill>
+        <p:spPr>
+          <a:xfrm>
+            <a:off x="4673681" y="1610441"/>
+            <a:ext cx="272125" cy="272125"/>
+          </a:xfrm>
+          <a:prstGeom prst="rect">
+            <a:avLst/>
+          </a:prstGeom>
+        </p:spPr>
+      </p:pic>
+      <p:sp>
+        <p:nvSpPr>
+          <p:cNvPr id="23" name="Track header"/>
+          <p:cNvSpPr txBox="1"/>
+          <p:nvPr/>
+        </p:nvSpPr>
+        <p:spPr>
+          <a:xfrm>
+            <a:off x="5303520" y="1444752"/>
+            <a:ext cx="6336792" cy="329184"/>
+          </a:xfrm>
+          <a:prstGeom prst="rect">
+            <a:avLst/>
+          </a:prstGeom>
+          <a:noFill/>
+          <a:ln/>
+        </p:spPr>
+        <p:txBody>
+          <a:bodyPr wrap="square" lIns="0" tIns="0" rIns="0" bIns="0" rtlCol="0" anchor="ctr"/>
+          <a:lstStyle/>
+          <a:p>
+            <a:pPr indent="0" marL="0">
+              <a:buNone/>
+            </a:pPr>
+            <a:r>
+              <a:rPr lang="en-US" sz="1800" b="1" dirty="0">
                 <a:solidFill>
                   <a:schemeClr val="bg2"/>
                 </a:solidFill>
               </a:rPr>
-              <a:t>Sender</a:t>
-            </a:r>
-            <a:endParaRPr lang="en-US" sz="1600" dirty="0"/>
-          </a:p>
-        </p:txBody>
-      </p:sp>
-      <p:sp>
-        <p:nvSpPr>
-          <p:cNvPr id="7" name="Sender sub"/>
+              <a:t>Track</a:t>
+            </a:r>
+            <a:endParaRPr lang="en-US" sz="1800" dirty="0"/>
+          </a:p>
+        </p:txBody>
+      </p:sp>
+      <p:sp>
+        <p:nvSpPr>
+          <p:cNvPr id="24" name="Track body"/>
           <p:cNvSpPr txBox="1"/>
           <p:nvPr/>
         </p:nvSpPr>
         <p:spPr>
           <a:xfrm>
-            <a:off x="822960" y="2103120"/>
-            <a:ext cx="2971800" cy="292608"/>
+            <a:off x="5303520" y="1792224"/>
+            <a:ext cx="6336792" cy="329184"/>
+          </a:xfrm>
+          <a:prstGeom prst="rect">
+            <a:avLst/>
+          </a:prstGeom>
+          <a:noFill/>
+          <a:ln/>
+        </p:spPr>
+        <p:txBody>
+          <a:bodyPr wrap="square" lIns="0" tIns="0" rIns="0" bIns="0" rtlCol="0" anchor="t"/>
+          <a:lstStyle/>
+          <a:p>
+            <a:pPr indent="0" marL="0">
+              <a:buNone/>
+            </a:pPr>
+            <a:r>
+              <a:rPr lang="en-US" sz="1500" dirty="0">
+                <a:solidFill>
+                  <a:schemeClr val="accent5"/>
+                </a:solidFill>
+              </a:rPr>
+              <a:t>YuNet finds your face and tracks eyes, nose and mouth corners every frame.</a:t>
+            </a:r>
+            <a:endParaRPr lang="en-US" sz="1500" dirty="0"/>
+          </a:p>
+        </p:txBody>
+      </p:sp>
+      <p:sp>
+        <p:nvSpPr>
+          <p:cNvPr id="25" name="FiUser circle"/>
+          <p:cNvSpPr/>
+          <p:nvPr/>
+        </p:nvSpPr>
+        <p:spPr>
+          <a:xfrm>
+            <a:off x="4526280" y="2258568"/>
+            <a:ext cx="566928" cy="566928"/>
+          </a:xfrm>
+          <a:prstGeom prst="ellipse">
+            <a:avLst/>
+          </a:prstGeom>
+          <a:solidFill>
+            <a:schemeClr val="accent2">
+              <a:alpha val="18000"/>
+            </a:schemeClr>
+          </a:solidFill>
+          <a:ln/>
+        </p:spPr>
+      </p:sp>
+      <p:pic>
+        <p:nvPicPr>
+          <p:cNvPr id="26" name="FiUser icon" descr="preencoded.png">    </p:cNvPr>
+          <p:cNvPicPr>
+            <a:picLocks noChangeAspect="1"/>
+          </p:cNvPicPr>
+          <p:nvPr/>
+        </p:nvPicPr>
+        <p:blipFill>
+          <a:blip r:embed="rId2"/>
+          <a:stretch>
+            <a:fillRect/>
+          </a:stretch>
+        </p:blipFill>
+        <p:spPr>
+          <a:xfrm>
+            <a:off x="4673681" y="2405969"/>
+            <a:ext cx="272125" cy="272125"/>
+          </a:xfrm>
+          <a:prstGeom prst="rect">
+            <a:avLst/>
+          </a:prstGeom>
+        </p:spPr>
+      </p:pic>
+      <p:sp>
+        <p:nvSpPr>
+          <p:cNvPr id="27" name="Embed header"/>
+          <p:cNvSpPr txBox="1"/>
+          <p:nvPr/>
+        </p:nvSpPr>
+        <p:spPr>
+          <a:xfrm>
+            <a:off x="5303520" y="2240280"/>
+            <a:ext cx="6336792" cy="329184"/>
           </a:xfrm>
           <a:prstGeom prst="rect">
             <a:avLst/>
@@ -7163,101 +8741,307 @@
               <a:buNone/>
             </a:pPr>
             <a:r>
-              <a:rPr lang="en-US" sz="1200" dirty="0">
+              <a:rPr lang="en-US" sz="1800" b="1" dirty="0">
+                <a:solidFill>
+                  <a:schemeClr val="bg2"/>
+                </a:solidFill>
+              </a:rPr>
+              <a:t>Embed</a:t>
+            </a:r>
+            <a:endParaRPr lang="en-US" sz="1800" dirty="0"/>
+          </a:p>
+        </p:txBody>
+      </p:sp>
+      <p:sp>
+        <p:nvSpPr>
+          <p:cNvPr id="28" name="Embed body"/>
+          <p:cNvSpPr txBox="1"/>
+          <p:nvPr/>
+        </p:nvSpPr>
+        <p:spPr>
+          <a:xfrm>
+            <a:off x="5303520" y="2587752"/>
+            <a:ext cx="6336792" cy="329184"/>
+          </a:xfrm>
+          <a:prstGeom prst="rect">
+            <a:avLst/>
+          </a:prstGeom>
+          <a:noFill/>
+          <a:ln/>
+        </p:spPr>
+        <p:txBody>
+          <a:bodyPr wrap="square" lIns="0" tIns="0" rIns="0" bIns="0" rtlCol="0" anchor="t"/>
+          <a:lstStyle/>
+          <a:p>
+            <a:pPr indent="0" marL="0">
+              <a:buNone/>
+            </a:pPr>
+            <a:r>
+              <a:rPr lang="en-US" sz="1500" dirty="0">
                 <a:solidFill>
                   <a:schemeClr val="accent5"/>
                 </a:solidFill>
               </a:rPr>
-              <a:t>Typed on the sender's phone. Never sent.</a:t>
-            </a:r>
-            <a:endParaRPr lang="en-US" sz="1200" dirty="0"/>
-          </a:p>
-        </p:txBody>
-      </p:sp>
-      <p:sp>
-        <p:nvSpPr>
-          <p:cNvPr id="8" name="Sender note box"/>
+              <a:t>SFace aligns the face and turns it into 128 numbers that identify you.</a:t>
+            </a:r>
+            <a:endParaRPr lang="en-US" sz="1500" dirty="0"/>
+          </a:p>
+        </p:txBody>
+      </p:sp>
+      <p:sp>
+        <p:nvSpPr>
+          <p:cNvPr id="29" name="FiKey circle"/>
           <p:cNvSpPr/>
           <p:nvPr/>
         </p:nvSpPr>
         <p:spPr>
           <a:xfrm>
-            <a:off x="822960" y="2514600"/>
-            <a:ext cx="2926080" cy="2057400"/>
+            <a:off x="4526280" y="3054096"/>
+            <a:ext cx="566928" cy="566928"/>
+          </a:xfrm>
+          <a:prstGeom prst="ellipse">
+            <a:avLst/>
+          </a:prstGeom>
+          <a:solidFill>
+            <a:schemeClr val="accent1">
+              <a:alpha val="18000"/>
+            </a:schemeClr>
+          </a:solidFill>
+          <a:ln/>
+        </p:spPr>
+      </p:sp>
+      <p:pic>
+        <p:nvPicPr>
+          <p:cNvPr id="30" name="FiKey icon" descr="preencoded.png">    </p:cNvPr>
+          <p:cNvPicPr>
+            <a:picLocks noChangeAspect="1"/>
+          </p:cNvPicPr>
+          <p:nvPr/>
+        </p:nvPicPr>
+        <p:blipFill>
+          <a:blip r:embed="rId3"/>
+          <a:stretch>
+            <a:fillRect/>
+          </a:stretch>
+        </p:blipFill>
+        <p:spPr>
+          <a:xfrm>
+            <a:off x="4673681" y="3201497"/>
+            <a:ext cx="272125" cy="272125"/>
+          </a:xfrm>
+          <a:prstGeom prst="rect">
+            <a:avLst/>
+          </a:prstGeom>
+        </p:spPr>
+      </p:pic>
+      <p:sp>
+        <p:nvSpPr>
+          <p:cNvPr id="31" name="Rebuild the exact key header"/>
+          <p:cNvSpPr txBox="1"/>
+          <p:nvPr/>
+        </p:nvSpPr>
+        <p:spPr>
+          <a:xfrm>
+            <a:off x="5303520" y="3035808"/>
+            <a:ext cx="6336792" cy="329184"/>
+          </a:xfrm>
+          <a:prstGeom prst="rect">
+            <a:avLst/>
+          </a:prstGeom>
+          <a:noFill/>
+          <a:ln/>
+        </p:spPr>
+        <p:txBody>
+          <a:bodyPr wrap="square" lIns="0" tIns="0" rIns="0" bIns="0" rtlCol="0" anchor="ctr"/>
+          <a:lstStyle/>
+          <a:p>
+            <a:pPr indent="0" marL="0">
+              <a:buNone/>
+            </a:pPr>
+            <a:r>
+              <a:rPr lang="en-US" sz="1800" b="1" dirty="0">
+                <a:solidFill>
+                  <a:schemeClr val="bg2"/>
+                </a:solidFill>
+              </a:rPr>
+              <a:t>Rebuild the exact key</a:t>
+            </a:r>
+            <a:endParaRPr lang="en-US" sz="1800" dirty="0"/>
+          </a:p>
+        </p:txBody>
+      </p:sp>
+      <p:sp>
+        <p:nvSpPr>
+          <p:cNvPr id="32" name="Rebuild the exact key body"/>
+          <p:cNvSpPr txBox="1"/>
+          <p:nvPr/>
+        </p:nvSpPr>
+        <p:spPr>
+          <a:xfrm>
+            <a:off x="5303520" y="3383280"/>
+            <a:ext cx="6336792" cy="566928"/>
+          </a:xfrm>
+          <a:prstGeom prst="rect">
+            <a:avLst/>
+          </a:prstGeom>
+          <a:noFill/>
+          <a:ln/>
+        </p:spPr>
+        <p:txBody>
+          <a:bodyPr wrap="square" lIns="0" tIns="0" rIns="0" bIns="0" rtlCol="0" anchor="t"/>
+          <a:lstStyle/>
+          <a:p>
+            <a:pPr indent="0" marL="0">
+              <a:buNone/>
+            </a:pPr>
+            <a:r>
+              <a:rPr lang="en-US" sz="1500" dirty="0">
+                <a:solidFill>
+                  <a:schemeClr val="accent5"/>
+                </a:solidFill>
+              </a:rPr>
+              <a:t>A fuzzy commitment turns any close-enough capture into the same 128-bit secret. No photo or template is stored.</a:t>
+            </a:r>
+            <a:endParaRPr lang="en-US" sz="1500" dirty="0"/>
+          </a:p>
+        </p:txBody>
+      </p:sp>
+      <p:sp>
+        <p:nvSpPr>
+          <p:cNvPr id="33" name="FiLock circle"/>
+          <p:cNvSpPr/>
+          <p:nvPr/>
+        </p:nvSpPr>
+        <p:spPr>
+          <a:xfrm>
+            <a:off x="4526280" y="4069080"/>
+            <a:ext cx="566928" cy="566928"/>
+          </a:xfrm>
+          <a:prstGeom prst="ellipse">
+            <a:avLst/>
+          </a:prstGeom>
+          <a:solidFill>
+            <a:schemeClr val="accent1">
+              <a:alpha val="18000"/>
+            </a:schemeClr>
+          </a:solidFill>
+          <a:ln/>
+        </p:spPr>
+      </p:sp>
+      <p:pic>
+        <p:nvPicPr>
+          <p:cNvPr id="34" name="FiLock icon" descr="preencoded.png">    </p:cNvPr>
+          <p:cNvPicPr>
+            <a:picLocks noChangeAspect="1"/>
+          </p:cNvPicPr>
+          <p:nvPr/>
+        </p:nvPicPr>
+        <p:blipFill>
+          <a:blip r:embed="rId4"/>
+          <a:stretch>
+            <a:fillRect/>
+          </a:stretch>
+        </p:blipFill>
+        <p:spPr>
+          <a:xfrm>
+            <a:off x="4673681" y="4216481"/>
+            <a:ext cx="272125" cy="272125"/>
+          </a:xfrm>
+          <a:prstGeom prst="rect">
+            <a:avLst/>
+          </a:prstGeom>
+        </p:spPr>
+      </p:pic>
+      <p:sp>
+        <p:nvSpPr>
+          <p:cNvPr id="35" name="Unlock the vault header"/>
+          <p:cNvSpPr txBox="1"/>
+          <p:nvPr/>
+        </p:nvSpPr>
+        <p:spPr>
+          <a:xfrm>
+            <a:off x="5303520" y="4050792"/>
+            <a:ext cx="6336792" cy="329184"/>
+          </a:xfrm>
+          <a:prstGeom prst="rect">
+            <a:avLst/>
+          </a:prstGeom>
+          <a:noFill/>
+          <a:ln/>
+        </p:spPr>
+        <p:txBody>
+          <a:bodyPr wrap="square" lIns="0" tIns="0" rIns="0" bIns="0" rtlCol="0" anchor="ctr"/>
+          <a:lstStyle/>
+          <a:p>
+            <a:pPr indent="0" marL="0">
+              <a:buNone/>
+            </a:pPr>
+            <a:r>
+              <a:rPr lang="en-US" sz="1800" b="1" dirty="0">
+                <a:solidFill>
+                  <a:schemeClr val="bg2"/>
+                </a:solidFill>
+              </a:rPr>
+              <a:t>Unlock the vault</a:t>
+            </a:r>
+            <a:endParaRPr lang="en-US" sz="1800" dirty="0"/>
+          </a:p>
+        </p:txBody>
+      </p:sp>
+      <p:sp>
+        <p:nvSpPr>
+          <p:cNvPr id="36" name="Unlock the vault body"/>
+          <p:cNvSpPr txBox="1"/>
+          <p:nvPr/>
+        </p:nvSpPr>
+        <p:spPr>
+          <a:xfrm>
+            <a:off x="5303520" y="4398264"/>
+            <a:ext cx="6336792" cy="566928"/>
+          </a:xfrm>
+          <a:prstGeom prst="rect">
+            <a:avLst/>
+          </a:prstGeom>
+          <a:noFill/>
+          <a:ln/>
+        </p:spPr>
+        <p:txBody>
+          <a:bodyPr wrap="square" lIns="0" tIns="0" rIns="0" bIns="0" rtlCol="0" anchor="t"/>
+          <a:lstStyle/>
+          <a:p>
+            <a:pPr indent="0" marL="0">
+              <a:buNone/>
+            </a:pPr>
+            <a:r>
+              <a:rPr lang="en-US" sz="1500" dirty="0">
+                <a:solidFill>
+                  <a:schemeClr val="accent5"/>
+                </a:solidFill>
+              </a:rPr>
+              <a:t>Secret + optional PIN opens an AES-256 vault holding the shared key; it can also encrypt any text.</a:t>
+            </a:r>
+            <a:endParaRPr lang="en-US" sz="1500" dirty="0"/>
+          </a:p>
+        </p:txBody>
+      </p:sp>
+      <p:sp>
+        <p:nvSpPr>
+          <p:cNvPr id="37" name="live test panel"/>
+          <p:cNvSpPr/>
+          <p:nvPr/>
+        </p:nvSpPr>
+        <p:spPr>
+          <a:xfrm>
+            <a:off x="4526280" y="5074920"/>
+            <a:ext cx="7114032" cy="914400"/>
           </a:xfrm>
           <a:prstGeom prst="roundRect">
             <a:avLst>
-              <a:gd name="adj" fmla="val 5333"/>
+              <a:gd name="adj" fmla="val 14000"/>
             </a:avLst>
           </a:prstGeom>
           <a:solidFill>
             <a:schemeClr val="tx1"/>
-          </a:solidFill>
-          <a:ln w="9525">
-            <a:solidFill>
-              <a:schemeClr val="accent1"/>
-            </a:solidFill>
-            <a:prstDash val="dash"/>
-          </a:ln>
-        </p:spPr>
-      </p:sp>
-      <p:sp>
-        <p:nvSpPr>
-          <p:cNvPr id="9" name="Sender text"/>
-          <p:cNvSpPr txBox="1"/>
-          <p:nvPr/>
-        </p:nvSpPr>
-        <p:spPr>
-          <a:xfrm>
-            <a:off x="960120" y="2606040"/>
-            <a:ext cx="2651760" cy="1874520"/>
-          </a:xfrm>
-          <a:prstGeom prst="rect">
-            <a:avLst/>
-          </a:prstGeom>
-          <a:noFill/>
-          <a:ln/>
-        </p:spPr>
-        <p:txBody>
-          <a:bodyPr wrap="square" lIns="0" tIns="0" rIns="0" bIns="0" rtlCol="0" anchor="t"/>
-          <a:lstStyle/>
-          <a:p>
-            <a:pPr indent="0" marL="0">
-              <a:buNone/>
-            </a:pPr>
-            <a:r>
-              <a:rPr lang="en-US" sz="1400" dirty="0">
-                <a:solidFill>
-                  <a:schemeClr val="bg2"/>
-                </a:solidFill>
-                <a:latin typeface="Courier New" pitchFamily="34" charset="0"/>
-                <a:ea typeface="Courier New" pitchFamily="34" charset="-122"/>
-                <a:cs typeface="Courier New" pitchFamily="34" charset="-120"/>
-              </a:rPr>
-              <a:t>The book swap is at 41.7056 N, 86.2353 W. Open 0900-1200. Host is Maria Lopez. Bring two paperbacks Saturday.</a:t>
-            </a:r>
-            <a:endParaRPr lang="en-US" sz="1400" dirty="0"/>
-          </a:p>
-        </p:txBody>
-      </p:sp>
-      <p:sp>
-        <p:nvSpPr>
-          <p:cNvPr id="10" name="What an eavesdropper sees pane"/>
-          <p:cNvSpPr/>
-          <p:nvPr/>
-        </p:nvSpPr>
-        <p:spPr>
-          <a:xfrm>
-            <a:off x="4343400" y="1417320"/>
-            <a:ext cx="3474720" cy="4617720"/>
-          </a:xfrm>
-          <a:prstGeom prst="roundRect">
-            <a:avLst>
-              <a:gd name="adj" fmla="val 3684"/>
-            </a:avLst>
-          </a:prstGeom>
-          <a:solidFill>
-            <a:schemeClr val="tx2"/>
           </a:solidFill>
           <a:ln w="12700">
             <a:solidFill>
@@ -7269,457 +9053,50 @@
       </p:sp>
       <p:sp>
         <p:nvSpPr>
-          <p:cNvPr id="11" name="What an eavesdropper sees number dot"/>
+          <p:cNvPr id="38" name="live test label"/>
+          <p:cNvSpPr txBox="1"/>
+          <p:nvPr/>
+        </p:nvSpPr>
+        <p:spPr>
+          <a:xfrm>
+            <a:off x="4800600" y="5120640"/>
+            <a:ext cx="2743200" cy="274320"/>
+          </a:xfrm>
+          <a:prstGeom prst="rect">
+            <a:avLst/>
+          </a:prstGeom>
+          <a:noFill/>
+          <a:ln/>
+        </p:spPr>
+        <p:txBody>
+          <a:bodyPr wrap="square" lIns="0" tIns="0" rIns="0" bIns="0" rtlCol="0" anchor="ctr"/>
+          <a:lstStyle/>
+          <a:p>
+            <a:pPr indent="0" marL="0">
+              <a:buNone/>
+            </a:pPr>
+            <a:r>
+              <a:rPr lang="en-US" sz="1100" b="1" spc="100" kern="0" dirty="0">
+                <a:solidFill>
+                  <a:schemeClr val="accent5"/>
+                </a:solidFill>
+              </a:rPr>
+              <a:t>LIVE WEBCAM TEST</a:t>
+            </a:r>
+            <a:endParaRPr lang="en-US" sz="1100" dirty="0"/>
+          </a:p>
+        </p:txBody>
+      </p:sp>
+      <p:sp>
+        <p:nvSpPr>
+          <p:cNvPr id="39" name="unlocks chip"/>
           <p:cNvSpPr/>
           <p:nvPr/>
         </p:nvSpPr>
         <p:spPr>
           <a:xfrm>
-            <a:off x="4617720" y="1645920"/>
-            <a:ext cx="365760" cy="365760"/>
-          </a:xfrm>
-          <a:prstGeom prst="ellipse">
-            <a:avLst/>
-          </a:prstGeom>
-          <a:solidFill>
-            <a:schemeClr val="accent3"/>
-          </a:solidFill>
-          <a:ln/>
-        </p:spPr>
-      </p:sp>
-      <p:sp>
-        <p:nvSpPr>
-          <p:cNvPr id="12" name="What an eavesdropper sees number"/>
-          <p:cNvSpPr txBox="1"/>
-          <p:nvPr/>
-        </p:nvSpPr>
-        <p:spPr>
-          <a:xfrm>
-            <a:off x="4617720" y="1645920"/>
-            <a:ext cx="365760" cy="365760"/>
-          </a:xfrm>
-          <a:prstGeom prst="rect">
-            <a:avLst/>
-          </a:prstGeom>
-          <a:noFill/>
-          <a:ln/>
-        </p:spPr>
-        <p:txBody>
-          <a:bodyPr wrap="square" lIns="0" tIns="0" rIns="0" bIns="0" rtlCol="0" anchor="ctr"/>
-          <a:lstStyle/>
-          <a:p>
-            <a:pPr algn="ctr" indent="0" marL="0">
-              <a:buNone/>
-            </a:pPr>
-            <a:r>
-              <a:rPr lang="en-US" sz="1300" b="1" dirty="0">
-                <a:solidFill>
-                  <a:schemeClr val="tx1"/>
-                </a:solidFill>
-              </a:rPr>
-              <a:t>2</a:t>
-            </a:r>
-            <a:endParaRPr lang="en-US" sz="1300" dirty="0"/>
-          </a:p>
-        </p:txBody>
-      </p:sp>
-      <p:sp>
-        <p:nvSpPr>
-          <p:cNvPr id="13" name="What an eavesdropper sees title"/>
-          <p:cNvSpPr txBox="1"/>
-          <p:nvPr/>
-        </p:nvSpPr>
-        <p:spPr>
-          <a:xfrm>
-            <a:off x="5120640" y="1627632"/>
-            <a:ext cx="2606040" cy="402336"/>
-          </a:xfrm>
-          <a:prstGeom prst="rect">
-            <a:avLst/>
-          </a:prstGeom>
-          <a:noFill/>
-          <a:ln/>
-        </p:spPr>
-        <p:txBody>
-          <a:bodyPr wrap="square" lIns="0" tIns="0" rIns="0" bIns="0" rtlCol="0" anchor="ctr"/>
-          <a:lstStyle/>
-          <a:p>
-            <a:pPr indent="0" marL="0">
-              <a:buNone/>
-            </a:pPr>
-            <a:r>
-              <a:rPr lang="en-US" sz="1600" b="1" dirty="0">
-                <a:solidFill>
-                  <a:schemeClr val="bg2"/>
-                </a:solidFill>
-              </a:rPr>
-              <a:t>What an eavesdropper sees</a:t>
-            </a:r>
-            <a:endParaRPr lang="en-US" sz="1600" dirty="0"/>
-          </a:p>
-        </p:txBody>
-      </p:sp>
-      <p:sp>
-        <p:nvSpPr>
-          <p:cNvPr id="14" name="What an eavesdropper sees sub"/>
-          <p:cNvSpPr txBox="1"/>
-          <p:nvPr/>
-        </p:nvSpPr>
-        <p:spPr>
-          <a:xfrm>
-            <a:off x="4617720" y="2103120"/>
-            <a:ext cx="2971800" cy="292608"/>
-          </a:xfrm>
-          <a:prstGeom prst="rect">
-            <a:avLst/>
-          </a:prstGeom>
-          <a:noFill/>
-          <a:ln/>
-        </p:spPr>
-        <p:txBody>
-          <a:bodyPr wrap="square" lIns="0" tIns="0" rIns="0" bIns="0" rtlCol="0" anchor="ctr"/>
-          <a:lstStyle/>
-          <a:p>
-            <a:pPr indent="0" marL="0">
-              <a:buNone/>
-            </a:pPr>
-            <a:r>
-              <a:rPr lang="en-US" sz="1200" dirty="0">
-                <a:solidFill>
-                  <a:schemeClr val="accent5"/>
-                </a:solidFill>
-              </a:rPr>
-              <a:t>The only thing that crosses the wire.</a:t>
-            </a:r>
-            <a:endParaRPr lang="en-US" sz="1200" dirty="0"/>
-          </a:p>
-        </p:txBody>
-      </p:sp>
-      <p:sp>
-        <p:nvSpPr>
-          <p:cNvPr id="15" name="chat bubble"/>
-          <p:cNvSpPr/>
-          <p:nvPr/>
-        </p:nvSpPr>
-        <p:spPr>
-          <a:xfrm>
-            <a:off x="4617720" y="2514600"/>
-            <a:ext cx="2926080" cy="2057400"/>
-          </a:xfrm>
-          <a:prstGeom prst="roundRect">
-            <a:avLst>
-              <a:gd name="adj" fmla="val 7111"/>
-            </a:avLst>
-          </a:prstGeom>
-          <a:solidFill>
-            <a:schemeClr val="accent3"/>
-          </a:solidFill>
-          <a:ln/>
-        </p:spPr>
-      </p:sp>
-      <p:sp>
-        <p:nvSpPr>
-          <p:cNvPr id="16" name="What an eavesdropper sees text"/>
-          <p:cNvSpPr txBox="1"/>
-          <p:nvPr/>
-        </p:nvSpPr>
-        <p:spPr>
-          <a:xfrm>
-            <a:off x="4754880" y="2606040"/>
-            <a:ext cx="2651760" cy="1874520"/>
-          </a:xfrm>
-          <a:prstGeom prst="rect">
-            <a:avLst/>
-          </a:prstGeom>
-          <a:noFill/>
-          <a:ln/>
-        </p:spPr>
-        <p:txBody>
-          <a:bodyPr wrap="square" lIns="0" tIns="0" rIns="0" bIns="0" rtlCol="0" anchor="ctr"/>
-          <a:lstStyle/>
-          <a:p>
-            <a:pPr indent="0" marL="0">
-              <a:buNone/>
-            </a:pPr>
-            <a:r>
-              <a:rPr lang="en-US" sz="1500" dirty="0">
-                <a:solidFill>
-                  <a:schemeClr val="bg1"/>
-                </a:solidFill>
-              </a:rPr>
-              <a:t>The brunch is at gift code 41‑7056N and 86‑2353W. Open 9am‑12pm. Birthday girl is Maria Lopez. Bring two cupcakes Saturday.</a:t>
-            </a:r>
-            <a:endParaRPr lang="en-US" sz="1500" dirty="0"/>
-          </a:p>
-        </p:txBody>
-      </p:sp>
-      <p:sp>
-        <p:nvSpPr>
-          <p:cNvPr id="17" name="Receiver pane"/>
-          <p:cNvSpPr/>
-          <p:nvPr/>
-        </p:nvSpPr>
-        <p:spPr>
-          <a:xfrm>
-            <a:off x="8138160" y="1417320"/>
-            <a:ext cx="3474720" cy="4617720"/>
-          </a:xfrm>
-          <a:prstGeom prst="roundRect">
-            <a:avLst>
-              <a:gd name="adj" fmla="val 3684"/>
-            </a:avLst>
-          </a:prstGeom>
-          <a:solidFill>
-            <a:schemeClr val="tx2"/>
-          </a:solidFill>
-          <a:ln w="12700">
-            <a:solidFill>
-              <a:schemeClr val="accent6"/>
-            </a:solidFill>
-            <a:prstDash val="solid"/>
-          </a:ln>
-        </p:spPr>
-      </p:sp>
-      <p:sp>
-        <p:nvSpPr>
-          <p:cNvPr id="18" name="Receiver number dot"/>
-          <p:cNvSpPr/>
-          <p:nvPr/>
-        </p:nvSpPr>
-        <p:spPr>
-          <a:xfrm>
-            <a:off x="8412480" y="1645920"/>
-            <a:ext cx="365760" cy="365760"/>
-          </a:xfrm>
-          <a:prstGeom prst="ellipse">
-            <a:avLst/>
-          </a:prstGeom>
-          <a:solidFill>
-            <a:schemeClr val="accent2"/>
-          </a:solidFill>
-          <a:ln/>
-        </p:spPr>
-      </p:sp>
-      <p:sp>
-        <p:nvSpPr>
-          <p:cNvPr id="19" name="Receiver number"/>
-          <p:cNvSpPr txBox="1"/>
-          <p:nvPr/>
-        </p:nvSpPr>
-        <p:spPr>
-          <a:xfrm>
-            <a:off x="8412480" y="1645920"/>
-            <a:ext cx="365760" cy="365760"/>
-          </a:xfrm>
-          <a:prstGeom prst="rect">
-            <a:avLst/>
-          </a:prstGeom>
-          <a:noFill/>
-          <a:ln/>
-        </p:spPr>
-        <p:txBody>
-          <a:bodyPr wrap="square" lIns="0" tIns="0" rIns="0" bIns="0" rtlCol="0" anchor="ctr"/>
-          <a:lstStyle/>
-          <a:p>
-            <a:pPr algn="ctr" indent="0" marL="0">
-              <a:buNone/>
-            </a:pPr>
-            <a:r>
-              <a:rPr lang="en-US" sz="1300" b="1" dirty="0">
-                <a:solidFill>
-                  <a:schemeClr val="tx1"/>
-                </a:solidFill>
-              </a:rPr>
-              <a:t>3</a:t>
-            </a:r>
-            <a:endParaRPr lang="en-US" sz="1300" dirty="0"/>
-          </a:p>
-        </p:txBody>
-      </p:sp>
-      <p:sp>
-        <p:nvSpPr>
-          <p:cNvPr id="20" name="Receiver title"/>
-          <p:cNvSpPr txBox="1"/>
-          <p:nvPr/>
-        </p:nvSpPr>
-        <p:spPr>
-          <a:xfrm>
-            <a:off x="8915400" y="1627632"/>
-            <a:ext cx="2606040" cy="402336"/>
-          </a:xfrm>
-          <a:prstGeom prst="rect">
-            <a:avLst/>
-          </a:prstGeom>
-          <a:noFill/>
-          <a:ln/>
-        </p:spPr>
-        <p:txBody>
-          <a:bodyPr wrap="square" lIns="0" tIns="0" rIns="0" bIns="0" rtlCol="0" anchor="ctr"/>
-          <a:lstStyle/>
-          <a:p>
-            <a:pPr indent="0" marL="0">
-              <a:buNone/>
-            </a:pPr>
-            <a:r>
-              <a:rPr lang="en-US" sz="1600" b="1" dirty="0">
-                <a:solidFill>
-                  <a:schemeClr val="bg2"/>
-                </a:solidFill>
-              </a:rPr>
-              <a:t>Receiver</a:t>
-            </a:r>
-            <a:endParaRPr lang="en-US" sz="1600" dirty="0"/>
-          </a:p>
-        </p:txBody>
-      </p:sp>
-      <p:sp>
-        <p:nvSpPr>
-          <p:cNvPr id="21" name="Receiver sub"/>
-          <p:cNvSpPr txBox="1"/>
-          <p:nvPr/>
-        </p:nvSpPr>
-        <p:spPr>
-          <a:xfrm>
-            <a:off x="8412480" y="2103120"/>
-            <a:ext cx="2971800" cy="292608"/>
-          </a:xfrm>
-          <a:prstGeom prst="rect">
-            <a:avLst/>
-          </a:prstGeom>
-          <a:noFill/>
-          <a:ln/>
-        </p:spPr>
-        <p:txBody>
-          <a:bodyPr wrap="square" lIns="0" tIns="0" rIns="0" bIns="0" rtlCol="0" anchor="ctr"/>
-          <a:lstStyle/>
-          <a:p>
-            <a:pPr indent="0" marL="0">
-              <a:buNone/>
-            </a:pPr>
-            <a:r>
-              <a:rPr lang="en-US" sz="1200" dirty="0">
-                <a:solidFill>
-                  <a:schemeClr val="accent5"/>
-                </a:solidFill>
-              </a:rPr>
-              <a:t>Unmasked with the shared key.</a:t>
-            </a:r>
-            <a:endParaRPr lang="en-US" sz="1200" dirty="0"/>
-          </a:p>
-        </p:txBody>
-      </p:sp>
-      <p:sp>
-        <p:nvSpPr>
-          <p:cNvPr id="22" name="Receiver note box"/>
-          <p:cNvSpPr/>
-          <p:nvPr/>
-        </p:nvSpPr>
-        <p:spPr>
-          <a:xfrm>
-            <a:off x="8412480" y="2514600"/>
-            <a:ext cx="2926080" cy="2057400"/>
-          </a:xfrm>
-          <a:prstGeom prst="roundRect">
-            <a:avLst>
-              <a:gd name="adj" fmla="val 5333"/>
-            </a:avLst>
-          </a:prstGeom>
-          <a:solidFill>
-            <a:schemeClr val="tx1"/>
-          </a:solidFill>
-          <a:ln w="9525">
-            <a:solidFill>
-              <a:schemeClr val="accent2"/>
-            </a:solidFill>
-            <a:prstDash val="dash"/>
-          </a:ln>
-        </p:spPr>
-      </p:sp>
-      <p:sp>
-        <p:nvSpPr>
-          <p:cNvPr id="23" name="Receiver text"/>
-          <p:cNvSpPr txBox="1"/>
-          <p:nvPr/>
-        </p:nvSpPr>
-        <p:spPr>
-          <a:xfrm>
-            <a:off x="8549640" y="2606040"/>
-            <a:ext cx="2651760" cy="1874520"/>
-          </a:xfrm>
-          <a:prstGeom prst="rect">
-            <a:avLst/>
-          </a:prstGeom>
-          <a:noFill/>
-          <a:ln/>
-        </p:spPr>
-        <p:txBody>
-          <a:bodyPr wrap="square" lIns="0" tIns="0" rIns="0" bIns="0" rtlCol="0" anchor="t"/>
-          <a:lstStyle/>
-          <a:p>
-            <a:pPr indent="0" marL="0">
-              <a:buNone/>
-            </a:pPr>
-            <a:r>
-              <a:rPr lang="en-US" sz="1400" dirty="0">
-                <a:solidFill>
-                  <a:schemeClr val="bg2"/>
-                </a:solidFill>
-                <a:latin typeface="Courier New" pitchFamily="34" charset="0"/>
-                <a:ea typeface="Courier New" pitchFamily="34" charset="-122"/>
-                <a:cs typeface="Courier New" pitchFamily="34" charset="-120"/>
-              </a:rPr>
-              <a:t>The book swap is at 41.7056 N and 86.2353 W. Open 0900-1200. Host is Maria Lopez. Bring two paperbacks Saturday.</a:t>
-            </a:r>
-            <a:endParaRPr lang="en-US" sz="1400" dirty="0"/>
-          </a:p>
-        </p:txBody>
-      </p:sp>
-      <p:sp>
-        <p:nvSpPr>
-          <p:cNvPr id="24" name="scan label"/>
-          <p:cNvSpPr txBox="1"/>
-          <p:nvPr/>
-        </p:nvSpPr>
-        <p:spPr>
-          <a:xfrm>
-            <a:off x="4480560" y="4754880"/>
-            <a:ext cx="2926080" cy="274320"/>
-          </a:xfrm>
-          <a:prstGeom prst="rect">
-            <a:avLst/>
-          </a:prstGeom>
-          <a:noFill/>
-          <a:ln/>
-        </p:spPr>
-        <p:txBody>
-          <a:bodyPr wrap="square" lIns="0" tIns="0" rIns="0" bIns="0" rtlCol="0" anchor="ctr"/>
-          <a:lstStyle/>
-          <a:p>
-            <a:pPr indent="0" marL="0">
-              <a:buNone/>
-            </a:pPr>
-            <a:r>
-              <a:rPr lang="en-US" sz="1200" dirty="0">
-                <a:solidFill>
-                  <a:schemeClr val="accent5"/>
-                </a:solidFill>
-              </a:rPr>
-              <a:t>Keyword scan of the intercept</a:t>
-            </a:r>
-            <a:endParaRPr lang="en-US" sz="1200" dirty="0"/>
-          </a:p>
-        </p:txBody>
-      </p:sp>
-      <p:sp>
-        <p:nvSpPr>
-          <p:cNvPr id="25" name="scan chip"/>
-          <p:cNvSpPr/>
-          <p:nvPr/>
-        </p:nvSpPr>
-        <p:spPr>
-          <a:xfrm>
-            <a:off x="4480560" y="5120640"/>
-            <a:ext cx="2377440" cy="292608"/>
+            <a:off x="4800600" y="5468112"/>
+            <a:ext cx="2240280" cy="292608"/>
           </a:xfrm>
           <a:prstGeom prst="roundRect">
             <a:avLst>
@@ -7741,14 +9118,14 @@
       </p:sp>
       <p:sp>
         <p:nvSpPr>
-          <p:cNvPr id="26" name="scan chip label"/>
+          <p:cNvPr id="40" name="unlocks chip label"/>
           <p:cNvSpPr txBox="1"/>
           <p:nvPr/>
         </p:nvSpPr>
         <p:spPr>
           <a:xfrm>
-            <a:off x="4480560" y="5120640"/>
-            <a:ext cx="2377440" cy="292608"/>
+            <a:off x="4800600" y="5468112"/>
+            <a:ext cx="2240280" cy="292608"/>
           </a:xfrm>
           <a:prstGeom prst="rect">
             <a:avLst/>
@@ -7769,7 +9146,7 @@
                   <a:schemeClr val="accent2"/>
                 </a:solidFill>
               </a:rPr>
-              <a:t>NOTHING FLAGGED</a:t>
+              <a:t>3/3 UNLOCKS  ·  0.84–0.96</a:t>
             </a:r>
             <a:endParaRPr lang="en-US" sz="1100" dirty="0"/>
           </a:p>
@@ -7777,86 +9154,14 @@
       </p:sp>
       <p:sp>
         <p:nvSpPr>
-          <p:cNvPr id="27" name="scan terms"/>
-          <p:cNvSpPr txBox="1"/>
-          <p:nvPr/>
-        </p:nvSpPr>
-        <p:spPr>
-          <a:xfrm>
-            <a:off x="4480560" y="5486400"/>
-            <a:ext cx="2926080" cy="320040"/>
-          </a:xfrm>
-          <a:prstGeom prst="rect">
-            <a:avLst/>
-          </a:prstGeom>
-          <a:noFill/>
-          <a:ln/>
-        </p:spPr>
-        <p:txBody>
-          <a:bodyPr wrap="square" lIns="0" tIns="0" rIns="0" bIns="0" rtlCol="0" anchor="ctr"/>
-          <a:lstStyle/>
-          <a:p>
-            <a:pPr indent="0" marL="0">
-              <a:buNone/>
-            </a:pPr>
-            <a:r>
-              <a:rPr lang="en-US" sz="1200" dirty="0">
-                <a:solidFill>
-                  <a:schemeClr val="accent5"/>
-                </a:solidFill>
-              </a:rPr>
-              <a:t>book · swap · paperback · library</a:t>
-            </a:r>
-            <a:endParaRPr lang="en-US" sz="1200" dirty="0"/>
-          </a:p>
-        </p:txBody>
-      </p:sp>
-      <p:sp>
-        <p:nvSpPr>
-          <p:cNvPr id="28" name="details label"/>
-          <p:cNvSpPr txBox="1"/>
-          <p:nvPr/>
-        </p:nvSpPr>
-        <p:spPr>
-          <a:xfrm>
-            <a:off x="8275320" y="4754880"/>
-            <a:ext cx="2926080" cy="274320"/>
-          </a:xfrm>
-          <a:prstGeom prst="rect">
-            <a:avLst/>
-          </a:prstGeom>
-          <a:noFill/>
-          <a:ln/>
-        </p:spPr>
-        <p:txBody>
-          <a:bodyPr wrap="square" lIns="0" tIns="0" rIns="0" bIns="0" rtlCol="0" anchor="ctr"/>
-          <a:lstStyle/>
-          <a:p>
-            <a:pPr indent="0" marL="0">
-              <a:buNone/>
-            </a:pPr>
-            <a:r>
-              <a:rPr lang="en-US" sz="1200" dirty="0">
-                <a:solidFill>
-                  <a:schemeClr val="accent5"/>
-                </a:solidFill>
-              </a:rPr>
-              <a:t>Exact details recovered</a:t>
-            </a:r>
-            <a:endParaRPr lang="en-US" sz="1200" dirty="0"/>
-          </a:p>
-        </p:txBody>
-      </p:sp>
-      <p:sp>
-        <p:nvSpPr>
-          <p:cNvPr id="29" name="details chip"/>
+          <p:cNvPr id="41" name="impostor chip"/>
           <p:cNvSpPr/>
           <p:nvPr/>
         </p:nvSpPr>
         <p:spPr>
           <a:xfrm>
-            <a:off x="8275320" y="5120640"/>
-            <a:ext cx="2011680" cy="292608"/>
+            <a:off x="7178040" y="5468112"/>
+            <a:ext cx="2240280" cy="292608"/>
           </a:xfrm>
           <a:prstGeom prst="roundRect">
             <a:avLst>
@@ -7878,14 +9183,14 @@
       </p:sp>
       <p:sp>
         <p:nvSpPr>
-          <p:cNvPr id="30" name="details chip label"/>
+          <p:cNvPr id="42" name="impostor chip label"/>
           <p:cNvSpPr txBox="1"/>
           <p:nvPr/>
         </p:nvSpPr>
         <p:spPr>
           <a:xfrm>
-            <a:off x="8275320" y="5120640"/>
-            <a:ext cx="2011680" cy="292608"/>
+            <a:off x="7178040" y="5468112"/>
+            <a:ext cx="2240280" cy="292608"/>
           </a:xfrm>
           <a:prstGeom prst="rect">
             <a:avLst/>
@@ -7906,7 +9211,7 @@
                   <a:schemeClr val="accent2"/>
                 </a:solidFill>
               </a:rPr>
-              <a:t>6 / 6 DETAILS</a:t>
+              <a:t>IMPOSTOR REJECTED  ·  0.05</a:t>
             </a:r>
             <a:endParaRPr lang="en-US" sz="1100" dirty="0"/>
           </a:p>
@@ -7914,14 +9219,43 @@
       </p:sp>
       <p:sp>
         <p:nvSpPr>
-          <p:cNvPr id="31" name="details terms"/>
+          <p:cNvPr id="43" name="pin chip"/>
+          <p:cNvSpPr/>
+          <p:nvPr/>
+        </p:nvSpPr>
+        <p:spPr>
+          <a:xfrm>
+            <a:off x="9555480" y="5468112"/>
+            <a:ext cx="1828800" cy="292608"/>
+          </a:xfrm>
+          <a:prstGeom prst="roundRect">
+            <a:avLst>
+              <a:gd name="adj" fmla="val 50000"/>
+            </a:avLst>
+          </a:prstGeom>
+          <a:solidFill>
+            <a:schemeClr val="accent2">
+              <a:alpha val="15000"/>
+            </a:schemeClr>
+          </a:solidFill>
+          <a:ln w="9525">
+            <a:solidFill>
+              <a:schemeClr val="accent2"/>
+            </a:solidFill>
+            <a:prstDash val="solid"/>
+          </a:ln>
+        </p:spPr>
+      </p:sp>
+      <p:sp>
+        <p:nvSpPr>
+          <p:cNvPr id="44" name="pin chip label"/>
           <p:cNvSpPr txBox="1"/>
           <p:nvPr/>
         </p:nvSpPr>
         <p:spPr>
           <a:xfrm>
-            <a:off x="8275320" y="5486400"/>
-            <a:ext cx="2926080" cy="320040"/>
+            <a:off x="9555480" y="5468112"/>
+            <a:ext cx="1828800" cy="292608"/>
           </a:xfrm>
           <a:prstGeom prst="rect">
             <a:avLst/>
@@ -7933,54 +9267,18 @@
           <a:bodyPr wrap="square" lIns="0" tIns="0" rIns="0" bIns="0" rtlCol="0" anchor="ctr"/>
           <a:lstStyle/>
           <a:p>
-            <a:pPr indent="0" marL="0">
-              <a:buNone/>
-            </a:pPr>
-            <a:r>
-              <a:rPr lang="en-US" sz="1200" dirty="0">
-                <a:solidFill>
-                  <a:schemeClr val="accent5"/>
-                </a:solidFill>
-              </a:rPr>
-              <a:t>coords · times · name · day</a:t>
-            </a:r>
-            <a:endParaRPr lang="en-US" sz="1200" dirty="0"/>
-          </a:p>
-        </p:txBody>
-      </p:sp>
-      <p:sp>
-        <p:nvSpPr>
-          <p:cNvPr id="32" name="sender footnote"/>
-          <p:cNvSpPr txBox="1"/>
-          <p:nvPr/>
-        </p:nvSpPr>
-        <p:spPr>
-          <a:xfrm>
-            <a:off x="822960" y="4754880"/>
-            <a:ext cx="2926080" cy="274320"/>
-          </a:xfrm>
-          <a:prstGeom prst="rect">
-            <a:avLst/>
-          </a:prstGeom>
-          <a:noFill/>
-          <a:ln/>
-        </p:spPr>
-        <p:txBody>
-          <a:bodyPr wrap="square" lIns="0" tIns="0" rIns="0" bIns="0" rtlCol="0" anchor="ctr"/>
-          <a:lstStyle/>
-          <a:p>
-            <a:pPr indent="0" marL="0">
-              <a:buNone/>
-            </a:pPr>
-            <a:r>
-              <a:rPr lang="en-US" sz="1200" dirty="0">
-                <a:solidFill>
-                  <a:schemeClr val="accent5"/>
-                </a:solidFill>
-              </a:rPr>
-              <a:t>Your note stays on your phone.</a:t>
-            </a:r>
-            <a:endParaRPr lang="en-US" sz="1200" dirty="0"/>
+            <a:pPr algn="ctr" indent="0" marL="0">
+              <a:buNone/>
+            </a:pPr>
+            <a:r>
+              <a:rPr lang="en-US" sz="1100" b="1" dirty="0">
+                <a:solidFill>
+                  <a:schemeClr val="accent2"/>
+                </a:solidFill>
+              </a:rPr>
+              <a:t>WRONG PIN REJECTED</a:t>
+            </a:r>
+            <a:endParaRPr lang="en-US" sz="1100" dirty="0"/>
           </a:p>
         </p:txBody>
       </p:sp>
@@ -8086,7 +9384,7 @@
                   <a:schemeClr val="bg2"/>
                 </a:solidFill>
               </a:rPr>
-              <a:t>Exact details survive the round trip</a:t>
+              <a:t>Live demo: one message, three views</a:t>
             </a:r>
             <a:endParaRPr lang="en-US" sz="3200" dirty="0"/>
           </a:p>
@@ -8094,18 +9392,18 @@
       </p:sp>
       <p:sp>
         <p:nvSpPr>
-          <p:cNvPr id="3" name="stat 0"/>
+          <p:cNvPr id="3" name="Sender pane"/>
           <p:cNvSpPr/>
           <p:nvPr/>
         </p:nvSpPr>
         <p:spPr>
           <a:xfrm>
-            <a:off x="548640" y="1463040"/>
-            <a:ext cx="2615184" cy="1965960"/>
+            <a:off x="548640" y="1417320"/>
+            <a:ext cx="3474720" cy="4617720"/>
           </a:xfrm>
           <a:prstGeom prst="roundRect">
             <a:avLst>
-              <a:gd name="adj" fmla="val 6512"/>
+              <a:gd name="adj" fmla="val 3684"/>
             </a:avLst>
           </a:prstGeom>
           <a:solidFill>
@@ -8121,14 +9419,34 @@
       </p:sp>
       <p:sp>
         <p:nvSpPr>
-          <p:cNvPr id="4" name="stat value 0"/>
+          <p:cNvPr id="4" name="Sender number dot"/>
+          <p:cNvSpPr/>
+          <p:nvPr/>
+        </p:nvSpPr>
+        <p:spPr>
+          <a:xfrm>
+            <a:off x="822960" y="1645920"/>
+            <a:ext cx="365760" cy="365760"/>
+          </a:xfrm>
+          <a:prstGeom prst="ellipse">
+            <a:avLst/>
+          </a:prstGeom>
+          <a:solidFill>
+            <a:schemeClr val="accent1"/>
+          </a:solidFill>
+          <a:ln/>
+        </p:spPr>
+      </p:sp>
+      <p:sp>
+        <p:nvSpPr>
+          <p:cNvPr id="5" name="Sender number"/>
           <p:cNvSpPr txBox="1"/>
           <p:nvPr/>
         </p:nvSpPr>
         <p:spPr>
           <a:xfrm>
             <a:off x="822960" y="1645920"/>
-            <a:ext cx="2194560" cy="868680"/>
+            <a:ext cx="365760" cy="365760"/>
           </a:xfrm>
           <a:prstGeom prst="rect">
             <a:avLst/>
@@ -8140,74 +9458,173 @@
           <a:bodyPr wrap="square" lIns="0" tIns="0" rIns="0" bIns="0" rtlCol="0" anchor="ctr"/>
           <a:lstStyle/>
           <a:p>
+            <a:pPr algn="ctr" indent="0" marL="0">
+              <a:buNone/>
+            </a:pPr>
+            <a:r>
+              <a:rPr lang="en-US" sz="1300" b="1" dirty="0">
+                <a:solidFill>
+                  <a:schemeClr val="tx1"/>
+                </a:solidFill>
+              </a:rPr>
+              <a:t>1</a:t>
+            </a:r>
+            <a:endParaRPr lang="en-US" sz="1300" dirty="0"/>
+          </a:p>
+        </p:txBody>
+      </p:sp>
+      <p:sp>
+        <p:nvSpPr>
+          <p:cNvPr id="6" name="Sender title"/>
+          <p:cNvSpPr txBox="1"/>
+          <p:nvPr/>
+        </p:nvSpPr>
+        <p:spPr>
+          <a:xfrm>
+            <a:off x="1325880" y="1627632"/>
+            <a:ext cx="2606040" cy="402336"/>
+          </a:xfrm>
+          <a:prstGeom prst="rect">
+            <a:avLst/>
+          </a:prstGeom>
+          <a:noFill/>
+          <a:ln/>
+        </p:spPr>
+        <p:txBody>
+          <a:bodyPr wrap="square" lIns="0" tIns="0" rIns="0" bIns="0" rtlCol="0" anchor="ctr"/>
+          <a:lstStyle/>
+          <a:p>
             <a:pPr indent="0" marL="0">
               <a:buNone/>
             </a:pPr>
             <a:r>
-              <a:rPr lang="en-US" sz="4800" b="1" dirty="0">
-                <a:solidFill>
-                  <a:schemeClr val="accent2"/>
-                </a:solidFill>
-                <a:latin typeface="Arial" pitchFamily="34" charset="0"/>
-                <a:ea typeface="Arial" pitchFamily="34" charset="-122"/>
-                <a:cs typeface="Arial" pitchFamily="34" charset="-120"/>
-              </a:rPr>
-              <a:t>100%</a:t>
-            </a:r>
-            <a:endParaRPr lang="en-US" sz="4800" dirty="0"/>
-          </a:p>
-        </p:txBody>
-      </p:sp>
-      <p:sp>
-        <p:nvSpPr>
-          <p:cNvPr id="5" name="stat label 0"/>
+              <a:rPr lang="en-US" sz="1600" b="1" dirty="0">
+                <a:solidFill>
+                  <a:schemeClr val="bg2"/>
+                </a:solidFill>
+              </a:rPr>
+              <a:t>Sender</a:t>
+            </a:r>
+            <a:endParaRPr lang="en-US" sz="1600" dirty="0"/>
+          </a:p>
+        </p:txBody>
+      </p:sp>
+      <p:sp>
+        <p:nvSpPr>
+          <p:cNvPr id="7" name="Sender sub"/>
           <p:cNvSpPr txBox="1"/>
           <p:nvPr/>
         </p:nvSpPr>
         <p:spPr>
           <a:xfrm>
-            <a:off x="822960" y="2560320"/>
-            <a:ext cx="2148840" cy="731520"/>
-          </a:xfrm>
-          <a:prstGeom prst="rect">
-            <a:avLst/>
-          </a:prstGeom>
-          <a:noFill/>
-          <a:ln/>
-        </p:spPr>
-        <p:txBody>
-          <a:bodyPr wrap="square" lIns="0" tIns="0" rIns="0" bIns="0" rtlCol="0" anchor="t"/>
+            <a:off x="822960" y="2103120"/>
+            <a:ext cx="2971800" cy="292608"/>
+          </a:xfrm>
+          <a:prstGeom prst="rect">
+            <a:avLst/>
+          </a:prstGeom>
+          <a:noFill/>
+          <a:ln/>
+        </p:spPr>
+        <p:txBody>
+          <a:bodyPr wrap="square" lIns="0" tIns="0" rIns="0" bIns="0" rtlCol="0" anchor="ctr"/>
           <a:lstStyle/>
           <a:p>
             <a:pPr indent="0" marL="0">
               <a:buNone/>
             </a:pPr>
             <a:r>
-              <a:rPr lang="en-US" sz="1400" dirty="0">
+              <a:rPr lang="en-US" sz="1200" dirty="0">
                 <a:solidFill>
                   <a:schemeClr val="accent5"/>
                 </a:solidFill>
               </a:rPr>
-              <a:t>exact details recovered on the test cases, both codecs</a:t>
-            </a:r>
-            <a:endParaRPr lang="en-US" sz="1400" dirty="0"/>
-          </a:p>
-        </p:txBody>
-      </p:sp>
-      <p:sp>
-        <p:nvSpPr>
-          <p:cNvPr id="6" name="stat 1"/>
+              <a:t>Typed on the sender's phone. Never sent.</a:t>
+            </a:r>
+            <a:endParaRPr lang="en-US" sz="1200" dirty="0"/>
+          </a:p>
+        </p:txBody>
+      </p:sp>
+      <p:sp>
+        <p:nvSpPr>
+          <p:cNvPr id="8" name="Sender note box"/>
           <p:cNvSpPr/>
           <p:nvPr/>
         </p:nvSpPr>
         <p:spPr>
           <a:xfrm>
-            <a:off x="3364992" y="1463040"/>
-            <a:ext cx="2615184" cy="1965960"/>
+            <a:off x="822960" y="2514600"/>
+            <a:ext cx="2926080" cy="2057400"/>
           </a:xfrm>
           <a:prstGeom prst="roundRect">
             <a:avLst>
-              <a:gd name="adj" fmla="val 6512"/>
+              <a:gd name="adj" fmla="val 5333"/>
+            </a:avLst>
+          </a:prstGeom>
+          <a:solidFill>
+            <a:schemeClr val="tx1"/>
+          </a:solidFill>
+          <a:ln w="9525">
+            <a:solidFill>
+              <a:schemeClr val="accent1"/>
+            </a:solidFill>
+            <a:prstDash val="dash"/>
+          </a:ln>
+        </p:spPr>
+      </p:sp>
+      <p:sp>
+        <p:nvSpPr>
+          <p:cNvPr id="9" name="Sender text"/>
+          <p:cNvSpPr txBox="1"/>
+          <p:nvPr/>
+        </p:nvSpPr>
+        <p:spPr>
+          <a:xfrm>
+            <a:off x="960120" y="2606040"/>
+            <a:ext cx="2651760" cy="1874520"/>
+          </a:xfrm>
+          <a:prstGeom prst="rect">
+            <a:avLst/>
+          </a:prstGeom>
+          <a:noFill/>
+          <a:ln/>
+        </p:spPr>
+        <p:txBody>
+          <a:bodyPr wrap="square" lIns="0" tIns="0" rIns="0" bIns="0" rtlCol="0" anchor="t"/>
+          <a:lstStyle/>
+          <a:p>
+            <a:pPr indent="0" marL="0">
+              <a:buNone/>
+            </a:pPr>
+            <a:r>
+              <a:rPr lang="en-US" sz="1400" dirty="0">
+                <a:solidFill>
+                  <a:schemeClr val="bg2"/>
+                </a:solidFill>
+                <a:latin typeface="Courier New" pitchFamily="34" charset="0"/>
+                <a:ea typeface="Courier New" pitchFamily="34" charset="-122"/>
+                <a:cs typeface="Courier New" pitchFamily="34" charset="-120"/>
+              </a:rPr>
+              <a:t>The book swap is at 41.7056 N, 86.2353 W. Open 0900-1200. Host is Maria Lopez. Bring two paperbacks Saturday.</a:t>
+            </a:r>
+            <a:endParaRPr lang="en-US" sz="1400" dirty="0"/>
+          </a:p>
+        </p:txBody>
+      </p:sp>
+      <p:sp>
+        <p:nvSpPr>
+          <p:cNvPr id="10" name="What an eavesdropper sees pane"/>
+          <p:cNvSpPr/>
+          <p:nvPr/>
+        </p:nvSpPr>
+        <p:spPr>
+          <a:xfrm>
+            <a:off x="4343400" y="1417320"/>
+            <a:ext cx="3474720" cy="4617720"/>
+          </a:xfrm>
+          <a:prstGeom prst="roundRect">
+            <a:avLst>
+              <a:gd name="adj" fmla="val 3684"/>
             </a:avLst>
           </a:prstGeom>
           <a:solidFill>
@@ -8223,14 +9640,34 @@
       </p:sp>
       <p:sp>
         <p:nvSpPr>
-          <p:cNvPr id="7" name="stat value 1"/>
+          <p:cNvPr id="11" name="What an eavesdropper sees number dot"/>
+          <p:cNvSpPr/>
+          <p:nvPr/>
+        </p:nvSpPr>
+        <p:spPr>
+          <a:xfrm>
+            <a:off x="4617720" y="1645920"/>
+            <a:ext cx="365760" cy="365760"/>
+          </a:xfrm>
+          <a:prstGeom prst="ellipse">
+            <a:avLst/>
+          </a:prstGeom>
+          <a:solidFill>
+            <a:schemeClr val="accent3"/>
+          </a:solidFill>
+          <a:ln/>
+        </p:spPr>
+      </p:sp>
+      <p:sp>
+        <p:nvSpPr>
+          <p:cNvPr id="12" name="What an eavesdropper sees number"/>
           <p:cNvSpPr txBox="1"/>
           <p:nvPr/>
         </p:nvSpPr>
         <p:spPr>
           <a:xfrm>
-            <a:off x="3639312" y="1645920"/>
-            <a:ext cx="2194560" cy="868680"/>
+            <a:off x="4617720" y="1645920"/>
+            <a:ext cx="365760" cy="365760"/>
           </a:xfrm>
           <a:prstGeom prst="rect">
             <a:avLst/>
@@ -8242,74 +9679,165 @@
           <a:bodyPr wrap="square" lIns="0" tIns="0" rIns="0" bIns="0" rtlCol="0" anchor="ctr"/>
           <a:lstStyle/>
           <a:p>
+            <a:pPr algn="ctr" indent="0" marL="0">
+              <a:buNone/>
+            </a:pPr>
+            <a:r>
+              <a:rPr lang="en-US" sz="1300" b="1" dirty="0">
+                <a:solidFill>
+                  <a:schemeClr val="tx1"/>
+                </a:solidFill>
+              </a:rPr>
+              <a:t>2</a:t>
+            </a:r>
+            <a:endParaRPr lang="en-US" sz="1300" dirty="0"/>
+          </a:p>
+        </p:txBody>
+      </p:sp>
+      <p:sp>
+        <p:nvSpPr>
+          <p:cNvPr id="13" name="What an eavesdropper sees title"/>
+          <p:cNvSpPr txBox="1"/>
+          <p:nvPr/>
+        </p:nvSpPr>
+        <p:spPr>
+          <a:xfrm>
+            <a:off x="5120640" y="1627632"/>
+            <a:ext cx="2606040" cy="402336"/>
+          </a:xfrm>
+          <a:prstGeom prst="rect">
+            <a:avLst/>
+          </a:prstGeom>
+          <a:noFill/>
+          <a:ln/>
+        </p:spPr>
+        <p:txBody>
+          <a:bodyPr wrap="square" lIns="0" tIns="0" rIns="0" bIns="0" rtlCol="0" anchor="ctr"/>
+          <a:lstStyle/>
+          <a:p>
             <a:pPr indent="0" marL="0">
               <a:buNone/>
             </a:pPr>
             <a:r>
-              <a:rPr lang="en-US" sz="4800" b="1" dirty="0">
-                <a:solidFill>
-                  <a:schemeClr val="accent2"/>
-                </a:solidFill>
-                <a:latin typeface="Arial" pitchFamily="34" charset="0"/>
-                <a:ea typeface="Arial" pitchFamily="34" charset="-122"/>
-                <a:cs typeface="Arial" pitchFamily="34" charset="-120"/>
-              </a:rPr>
-              <a:t>3 / 3</a:t>
-            </a:r>
-            <a:endParaRPr lang="en-US" sz="4800" dirty="0"/>
-          </a:p>
-        </p:txBody>
-      </p:sp>
-      <p:sp>
-        <p:nvSpPr>
-          <p:cNvPr id="8" name="stat label 1"/>
+              <a:rPr lang="en-US" sz="1600" b="1" dirty="0">
+                <a:solidFill>
+                  <a:schemeClr val="bg2"/>
+                </a:solidFill>
+              </a:rPr>
+              <a:t>What an eavesdropper sees</a:t>
+            </a:r>
+            <a:endParaRPr lang="en-US" sz="1600" dirty="0"/>
+          </a:p>
+        </p:txBody>
+      </p:sp>
+      <p:sp>
+        <p:nvSpPr>
+          <p:cNvPr id="14" name="What an eavesdropper sees sub"/>
           <p:cNvSpPr txBox="1"/>
           <p:nvPr/>
         </p:nvSpPr>
         <p:spPr>
           <a:xfrm>
-            <a:off x="3639312" y="2560320"/>
-            <a:ext cx="2148840" cy="731520"/>
-          </a:xfrm>
-          <a:prstGeom prst="rect">
-            <a:avLst/>
-          </a:prstGeom>
-          <a:noFill/>
-          <a:ln/>
-        </p:spPr>
-        <p:txBody>
-          <a:bodyPr wrap="square" lIns="0" tIns="0" rIns="0" bIns="0" rtlCol="0" anchor="t"/>
+            <a:off x="4617720" y="2103120"/>
+            <a:ext cx="2971800" cy="292608"/>
+          </a:xfrm>
+          <a:prstGeom prst="rect">
+            <a:avLst/>
+          </a:prstGeom>
+          <a:noFill/>
+          <a:ln/>
+        </p:spPr>
+        <p:txBody>
+          <a:bodyPr wrap="square" lIns="0" tIns="0" rIns="0" bIns="0" rtlCol="0" anchor="ctr"/>
           <a:lstStyle/>
           <a:p>
             <a:pPr indent="0" marL="0">
               <a:buNone/>
             </a:pPr>
             <a:r>
-              <a:rPr lang="en-US" sz="1400" dirty="0">
+              <a:rPr lang="en-US" sz="1200" dirty="0">
                 <a:solidFill>
                   <a:schemeClr val="accent5"/>
                 </a:solidFill>
               </a:rPr>
-              <a:t>covers pass the keyword check</a:t>
-            </a:r>
-            <a:endParaRPr lang="en-US" sz="1400" dirty="0"/>
-          </a:p>
-        </p:txBody>
-      </p:sp>
-      <p:sp>
-        <p:nvSpPr>
-          <p:cNvPr id="9" name="stat 2"/>
+              <a:t>The only thing that crosses the wire.</a:t>
+            </a:r>
+            <a:endParaRPr lang="en-US" sz="1200" dirty="0"/>
+          </a:p>
+        </p:txBody>
+      </p:sp>
+      <p:sp>
+        <p:nvSpPr>
+          <p:cNvPr id="15" name="chat bubble"/>
           <p:cNvSpPr/>
           <p:nvPr/>
         </p:nvSpPr>
         <p:spPr>
           <a:xfrm>
-            <a:off x="6181344" y="1463040"/>
-            <a:ext cx="2615184" cy="1965960"/>
+            <a:off x="4617720" y="2514600"/>
+            <a:ext cx="2926080" cy="2057400"/>
           </a:xfrm>
           <a:prstGeom prst="roundRect">
             <a:avLst>
-              <a:gd name="adj" fmla="val 6512"/>
+              <a:gd name="adj" fmla="val 7111"/>
+            </a:avLst>
+          </a:prstGeom>
+          <a:solidFill>
+            <a:schemeClr val="accent3"/>
+          </a:solidFill>
+          <a:ln/>
+        </p:spPr>
+      </p:sp>
+      <p:sp>
+        <p:nvSpPr>
+          <p:cNvPr id="16" name="What an eavesdropper sees text"/>
+          <p:cNvSpPr txBox="1"/>
+          <p:nvPr/>
+        </p:nvSpPr>
+        <p:spPr>
+          <a:xfrm>
+            <a:off x="4754880" y="2606040"/>
+            <a:ext cx="2651760" cy="1874520"/>
+          </a:xfrm>
+          <a:prstGeom prst="rect">
+            <a:avLst/>
+          </a:prstGeom>
+          <a:noFill/>
+          <a:ln/>
+        </p:spPr>
+        <p:txBody>
+          <a:bodyPr wrap="square" lIns="0" tIns="0" rIns="0" bIns="0" rtlCol="0" anchor="ctr"/>
+          <a:lstStyle/>
+          <a:p>
+            <a:pPr indent="0" marL="0">
+              <a:buNone/>
+            </a:pPr>
+            <a:r>
+              <a:rPr lang="en-US" sz="1500" dirty="0">
+                <a:solidFill>
+                  <a:schemeClr val="bg1"/>
+                </a:solidFill>
+              </a:rPr>
+              <a:t>The brunch is at gift code 41‑7056N and 86‑2353W. Open 9am‑12pm. Birthday girl is Maria Lopez. Bring two cupcakes Saturday.</a:t>
+            </a:r>
+            <a:endParaRPr lang="en-US" sz="1500" dirty="0"/>
+          </a:p>
+        </p:txBody>
+      </p:sp>
+      <p:sp>
+        <p:nvSpPr>
+          <p:cNvPr id="17" name="Receiver pane"/>
+          <p:cNvSpPr/>
+          <p:nvPr/>
+        </p:nvSpPr>
+        <p:spPr>
+          <a:xfrm>
+            <a:off x="8138160" y="1417320"/>
+            <a:ext cx="3474720" cy="4617720"/>
+          </a:xfrm>
+          <a:prstGeom prst="roundRect">
+            <a:avLst>
+              <a:gd name="adj" fmla="val 3684"/>
             </a:avLst>
           </a:prstGeom>
           <a:solidFill>
@@ -8325,14 +9853,34 @@
       </p:sp>
       <p:sp>
         <p:nvSpPr>
-          <p:cNvPr id="10" name="stat value 2"/>
+          <p:cNvPr id="18" name="Receiver number dot"/>
+          <p:cNvSpPr/>
+          <p:nvPr/>
+        </p:nvSpPr>
+        <p:spPr>
+          <a:xfrm>
+            <a:off x="8412480" y="1645920"/>
+            <a:ext cx="365760" cy="365760"/>
+          </a:xfrm>
+          <a:prstGeom prst="ellipse">
+            <a:avLst/>
+          </a:prstGeom>
+          <a:solidFill>
+            <a:schemeClr val="accent2"/>
+          </a:solidFill>
+          <a:ln/>
+        </p:spPr>
+      </p:sp>
+      <p:sp>
+        <p:nvSpPr>
+          <p:cNvPr id="19" name="Receiver number"/>
           <p:cNvSpPr txBox="1"/>
           <p:nvPr/>
         </p:nvSpPr>
         <p:spPr>
           <a:xfrm>
-            <a:off x="6455664" y="1645920"/>
-            <a:ext cx="2194560" cy="868680"/>
+            <a:off x="8412480" y="1645920"/>
+            <a:ext cx="365760" cy="365760"/>
           </a:xfrm>
           <a:prstGeom prst="rect">
             <a:avLst/>
@@ -8344,34 +9892,130 @@
           <a:bodyPr wrap="square" lIns="0" tIns="0" rIns="0" bIns="0" rtlCol="0" anchor="ctr"/>
           <a:lstStyle/>
           <a:p>
+            <a:pPr algn="ctr" indent="0" marL="0">
+              <a:buNone/>
+            </a:pPr>
+            <a:r>
+              <a:rPr lang="en-US" sz="1300" b="1" dirty="0">
+                <a:solidFill>
+                  <a:schemeClr val="tx1"/>
+                </a:solidFill>
+              </a:rPr>
+              <a:t>3</a:t>
+            </a:r>
+            <a:endParaRPr lang="en-US" sz="1300" dirty="0"/>
+          </a:p>
+        </p:txBody>
+      </p:sp>
+      <p:sp>
+        <p:nvSpPr>
+          <p:cNvPr id="20" name="Receiver title"/>
+          <p:cNvSpPr txBox="1"/>
+          <p:nvPr/>
+        </p:nvSpPr>
+        <p:spPr>
+          <a:xfrm>
+            <a:off x="8915400" y="1627632"/>
+            <a:ext cx="2606040" cy="402336"/>
+          </a:xfrm>
+          <a:prstGeom prst="rect">
+            <a:avLst/>
+          </a:prstGeom>
+          <a:noFill/>
+          <a:ln/>
+        </p:spPr>
+        <p:txBody>
+          <a:bodyPr wrap="square" lIns="0" tIns="0" rIns="0" bIns="0" rtlCol="0" anchor="ctr"/>
+          <a:lstStyle/>
+          <a:p>
             <a:pPr indent="0" marL="0">
               <a:buNone/>
             </a:pPr>
             <a:r>
-              <a:rPr lang="en-US" sz="4800" b="1" dirty="0">
-                <a:solidFill>
-                  <a:schemeClr val="accent1"/>
-                </a:solidFill>
-                <a:latin typeface="Arial" pitchFamily="34" charset="0"/>
-                <a:ea typeface="Arial" pitchFamily="34" charset="-122"/>
-                <a:cs typeface="Arial" pitchFamily="34" charset="-120"/>
-              </a:rPr>
-              <a:t>92%</a:t>
-            </a:r>
-            <a:endParaRPr lang="en-US" sz="4800" dirty="0"/>
-          </a:p>
-        </p:txBody>
-      </p:sp>
-      <p:sp>
-        <p:nvSpPr>
-          <p:cNvPr id="11" name="stat label 2"/>
+              <a:rPr lang="en-US" sz="1600" b="1" dirty="0">
+                <a:solidFill>
+                  <a:schemeClr val="bg2"/>
+                </a:solidFill>
+              </a:rPr>
+              <a:t>Receiver</a:t>
+            </a:r>
+            <a:endParaRPr lang="en-US" sz="1600" dirty="0"/>
+          </a:p>
+        </p:txBody>
+      </p:sp>
+      <p:sp>
+        <p:nvSpPr>
+          <p:cNvPr id="21" name="Receiver sub"/>
           <p:cNvSpPr txBox="1"/>
           <p:nvPr/>
         </p:nvSpPr>
         <p:spPr>
           <a:xfrm>
-            <a:off x="6455664" y="2560320"/>
-            <a:ext cx="2148840" cy="731520"/>
+            <a:off x="8412480" y="2103120"/>
+            <a:ext cx="2971800" cy="292608"/>
+          </a:xfrm>
+          <a:prstGeom prst="rect">
+            <a:avLst/>
+          </a:prstGeom>
+          <a:noFill/>
+          <a:ln/>
+        </p:spPr>
+        <p:txBody>
+          <a:bodyPr wrap="square" lIns="0" tIns="0" rIns="0" bIns="0" rtlCol="0" anchor="ctr"/>
+          <a:lstStyle/>
+          <a:p>
+            <a:pPr indent="0" marL="0">
+              <a:buNone/>
+            </a:pPr>
+            <a:r>
+              <a:rPr lang="en-US" sz="1200" dirty="0">
+                <a:solidFill>
+                  <a:schemeClr val="accent5"/>
+                </a:solidFill>
+              </a:rPr>
+              <a:t>Unmasked with the shared key.</a:t>
+            </a:r>
+            <a:endParaRPr lang="en-US" sz="1200" dirty="0"/>
+          </a:p>
+        </p:txBody>
+      </p:sp>
+      <p:sp>
+        <p:nvSpPr>
+          <p:cNvPr id="22" name="Receiver note box"/>
+          <p:cNvSpPr/>
+          <p:nvPr/>
+        </p:nvSpPr>
+        <p:spPr>
+          <a:xfrm>
+            <a:off x="8412480" y="2514600"/>
+            <a:ext cx="2926080" cy="2057400"/>
+          </a:xfrm>
+          <a:prstGeom prst="roundRect">
+            <a:avLst>
+              <a:gd name="adj" fmla="val 5333"/>
+            </a:avLst>
+          </a:prstGeom>
+          <a:solidFill>
+            <a:schemeClr val="tx1"/>
+          </a:solidFill>
+          <a:ln w="9525">
+            <a:solidFill>
+              <a:schemeClr val="accent2"/>
+            </a:solidFill>
+            <a:prstDash val="dash"/>
+          </a:ln>
+        </p:spPr>
+      </p:sp>
+      <p:sp>
+        <p:nvSpPr>
+          <p:cNvPr id="23" name="Receiver text"/>
+          <p:cNvSpPr txBox="1"/>
+          <p:nvPr/>
+        </p:nvSpPr>
+        <p:spPr>
+          <a:xfrm>
+            <a:off x="8549640" y="2606040"/>
+            <a:ext cx="2651760" cy="1874520"/>
           </a:xfrm>
           <a:prstGeom prst="rect">
             <a:avLst/>
@@ -8389,24 +10033,445 @@
             <a:r>
               <a:rPr lang="en-US" sz="1400" dirty="0">
                 <a:solidFill>
+                  <a:schemeClr val="bg2"/>
+                </a:solidFill>
+                <a:latin typeface="Courier New" pitchFamily="34" charset="0"/>
+                <a:ea typeface="Courier New" pitchFamily="34" charset="-122"/>
+                <a:cs typeface="Courier New" pitchFamily="34" charset="-120"/>
+              </a:rPr>
+              <a:t>The book swap is at 41.7056 N and 86.2353 W. Open 0900-1200. Host is Maria Lopez. Bring two paperbacks Saturday.</a:t>
+            </a:r>
+            <a:endParaRPr lang="en-US" sz="1400" dirty="0"/>
+          </a:p>
+        </p:txBody>
+      </p:sp>
+      <p:sp>
+        <p:nvSpPr>
+          <p:cNvPr id="24" name="scan label"/>
+          <p:cNvSpPr txBox="1"/>
+          <p:nvPr/>
+        </p:nvSpPr>
+        <p:spPr>
+          <a:xfrm>
+            <a:off x="4480560" y="4754880"/>
+            <a:ext cx="2926080" cy="274320"/>
+          </a:xfrm>
+          <a:prstGeom prst="rect">
+            <a:avLst/>
+          </a:prstGeom>
+          <a:noFill/>
+          <a:ln/>
+        </p:spPr>
+        <p:txBody>
+          <a:bodyPr wrap="square" lIns="0" tIns="0" rIns="0" bIns="0" rtlCol="0" anchor="ctr"/>
+          <a:lstStyle/>
+          <a:p>
+            <a:pPr indent="0" marL="0">
+              <a:buNone/>
+            </a:pPr>
+            <a:r>
+              <a:rPr lang="en-US" sz="1200" dirty="0">
+                <a:solidFill>
                   <a:schemeClr val="accent5"/>
                 </a:solidFill>
               </a:rPr>
-              <a:t>recovered on 3 messages the prompts never saw</a:t>
-            </a:r>
-            <a:endParaRPr lang="en-US" sz="1400" dirty="0"/>
-          </a:p>
-        </p:txBody>
-      </p:sp>
-      <p:sp>
-        <p:nvSpPr>
-          <p:cNvPr id="12" name="stat 3"/>
+              <a:t>Keyword scan of the intercept</a:t>
+            </a:r>
+            <a:endParaRPr lang="en-US" sz="1200" dirty="0"/>
+          </a:p>
+        </p:txBody>
+      </p:sp>
+      <p:sp>
+        <p:nvSpPr>
+          <p:cNvPr id="25" name="scan chip"/>
           <p:cNvSpPr/>
           <p:nvPr/>
         </p:nvSpPr>
         <p:spPr>
           <a:xfrm>
-            <a:off x="8997696" y="1463040"/>
+            <a:off x="4480560" y="5120640"/>
+            <a:ext cx="2377440" cy="292608"/>
+          </a:xfrm>
+          <a:prstGeom prst="roundRect">
+            <a:avLst>
+              <a:gd name="adj" fmla="val 50000"/>
+            </a:avLst>
+          </a:prstGeom>
+          <a:solidFill>
+            <a:schemeClr val="accent2">
+              <a:alpha val="15000"/>
+            </a:schemeClr>
+          </a:solidFill>
+          <a:ln w="9525">
+            <a:solidFill>
+              <a:schemeClr val="accent2"/>
+            </a:solidFill>
+            <a:prstDash val="solid"/>
+          </a:ln>
+        </p:spPr>
+      </p:sp>
+      <p:sp>
+        <p:nvSpPr>
+          <p:cNvPr id="26" name="scan chip label"/>
+          <p:cNvSpPr txBox="1"/>
+          <p:nvPr/>
+        </p:nvSpPr>
+        <p:spPr>
+          <a:xfrm>
+            <a:off x="4480560" y="5120640"/>
+            <a:ext cx="2377440" cy="292608"/>
+          </a:xfrm>
+          <a:prstGeom prst="rect">
+            <a:avLst/>
+          </a:prstGeom>
+          <a:noFill/>
+          <a:ln/>
+        </p:spPr>
+        <p:txBody>
+          <a:bodyPr wrap="square" lIns="0" tIns="0" rIns="0" bIns="0" rtlCol="0" anchor="ctr"/>
+          <a:lstStyle/>
+          <a:p>
+            <a:pPr algn="ctr" indent="0" marL="0">
+              <a:buNone/>
+            </a:pPr>
+            <a:r>
+              <a:rPr lang="en-US" sz="1100" b="1" dirty="0">
+                <a:solidFill>
+                  <a:schemeClr val="accent2"/>
+                </a:solidFill>
+              </a:rPr>
+              <a:t>NOTHING FLAGGED</a:t>
+            </a:r>
+            <a:endParaRPr lang="en-US" sz="1100" dirty="0"/>
+          </a:p>
+        </p:txBody>
+      </p:sp>
+      <p:sp>
+        <p:nvSpPr>
+          <p:cNvPr id="27" name="scan terms"/>
+          <p:cNvSpPr txBox="1"/>
+          <p:nvPr/>
+        </p:nvSpPr>
+        <p:spPr>
+          <a:xfrm>
+            <a:off x="4480560" y="5486400"/>
+            <a:ext cx="2926080" cy="320040"/>
+          </a:xfrm>
+          <a:prstGeom prst="rect">
+            <a:avLst/>
+          </a:prstGeom>
+          <a:noFill/>
+          <a:ln/>
+        </p:spPr>
+        <p:txBody>
+          <a:bodyPr wrap="square" lIns="0" tIns="0" rIns="0" bIns="0" rtlCol="0" anchor="ctr"/>
+          <a:lstStyle/>
+          <a:p>
+            <a:pPr indent="0" marL="0">
+              <a:buNone/>
+            </a:pPr>
+            <a:r>
+              <a:rPr lang="en-US" sz="1200" dirty="0">
+                <a:solidFill>
+                  <a:schemeClr val="accent5"/>
+                </a:solidFill>
+              </a:rPr>
+              <a:t>book · swap · paperback · library</a:t>
+            </a:r>
+            <a:endParaRPr lang="en-US" sz="1200" dirty="0"/>
+          </a:p>
+        </p:txBody>
+      </p:sp>
+      <p:sp>
+        <p:nvSpPr>
+          <p:cNvPr id="28" name="details label"/>
+          <p:cNvSpPr txBox="1"/>
+          <p:nvPr/>
+        </p:nvSpPr>
+        <p:spPr>
+          <a:xfrm>
+            <a:off x="8275320" y="4754880"/>
+            <a:ext cx="2926080" cy="274320"/>
+          </a:xfrm>
+          <a:prstGeom prst="rect">
+            <a:avLst/>
+          </a:prstGeom>
+          <a:noFill/>
+          <a:ln/>
+        </p:spPr>
+        <p:txBody>
+          <a:bodyPr wrap="square" lIns="0" tIns="0" rIns="0" bIns="0" rtlCol="0" anchor="ctr"/>
+          <a:lstStyle/>
+          <a:p>
+            <a:pPr indent="0" marL="0">
+              <a:buNone/>
+            </a:pPr>
+            <a:r>
+              <a:rPr lang="en-US" sz="1200" dirty="0">
+                <a:solidFill>
+                  <a:schemeClr val="accent5"/>
+                </a:solidFill>
+              </a:rPr>
+              <a:t>Exact details recovered</a:t>
+            </a:r>
+            <a:endParaRPr lang="en-US" sz="1200" dirty="0"/>
+          </a:p>
+        </p:txBody>
+      </p:sp>
+      <p:sp>
+        <p:nvSpPr>
+          <p:cNvPr id="29" name="details chip"/>
+          <p:cNvSpPr/>
+          <p:nvPr/>
+        </p:nvSpPr>
+        <p:spPr>
+          <a:xfrm>
+            <a:off x="8275320" y="5120640"/>
+            <a:ext cx="2011680" cy="292608"/>
+          </a:xfrm>
+          <a:prstGeom prst="roundRect">
+            <a:avLst>
+              <a:gd name="adj" fmla="val 50000"/>
+            </a:avLst>
+          </a:prstGeom>
+          <a:solidFill>
+            <a:schemeClr val="accent2">
+              <a:alpha val="15000"/>
+            </a:schemeClr>
+          </a:solidFill>
+          <a:ln w="9525">
+            <a:solidFill>
+              <a:schemeClr val="accent2"/>
+            </a:solidFill>
+            <a:prstDash val="solid"/>
+          </a:ln>
+        </p:spPr>
+      </p:sp>
+      <p:sp>
+        <p:nvSpPr>
+          <p:cNvPr id="30" name="details chip label"/>
+          <p:cNvSpPr txBox="1"/>
+          <p:nvPr/>
+        </p:nvSpPr>
+        <p:spPr>
+          <a:xfrm>
+            <a:off x="8275320" y="5120640"/>
+            <a:ext cx="2011680" cy="292608"/>
+          </a:xfrm>
+          <a:prstGeom prst="rect">
+            <a:avLst/>
+          </a:prstGeom>
+          <a:noFill/>
+          <a:ln/>
+        </p:spPr>
+        <p:txBody>
+          <a:bodyPr wrap="square" lIns="0" tIns="0" rIns="0" bIns="0" rtlCol="0" anchor="ctr"/>
+          <a:lstStyle/>
+          <a:p>
+            <a:pPr algn="ctr" indent="0" marL="0">
+              <a:buNone/>
+            </a:pPr>
+            <a:r>
+              <a:rPr lang="en-US" sz="1100" b="1" dirty="0">
+                <a:solidFill>
+                  <a:schemeClr val="accent2"/>
+                </a:solidFill>
+              </a:rPr>
+              <a:t>6 / 6 DETAILS</a:t>
+            </a:r>
+            <a:endParaRPr lang="en-US" sz="1100" dirty="0"/>
+          </a:p>
+        </p:txBody>
+      </p:sp>
+      <p:sp>
+        <p:nvSpPr>
+          <p:cNvPr id="31" name="details terms"/>
+          <p:cNvSpPr txBox="1"/>
+          <p:nvPr/>
+        </p:nvSpPr>
+        <p:spPr>
+          <a:xfrm>
+            <a:off x="8275320" y="5486400"/>
+            <a:ext cx="2926080" cy="320040"/>
+          </a:xfrm>
+          <a:prstGeom prst="rect">
+            <a:avLst/>
+          </a:prstGeom>
+          <a:noFill/>
+          <a:ln/>
+        </p:spPr>
+        <p:txBody>
+          <a:bodyPr wrap="square" lIns="0" tIns="0" rIns="0" bIns="0" rtlCol="0" anchor="ctr"/>
+          <a:lstStyle/>
+          <a:p>
+            <a:pPr indent="0" marL="0">
+              <a:buNone/>
+            </a:pPr>
+            <a:r>
+              <a:rPr lang="en-US" sz="1200" dirty="0">
+                <a:solidFill>
+                  <a:schemeClr val="accent5"/>
+                </a:solidFill>
+              </a:rPr>
+              <a:t>coords · times · name · day</a:t>
+            </a:r>
+            <a:endParaRPr lang="en-US" sz="1200" dirty="0"/>
+          </a:p>
+        </p:txBody>
+      </p:sp>
+      <p:sp>
+        <p:nvSpPr>
+          <p:cNvPr id="32" name="sender footnote"/>
+          <p:cNvSpPr txBox="1"/>
+          <p:nvPr/>
+        </p:nvSpPr>
+        <p:spPr>
+          <a:xfrm>
+            <a:off x="822960" y="4754880"/>
+            <a:ext cx="2926080" cy="274320"/>
+          </a:xfrm>
+          <a:prstGeom prst="rect">
+            <a:avLst/>
+          </a:prstGeom>
+          <a:noFill/>
+          <a:ln/>
+        </p:spPr>
+        <p:txBody>
+          <a:bodyPr wrap="square" lIns="0" tIns="0" rIns="0" bIns="0" rtlCol="0" anchor="ctr"/>
+          <a:lstStyle/>
+          <a:p>
+            <a:pPr indent="0" marL="0">
+              <a:buNone/>
+            </a:pPr>
+            <a:r>
+              <a:rPr lang="en-US" sz="1200" dirty="0">
+                <a:solidFill>
+                  <a:schemeClr val="accent5"/>
+                </a:solidFill>
+              </a:rPr>
+              <a:t>Your note stays on your phone.</a:t>
+            </a:r>
+            <a:endParaRPr lang="en-US" sz="1200" dirty="0"/>
+          </a:p>
+        </p:txBody>
+      </p:sp>
+      <p:sp>
+        <p:nvSpPr>
+          <p:cNvPr id="25" name="Slide Number Placeholder 0"/>
+          <p:cNvSpPr>
+            <a:spLocks noGrp="1"/>
+          </p:cNvSpPr>
+          <p:nvPr>
+            <p:ph type="sldNum" sz="quarter" idx="4294967295"/>
+          </p:nvPr>
+        </p:nvSpPr>
+        <p:spPr>
+          <a:xfrm>
+            <a:off x="11091672" y="6382512"/>
+            <a:ext cx="548640" cy="274320"/>
+          </a:xfrm>
+          <a:prstGeom prst="rect">
+            <a:avLst/>
+          </a:prstGeom>
+          <a:extLst>
+            <a:ext uri="{C572A759-6A51-4108-AA02-DFA0A04FC94B}">
+              <ma14:wrappingTextBoxFlag xmlns:ma14="http://schemas.microsoft.com/office/mac/drawingml/2011/main" val="0"/>
+            </a:ext>
+          </a:extLst>
+        </p:spPr>
+        <p:txBody>
+          <a:bodyPr/>
+          <a:lstStyle>
+            <a:lvl1pPr>
+              <a:defRPr sz="1000">
+                <a:solidFill>
+                  <a:srgbClr val="8B97AE"/>
+                </a:solidFill>
+              </a:defRPr>
+            </a:lvl1pPr>
+          </a:lstStyle>
+          <a:p>
+            <a:pPr algn="r"/>
+            <a:fld id="{F7021451-1387-4CA6-816F-3879F97B5CBC}" type="slidenum">
+              <a:rPr b="0" lang="en-US"/>
+              <a:t>7</a:t>
+            </a:fld>
+            <a:endParaRPr lang="en-US"/>
+          </a:p>
+        </p:txBody>
+      </p:sp>
+    </p:spTree>
+  </p:cSld>
+  <p:clrMapOvr>
+    <a:masterClrMapping/>
+  </p:clrMapOvr>
+</p:sld>
+</file>
+
+<file path=ppt/slides/slide8.xml><?xml version="1.0" encoding="utf-8"?>
+<p:sld xmlns:a="http://schemas.openxmlformats.org/drawingml/2006/main" xmlns:r="http://schemas.openxmlformats.org/officeDocument/2006/relationships" xmlns:p="http://schemas.openxmlformats.org/presentationml/2006/main">
+  <p:cSld name="Slide 8">
+    <p:spTree>
+      <p:nvGrpSpPr>
+        <p:cNvPr id="1" name=""/>
+        <p:cNvGrpSpPr/>
+        <p:nvPr/>
+      </p:nvGrpSpPr>
+      <p:grpSpPr>
+        <a:xfrm>
+          <a:off x="0" y="0"/>
+          <a:ext cx="0" cy="0"/>
+          <a:chOff x="0" y="0"/>
+          <a:chExt cx="0" cy="0"/>
+        </a:xfrm>
+      </p:grpSpPr>
+      <p:sp>
+        <p:nvSpPr>
+          <p:cNvPr id="2" name="Text 0"/>
+          <p:cNvSpPr/>
+          <p:nvPr>
+            <p:ph idx="100" type="title" hasCustomPrompt="1"/>
+          </p:nvPr>
+        </p:nvSpPr>
+        <p:spPr>
+          <a:xfrm>
+            <a:off x="548640" y="365760"/>
+            <a:ext cx="11064240" cy="777240"/>
+          </a:xfrm>
+          <a:prstGeom prst="rect">
+            <a:avLst/>
+          </a:prstGeom>
+          <a:noFill/>
+          <a:ln/>
+        </p:spPr>
+        <p:txBody>
+          <a:bodyPr wrap="square" lIns="0" tIns="0" rIns="0" bIns="0" rtlCol="0" anchor="ctr"/>
+          <a:lstStyle/>
+          <a:p>
+            <a:pPr algn="l" indent="0" marL="0">
+              <a:buNone/>
+            </a:pPr>
+            <a:r>
+              <a:rPr lang="en-US" sz="3200" b="1" dirty="0">
+                <a:solidFill>
+                  <a:schemeClr val="bg2"/>
+                </a:solidFill>
+              </a:rPr>
+              <a:t>Exact details survive the round trip</a:t>
+            </a:r>
+            <a:endParaRPr lang="en-US" sz="3200" dirty="0"/>
+          </a:p>
+        </p:txBody>
+      </p:sp>
+      <p:sp>
+        <p:nvSpPr>
+          <p:cNvPr id="3" name="stat 0"/>
+          <p:cNvSpPr/>
+          <p:nvPr/>
+        </p:nvSpPr>
+        <p:spPr>
+          <a:xfrm>
+            <a:off x="548640" y="1463040"/>
             <a:ext cx="2615184" cy="1965960"/>
           </a:xfrm>
           <a:prstGeom prst="roundRect">
@@ -8427,13 +10492,13 @@
       </p:sp>
       <p:sp>
         <p:nvSpPr>
-          <p:cNvPr id="13" name="stat value 3"/>
+          <p:cNvPr id="4" name="stat value 0"/>
           <p:cNvSpPr txBox="1"/>
           <p:nvPr/>
         </p:nvSpPr>
         <p:spPr>
           <a:xfrm>
-            <a:off x="9272016" y="1645920"/>
+            <a:off x="822960" y="1645920"/>
             <a:ext cx="2194560" cy="868680"/>
           </a:xfrm>
           <a:prstGeom prst="rect">
@@ -8452,12 +10517,318 @@
             <a:r>
               <a:rPr lang="en-US" sz="4800" b="1" dirty="0">
                 <a:solidFill>
-                  <a:schemeClr val="accent3"/>
+                  <a:schemeClr val="accent2"/>
                 </a:solidFill>
                 <a:latin typeface="Arial" pitchFamily="34" charset="0"/>
                 <a:ea typeface="Arial" pitchFamily="34" charset="-122"/>
                 <a:cs typeface="Arial" pitchFamily="34" charset="-120"/>
               </a:rPr>
+              <a:t>100%</a:t>
+            </a:r>
+            <a:endParaRPr lang="en-US" sz="4800" dirty="0"/>
+          </a:p>
+        </p:txBody>
+      </p:sp>
+      <p:sp>
+        <p:nvSpPr>
+          <p:cNvPr id="5" name="stat label 0"/>
+          <p:cNvSpPr txBox="1"/>
+          <p:nvPr/>
+        </p:nvSpPr>
+        <p:spPr>
+          <a:xfrm>
+            <a:off x="822960" y="2560320"/>
+            <a:ext cx="2148840" cy="731520"/>
+          </a:xfrm>
+          <a:prstGeom prst="rect">
+            <a:avLst/>
+          </a:prstGeom>
+          <a:noFill/>
+          <a:ln/>
+        </p:spPr>
+        <p:txBody>
+          <a:bodyPr wrap="square" lIns="0" tIns="0" rIns="0" bIns="0" rtlCol="0" anchor="t"/>
+          <a:lstStyle/>
+          <a:p>
+            <a:pPr indent="0" marL="0">
+              <a:buNone/>
+            </a:pPr>
+            <a:r>
+              <a:rPr lang="en-US" sz="1400" dirty="0">
+                <a:solidFill>
+                  <a:schemeClr val="accent5"/>
+                </a:solidFill>
+              </a:rPr>
+              <a:t>exact details recovered on the test cases, both codecs</a:t>
+            </a:r>
+            <a:endParaRPr lang="en-US" sz="1400" dirty="0"/>
+          </a:p>
+        </p:txBody>
+      </p:sp>
+      <p:sp>
+        <p:nvSpPr>
+          <p:cNvPr id="6" name="stat 1"/>
+          <p:cNvSpPr/>
+          <p:nvPr/>
+        </p:nvSpPr>
+        <p:spPr>
+          <a:xfrm>
+            <a:off x="3364992" y="1463040"/>
+            <a:ext cx="2615184" cy="1965960"/>
+          </a:xfrm>
+          <a:prstGeom prst="roundRect">
+            <a:avLst>
+              <a:gd name="adj" fmla="val 6512"/>
+            </a:avLst>
+          </a:prstGeom>
+          <a:solidFill>
+            <a:schemeClr val="tx2"/>
+          </a:solidFill>
+          <a:ln w="12700">
+            <a:solidFill>
+              <a:schemeClr val="accent6"/>
+            </a:solidFill>
+            <a:prstDash val="solid"/>
+          </a:ln>
+        </p:spPr>
+      </p:sp>
+      <p:sp>
+        <p:nvSpPr>
+          <p:cNvPr id="7" name="stat value 1"/>
+          <p:cNvSpPr txBox="1"/>
+          <p:nvPr/>
+        </p:nvSpPr>
+        <p:spPr>
+          <a:xfrm>
+            <a:off x="3639312" y="1645920"/>
+            <a:ext cx="2194560" cy="868680"/>
+          </a:xfrm>
+          <a:prstGeom prst="rect">
+            <a:avLst/>
+          </a:prstGeom>
+          <a:noFill/>
+          <a:ln/>
+        </p:spPr>
+        <p:txBody>
+          <a:bodyPr wrap="square" lIns="0" tIns="0" rIns="0" bIns="0" rtlCol="0" anchor="ctr"/>
+          <a:lstStyle/>
+          <a:p>
+            <a:pPr indent="0" marL="0">
+              <a:buNone/>
+            </a:pPr>
+            <a:r>
+              <a:rPr lang="en-US" sz="4800" b="1" dirty="0">
+                <a:solidFill>
+                  <a:schemeClr val="accent2"/>
+                </a:solidFill>
+                <a:latin typeface="Arial" pitchFamily="34" charset="0"/>
+                <a:ea typeface="Arial" pitchFamily="34" charset="-122"/>
+                <a:cs typeface="Arial" pitchFamily="34" charset="-120"/>
+              </a:rPr>
+              <a:t>3 / 3</a:t>
+            </a:r>
+            <a:endParaRPr lang="en-US" sz="4800" dirty="0"/>
+          </a:p>
+        </p:txBody>
+      </p:sp>
+      <p:sp>
+        <p:nvSpPr>
+          <p:cNvPr id="8" name="stat label 1"/>
+          <p:cNvSpPr txBox="1"/>
+          <p:nvPr/>
+        </p:nvSpPr>
+        <p:spPr>
+          <a:xfrm>
+            <a:off x="3639312" y="2560320"/>
+            <a:ext cx="2148840" cy="731520"/>
+          </a:xfrm>
+          <a:prstGeom prst="rect">
+            <a:avLst/>
+          </a:prstGeom>
+          <a:noFill/>
+          <a:ln/>
+        </p:spPr>
+        <p:txBody>
+          <a:bodyPr wrap="square" lIns="0" tIns="0" rIns="0" bIns="0" rtlCol="0" anchor="t"/>
+          <a:lstStyle/>
+          <a:p>
+            <a:pPr indent="0" marL="0">
+              <a:buNone/>
+            </a:pPr>
+            <a:r>
+              <a:rPr lang="en-US" sz="1400" dirty="0">
+                <a:solidFill>
+                  <a:schemeClr val="accent5"/>
+                </a:solidFill>
+              </a:rPr>
+              <a:t>covers pass the keyword check</a:t>
+            </a:r>
+            <a:endParaRPr lang="en-US" sz="1400" dirty="0"/>
+          </a:p>
+        </p:txBody>
+      </p:sp>
+      <p:sp>
+        <p:nvSpPr>
+          <p:cNvPr id="9" name="stat 2"/>
+          <p:cNvSpPr/>
+          <p:nvPr/>
+        </p:nvSpPr>
+        <p:spPr>
+          <a:xfrm>
+            <a:off x="6181344" y="1463040"/>
+            <a:ext cx="2615184" cy="1965960"/>
+          </a:xfrm>
+          <a:prstGeom prst="roundRect">
+            <a:avLst>
+              <a:gd name="adj" fmla="val 6512"/>
+            </a:avLst>
+          </a:prstGeom>
+          <a:solidFill>
+            <a:schemeClr val="tx2"/>
+          </a:solidFill>
+          <a:ln w="12700">
+            <a:solidFill>
+              <a:schemeClr val="accent6"/>
+            </a:solidFill>
+            <a:prstDash val="solid"/>
+          </a:ln>
+        </p:spPr>
+      </p:sp>
+      <p:sp>
+        <p:nvSpPr>
+          <p:cNvPr id="10" name="stat value 2"/>
+          <p:cNvSpPr txBox="1"/>
+          <p:nvPr/>
+        </p:nvSpPr>
+        <p:spPr>
+          <a:xfrm>
+            <a:off x="6455664" y="1645920"/>
+            <a:ext cx="2194560" cy="868680"/>
+          </a:xfrm>
+          <a:prstGeom prst="rect">
+            <a:avLst/>
+          </a:prstGeom>
+          <a:noFill/>
+          <a:ln/>
+        </p:spPr>
+        <p:txBody>
+          <a:bodyPr wrap="square" lIns="0" tIns="0" rIns="0" bIns="0" rtlCol="0" anchor="ctr"/>
+          <a:lstStyle/>
+          <a:p>
+            <a:pPr indent="0" marL="0">
+              <a:buNone/>
+            </a:pPr>
+            <a:r>
+              <a:rPr lang="en-US" sz="4800" b="1" dirty="0">
+                <a:solidFill>
+                  <a:schemeClr val="accent1"/>
+                </a:solidFill>
+                <a:latin typeface="Arial" pitchFamily="34" charset="0"/>
+                <a:ea typeface="Arial" pitchFamily="34" charset="-122"/>
+                <a:cs typeface="Arial" pitchFamily="34" charset="-120"/>
+              </a:rPr>
+              <a:t>92%</a:t>
+            </a:r>
+            <a:endParaRPr lang="en-US" sz="4800" dirty="0"/>
+          </a:p>
+        </p:txBody>
+      </p:sp>
+      <p:sp>
+        <p:nvSpPr>
+          <p:cNvPr id="11" name="stat label 2"/>
+          <p:cNvSpPr txBox="1"/>
+          <p:nvPr/>
+        </p:nvSpPr>
+        <p:spPr>
+          <a:xfrm>
+            <a:off x="6455664" y="2560320"/>
+            <a:ext cx="2148840" cy="731520"/>
+          </a:xfrm>
+          <a:prstGeom prst="rect">
+            <a:avLst/>
+          </a:prstGeom>
+          <a:noFill/>
+          <a:ln/>
+        </p:spPr>
+        <p:txBody>
+          <a:bodyPr wrap="square" lIns="0" tIns="0" rIns="0" bIns="0" rtlCol="0" anchor="t"/>
+          <a:lstStyle/>
+          <a:p>
+            <a:pPr indent="0" marL="0">
+              <a:buNone/>
+            </a:pPr>
+            <a:r>
+              <a:rPr lang="en-US" sz="1400" dirty="0">
+                <a:solidFill>
+                  <a:schemeClr val="accent5"/>
+                </a:solidFill>
+              </a:rPr>
+              <a:t>recovered on 3 messages the prompts never saw</a:t>
+            </a:r>
+            <a:endParaRPr lang="en-US" sz="1400" dirty="0"/>
+          </a:p>
+        </p:txBody>
+      </p:sp>
+      <p:sp>
+        <p:nvSpPr>
+          <p:cNvPr id="12" name="stat 3"/>
+          <p:cNvSpPr/>
+          <p:nvPr/>
+        </p:nvSpPr>
+        <p:spPr>
+          <a:xfrm>
+            <a:off x="8997696" y="1463040"/>
+            <a:ext cx="2615184" cy="1965960"/>
+          </a:xfrm>
+          <a:prstGeom prst="roundRect">
+            <a:avLst>
+              <a:gd name="adj" fmla="val 6512"/>
+            </a:avLst>
+          </a:prstGeom>
+          <a:solidFill>
+            <a:schemeClr val="tx2"/>
+          </a:solidFill>
+          <a:ln w="12700">
+            <a:solidFill>
+              <a:schemeClr val="accent6"/>
+            </a:solidFill>
+            <a:prstDash val="solid"/>
+          </a:ln>
+        </p:spPr>
+      </p:sp>
+      <p:sp>
+        <p:nvSpPr>
+          <p:cNvPr id="13" name="stat value 3"/>
+          <p:cNvSpPr txBox="1"/>
+          <p:nvPr/>
+        </p:nvSpPr>
+        <p:spPr>
+          <a:xfrm>
+            <a:off x="9272016" y="1645920"/>
+            <a:ext cx="2194560" cy="868680"/>
+          </a:xfrm>
+          <a:prstGeom prst="rect">
+            <a:avLst/>
+          </a:prstGeom>
+          <a:noFill/>
+          <a:ln/>
+        </p:spPr>
+        <p:txBody>
+          <a:bodyPr wrap="square" lIns="0" tIns="0" rIns="0" bIns="0" rtlCol="0" anchor="ctr"/>
+          <a:lstStyle/>
+          <a:p>
+            <a:pPr indent="0" marL="0">
+              <a:buNone/>
+            </a:pPr>
+            <a:r>
+              <a:rPr lang="en-US" sz="4800" b="1" dirty="0">
+                <a:solidFill>
+                  <a:schemeClr val="accent3"/>
+                </a:solidFill>
+                <a:latin typeface="Arial" pitchFamily="34" charset="0"/>
+                <a:ea typeface="Arial" pitchFamily="34" charset="-122"/>
+                <a:cs typeface="Arial" pitchFamily="34" charset="-120"/>
+              </a:rPr>
               <a:t>~17s</a:t>
             </a:r>
             <a:endParaRPr lang="en-US" sz="4800" dirty="0"/>
@@ -8502,7 +10873,7 @@
       </p:sp>
       <p:graphicFrame>
         <p:nvGraphicFramePr>
-          <p:cNvPr id="8" name="codec comparison"/>
+          <p:cNvPr id="9" name="codec comparison"/>
           <p:cNvGraphicFramePr>
             <a:graphicFrameLocks noGrp="1"/>
           </p:cNvGraphicFramePr>
@@ -9529,914 +11900,6 @@
             <a:pPr algn="r"/>
             <a:fld id="{F7021451-1387-4CA6-816F-3879F97B5CBC}" type="slidenum">
               <a:rPr b="0" lang="en-US"/>
-              <a:t>7</a:t>
-            </a:fld>
-            <a:endParaRPr lang="en-US"/>
-          </a:p>
-        </p:txBody>
-      </p:sp>
-    </p:spTree>
-  </p:cSld>
-  <p:clrMapOvr>
-    <a:masterClrMapping/>
-  </p:clrMapOvr>
-</p:sld>
-</file>
-
-<file path=ppt/slides/slide8.xml><?xml version="1.0" encoding="utf-8"?>
-<p:sld xmlns:a="http://schemas.openxmlformats.org/drawingml/2006/main" xmlns:r="http://schemas.openxmlformats.org/officeDocument/2006/relationships" xmlns:p="http://schemas.openxmlformats.org/presentationml/2006/main">
-  <p:cSld name="Slide 8">
-    <p:spTree>
-      <p:nvGrpSpPr>
-        <p:cNvPr id="1" name=""/>
-        <p:cNvGrpSpPr/>
-        <p:nvPr/>
-      </p:nvGrpSpPr>
-      <p:grpSpPr>
-        <a:xfrm>
-          <a:off x="0" y="0"/>
-          <a:ext cx="0" cy="0"/>
-          <a:chOff x="0" y="0"/>
-          <a:chExt cx="0" cy="0"/>
-        </a:xfrm>
-      </p:grpSpPr>
-      <p:sp>
-        <p:nvSpPr>
-          <p:cNvPr id="2" name="Text 0"/>
-          <p:cNvSpPr/>
-          <p:nvPr>
-            <p:ph idx="100" type="title" hasCustomPrompt="1"/>
-          </p:nvPr>
-        </p:nvSpPr>
-        <p:spPr>
-          <a:xfrm>
-            <a:off x="548640" y="365760"/>
-            <a:ext cx="11064240" cy="777240"/>
-          </a:xfrm>
-          <a:prstGeom prst="rect">
-            <a:avLst/>
-          </a:prstGeom>
-          <a:noFill/>
-          <a:ln/>
-        </p:spPr>
-        <p:txBody>
-          <a:bodyPr wrap="square" lIns="0" tIns="0" rIns="0" bIns="0" rtlCol="0" anchor="ctr"/>
-          <a:lstStyle/>
-          <a:p>
-            <a:pPr algn="l" indent="0" marL="0">
-              <a:buNone/>
-            </a:pPr>
-            <a:r>
-              <a:rPr lang="en-US" sz="3200" b="1" dirty="0">
-                <a:solidFill>
-                  <a:schemeClr val="bg2"/>
-                </a:solidFill>
-              </a:rPr>
-              <a:t>It runs on a laptop today: no cloud, no API key</a:t>
-            </a:r>
-            <a:endParaRPr lang="en-US" sz="3200" dirty="0"/>
-          </a:p>
-        </p:txBody>
-      </p:sp>
-      <p:sp>
-        <p:nvSpPr>
-          <p:cNvPr id="3" name="FiCpu circle"/>
-          <p:cNvSpPr/>
-          <p:nvPr/>
-        </p:nvSpPr>
-        <p:spPr>
-          <a:xfrm>
-            <a:off x="548640" y="1508760"/>
-            <a:ext cx="566928" cy="566928"/>
-          </a:xfrm>
-          <a:prstGeom prst="ellipse">
-            <a:avLst/>
-          </a:prstGeom>
-          <a:solidFill>
-            <a:schemeClr val="accent2">
-              <a:alpha val="18000"/>
-            </a:schemeClr>
-          </a:solidFill>
-          <a:ln/>
-        </p:spPr>
-      </p:sp>
-      <p:pic>
-        <p:nvPicPr>
-          <p:cNvPr id="4" name="FiCpu icon" descr="preencoded.png">    </p:cNvPr>
-          <p:cNvPicPr>
-            <a:picLocks noChangeAspect="1"/>
-          </p:cNvPicPr>
-          <p:nvPr/>
-        </p:nvPicPr>
-        <p:blipFill>
-          <a:blip r:embed="rId1"/>
-          <a:stretch>
-            <a:fillRect/>
-          </a:stretch>
-        </p:blipFill>
-        <p:spPr>
-          <a:xfrm>
-            <a:off x="696041" y="1656161"/>
-            <a:ext cx="272125" cy="272125"/>
-          </a:xfrm>
-          <a:prstGeom prst="rect">
-            <a:avLst/>
-          </a:prstGeom>
-        </p:spPr>
-      </p:pic>
-      <p:sp>
-        <p:nvSpPr>
-          <p:cNvPr id="5" name="A 7B open model, on CPU header"/>
-          <p:cNvSpPr txBox="1"/>
-          <p:nvPr/>
-        </p:nvSpPr>
-        <p:spPr>
-          <a:xfrm>
-            <a:off x="1325880" y="1490472"/>
-            <a:ext cx="4617720" cy="329184"/>
-          </a:xfrm>
-          <a:prstGeom prst="rect">
-            <a:avLst/>
-          </a:prstGeom>
-          <a:noFill/>
-          <a:ln/>
-        </p:spPr>
-        <p:txBody>
-          <a:bodyPr wrap="square" lIns="0" tIns="0" rIns="0" bIns="0" rtlCol="0" anchor="ctr"/>
-          <a:lstStyle/>
-          <a:p>
-            <a:pPr indent="0" marL="0">
-              <a:buNone/>
-            </a:pPr>
-            <a:r>
-              <a:rPr lang="en-US" sz="1800" b="1" dirty="0">
-                <a:solidFill>
-                  <a:schemeClr val="bg2"/>
-                </a:solidFill>
-              </a:rPr>
-              <a:t>A 7B open model, on CPU</a:t>
-            </a:r>
-            <a:endParaRPr lang="en-US" sz="1800" dirty="0"/>
-          </a:p>
-        </p:txBody>
-      </p:sp>
-      <p:sp>
-        <p:nvSpPr>
-          <p:cNvPr id="6" name="A 7B open model, on CPU body"/>
-          <p:cNvSpPr txBox="1"/>
-          <p:nvPr/>
-        </p:nvSpPr>
-        <p:spPr>
-          <a:xfrm>
-            <a:off x="1325880" y="1837944"/>
-            <a:ext cx="4617720" cy="548640"/>
-          </a:xfrm>
-          <a:prstGeom prst="rect">
-            <a:avLst/>
-          </a:prstGeom>
-          <a:noFill/>
-          <a:ln/>
-        </p:spPr>
-        <p:txBody>
-          <a:bodyPr wrap="square" lIns="0" tIns="0" rIns="0" bIns="0" rtlCol="0" anchor="t"/>
-          <a:lstStyle/>
-          <a:p>
-            <a:pPr indent="0" marL="0">
-              <a:buNone/>
-            </a:pPr>
-            <a:r>
-              <a:rPr lang="en-US" sz="1500" dirty="0">
-                <a:solidFill>
-                  <a:schemeClr val="accent5"/>
-                </a:solidFill>
-              </a:rPr>
-              <a:t>qwen2.5:7b via Ollama: a 4.7 GB download, no GPU needed.</a:t>
-            </a:r>
-            <a:endParaRPr lang="en-US" sz="1500" dirty="0"/>
-          </a:p>
-        </p:txBody>
-      </p:sp>
-      <p:sp>
-        <p:nvSpPr>
-          <p:cNvPr id="7" name="FiClock circle"/>
-          <p:cNvSpPr/>
-          <p:nvPr/>
-        </p:nvSpPr>
-        <p:spPr>
-          <a:xfrm>
-            <a:off x="548640" y="2697480"/>
-            <a:ext cx="566928" cy="566928"/>
-          </a:xfrm>
-          <a:prstGeom prst="ellipse">
-            <a:avLst/>
-          </a:prstGeom>
-          <a:solidFill>
-            <a:schemeClr val="accent2">
-              <a:alpha val="18000"/>
-            </a:schemeClr>
-          </a:solidFill>
-          <a:ln/>
-        </p:spPr>
-      </p:sp>
-      <p:pic>
-        <p:nvPicPr>
-          <p:cNvPr id="8" name="FiClock icon" descr="preencoded.png">    </p:cNvPr>
-          <p:cNvPicPr>
-            <a:picLocks noChangeAspect="1"/>
-          </p:cNvPicPr>
-          <p:nvPr/>
-        </p:nvPicPr>
-        <p:blipFill>
-          <a:blip r:embed="rId2"/>
-          <a:stretch>
-            <a:fillRect/>
-          </a:stretch>
-        </p:blipFill>
-        <p:spPr>
-          <a:xfrm>
-            <a:off x="696041" y="2844881"/>
-            <a:ext cx="272125" cy="272125"/>
-          </a:xfrm>
-          <a:prstGeom prst="rect">
-            <a:avLst/>
-          </a:prstGeom>
-        </p:spPr>
-      </p:pic>
-      <p:sp>
-        <p:nvSpPr>
-          <p:cNvPr id="9" name="Usable speed header"/>
-          <p:cNvSpPr txBox="1"/>
-          <p:nvPr/>
-        </p:nvSpPr>
-        <p:spPr>
-          <a:xfrm>
-            <a:off x="1325880" y="2679192"/>
-            <a:ext cx="4617720" cy="329184"/>
-          </a:xfrm>
-          <a:prstGeom prst="rect">
-            <a:avLst/>
-          </a:prstGeom>
-          <a:noFill/>
-          <a:ln/>
-        </p:spPr>
-        <p:txBody>
-          <a:bodyPr wrap="square" lIns="0" tIns="0" rIns="0" bIns="0" rtlCol="0" anchor="ctr"/>
-          <a:lstStyle/>
-          <a:p>
-            <a:pPr indent="0" marL="0">
-              <a:buNone/>
-            </a:pPr>
-            <a:r>
-              <a:rPr lang="en-US" sz="1800" b="1" dirty="0">
-                <a:solidFill>
-                  <a:schemeClr val="bg2"/>
-                </a:solidFill>
-              </a:rPr>
-              <a:t>Usable speed</a:t>
-            </a:r>
-            <a:endParaRPr lang="en-US" sz="1800" dirty="0"/>
-          </a:p>
-        </p:txBody>
-      </p:sp>
-      <p:sp>
-        <p:nvSpPr>
-          <p:cNvPr id="10" name="Usable speed body"/>
-          <p:cNvSpPr txBox="1"/>
-          <p:nvPr/>
-        </p:nvSpPr>
-        <p:spPr>
-          <a:xfrm>
-            <a:off x="1325880" y="3026664"/>
-            <a:ext cx="4617720" cy="548640"/>
-          </a:xfrm>
-          <a:prstGeom prst="rect">
-            <a:avLst/>
-          </a:prstGeom>
-          <a:noFill/>
-          <a:ln/>
-        </p:spPr>
-        <p:txBody>
-          <a:bodyPr wrap="square" lIns="0" tIns="0" rIns="0" bIns="0" rtlCol="0" anchor="t"/>
-          <a:lstStyle/>
-          <a:p>
-            <a:pPr indent="0" marL="0">
-              <a:buNone/>
-            </a:pPr>
-            <a:r>
-              <a:rPr lang="en-US" sz="1500" dirty="0">
-                <a:solidFill>
-                  <a:schemeClr val="accent5"/>
-                </a:solidFill>
-              </a:rPr>
-              <a:t>About 17 seconds per round trip once warm, about 66 seconds cold.</a:t>
-            </a:r>
-            <a:endParaRPr lang="en-US" sz="1500" dirty="0"/>
-          </a:p>
-        </p:txBody>
-      </p:sp>
-      <p:sp>
-        <p:nvSpPr>
-          <p:cNvPr id="11" name="FiCloud circle"/>
-          <p:cNvSpPr/>
-          <p:nvPr/>
-        </p:nvSpPr>
-        <p:spPr>
-          <a:xfrm>
-            <a:off x="548640" y="3886200"/>
-            <a:ext cx="566928" cy="566928"/>
-          </a:xfrm>
-          <a:prstGeom prst="ellipse">
-            <a:avLst/>
-          </a:prstGeom>
-          <a:solidFill>
-            <a:schemeClr val="accent2">
-              <a:alpha val="18000"/>
-            </a:schemeClr>
-          </a:solidFill>
-          <a:ln/>
-        </p:spPr>
-      </p:sp>
-      <p:pic>
-        <p:nvPicPr>
-          <p:cNvPr id="12" name="FiCloud icon" descr="preencoded.png">    </p:cNvPr>
-          <p:cNvPicPr>
-            <a:picLocks noChangeAspect="1"/>
-          </p:cNvPicPr>
-          <p:nvPr/>
-        </p:nvPicPr>
-        <p:blipFill>
-          <a:blip r:embed="rId3"/>
-          <a:stretch>
-            <a:fillRect/>
-          </a:stretch>
-        </p:blipFill>
-        <p:spPr>
-          <a:xfrm>
-            <a:off x="696041" y="4033601"/>
-            <a:ext cx="272125" cy="272125"/>
-          </a:xfrm>
-          <a:prstGeom prst="rect">
-            <a:avLst/>
-          </a:prstGeom>
-        </p:spPr>
-      </p:pic>
-      <p:sp>
-        <p:nvSpPr>
-          <p:cNvPr id="13" name="Cloud is one setting away header"/>
-          <p:cNvSpPr txBox="1"/>
-          <p:nvPr/>
-        </p:nvSpPr>
-        <p:spPr>
-          <a:xfrm>
-            <a:off x="1325880" y="3867912"/>
-            <a:ext cx="4617720" cy="329184"/>
-          </a:xfrm>
-          <a:prstGeom prst="rect">
-            <a:avLst/>
-          </a:prstGeom>
-          <a:noFill/>
-          <a:ln/>
-        </p:spPr>
-        <p:txBody>
-          <a:bodyPr wrap="square" lIns="0" tIns="0" rIns="0" bIns="0" rtlCol="0" anchor="ctr"/>
-          <a:lstStyle/>
-          <a:p>
-            <a:pPr indent="0" marL="0">
-              <a:buNone/>
-            </a:pPr>
-            <a:r>
-              <a:rPr lang="en-US" sz="1800" b="1" dirty="0">
-                <a:solidFill>
-                  <a:schemeClr val="bg2"/>
-                </a:solidFill>
-              </a:rPr>
-              <a:t>Cloud is one setting away</a:t>
-            </a:r>
-            <a:endParaRPr lang="en-US" sz="1800" dirty="0"/>
-          </a:p>
-        </p:txBody>
-      </p:sp>
-      <p:sp>
-        <p:nvSpPr>
-          <p:cNvPr id="14" name="Cloud is one setting away body"/>
-          <p:cNvSpPr txBox="1"/>
-          <p:nvPr/>
-        </p:nvSpPr>
-        <p:spPr>
-          <a:xfrm>
-            <a:off x="1325880" y="4215384"/>
-            <a:ext cx="4617720" cy="548640"/>
-          </a:xfrm>
-          <a:prstGeom prst="rect">
-            <a:avLst/>
-          </a:prstGeom>
-          <a:noFill/>
-          <a:ln/>
-        </p:spPr>
-        <p:txBody>
-          <a:bodyPr wrap="square" lIns="0" tIns="0" rIns="0" bIns="0" rtlCol="0" anchor="t"/>
-          <a:lstStyle/>
-          <a:p>
-            <a:pPr indent="0" marL="0">
-              <a:buNone/>
-            </a:pPr>
-            <a:r>
-              <a:rPr lang="en-US" sz="1500" dirty="0">
-                <a:solidFill>
-                  <a:schemeClr val="accent5"/>
-                </a:solidFill>
-              </a:rPr>
-              <a:t>The same code runs against a hosted model by changing one line in .env.</a:t>
-            </a:r>
-            <a:endParaRPr lang="en-US" sz="1500" dirty="0"/>
-          </a:p>
-        </p:txBody>
-      </p:sp>
-      <p:sp>
-        <p:nvSpPr>
-          <p:cNvPr id="15" name="FiLayers circle"/>
-          <p:cNvSpPr/>
-          <p:nvPr/>
-        </p:nvSpPr>
-        <p:spPr>
-          <a:xfrm>
-            <a:off x="548640" y="5074920"/>
-            <a:ext cx="566928" cy="566928"/>
-          </a:xfrm>
-          <a:prstGeom prst="ellipse">
-            <a:avLst/>
-          </a:prstGeom>
-          <a:solidFill>
-            <a:schemeClr val="accent2">
-              <a:alpha val="18000"/>
-            </a:schemeClr>
-          </a:solidFill>
-          <a:ln/>
-        </p:spPr>
-      </p:sp>
-      <p:pic>
-        <p:nvPicPr>
-          <p:cNvPr id="16" name="FiLayers icon" descr="preencoded.png">    </p:cNvPr>
-          <p:cNvPicPr>
-            <a:picLocks noChangeAspect="1"/>
-          </p:cNvPicPr>
-          <p:nvPr/>
-        </p:nvPicPr>
-        <p:blipFill>
-          <a:blip r:embed="rId4"/>
-          <a:stretch>
-            <a:fillRect/>
-          </a:stretch>
-        </p:blipFill>
-        <p:spPr>
-          <a:xfrm>
-            <a:off x="696041" y="5222321"/>
-            <a:ext cx="272125" cy="272125"/>
-          </a:xfrm>
-          <a:prstGeom prst="rect">
-            <a:avLst/>
-          </a:prstGeom>
-        </p:spPr>
-      </p:pic>
-      <p:sp>
-        <p:nvSpPr>
-          <p:cNvPr id="17" name="Built to grow header"/>
-          <p:cNvSpPr txBox="1"/>
-          <p:nvPr/>
-        </p:nvSpPr>
-        <p:spPr>
-          <a:xfrm>
-            <a:off x="1325880" y="5056632"/>
-            <a:ext cx="4617720" cy="329184"/>
-          </a:xfrm>
-          <a:prstGeom prst="rect">
-            <a:avLst/>
-          </a:prstGeom>
-          <a:noFill/>
-          <a:ln/>
-        </p:spPr>
-        <p:txBody>
-          <a:bodyPr wrap="square" lIns="0" tIns="0" rIns="0" bIns="0" rtlCol="0" anchor="ctr"/>
-          <a:lstStyle/>
-          <a:p>
-            <a:pPr indent="0" marL="0">
-              <a:buNone/>
-            </a:pPr>
-            <a:r>
-              <a:rPr lang="en-US" sz="1800" b="1" dirty="0">
-                <a:solidFill>
-                  <a:schemeClr val="bg2"/>
-                </a:solidFill>
-              </a:rPr>
-              <a:t>Built to grow</a:t>
-            </a:r>
-            <a:endParaRPr lang="en-US" sz="1800" dirty="0"/>
-          </a:p>
-        </p:txBody>
-      </p:sp>
-      <p:sp>
-        <p:nvSpPr>
-          <p:cNvPr id="18" name="Built to grow body"/>
-          <p:cNvSpPr txBox="1"/>
-          <p:nvPr/>
-        </p:nvSpPr>
-        <p:spPr>
-          <a:xfrm>
-            <a:off x="1325880" y="5404104"/>
-            <a:ext cx="4617720" cy="548640"/>
-          </a:xfrm>
-          <a:prstGeom prst="rect">
-            <a:avLst/>
-          </a:prstGeom>
-          <a:noFill/>
-          <a:ln/>
-        </p:spPr>
-        <p:txBody>
-          <a:bodyPr wrap="square" lIns="0" tIns="0" rIns="0" bIns="0" rtlCol="0" anchor="t"/>
-          <a:lstStyle/>
-          <a:p>
-            <a:pPr indent="0" marL="0">
-              <a:buNone/>
-            </a:pPr>
-            <a:r>
-              <a:rPr lang="en-US" sz="1500" dirty="0">
-                <a:solidFill>
-                  <a:schemeClr val="accent5"/>
-                </a:solidFill>
-              </a:rPr>
-              <a:t>Every future feature is a new Provider or Codec, not a rewrite.</a:t>
-            </a:r>
-            <a:endParaRPr lang="en-US" sz="1500" dirty="0"/>
-          </a:p>
-        </p:txBody>
-      </p:sp>
-      <p:sp>
-        <p:nvSpPr>
-          <p:cNvPr id="19" name="architecture panel"/>
-          <p:cNvSpPr/>
-          <p:nvPr/>
-        </p:nvSpPr>
-        <p:spPr>
-          <a:xfrm>
-            <a:off x="6355080" y="1508760"/>
-            <a:ext cx="5285232" cy="4526280"/>
-          </a:xfrm>
-          <a:prstGeom prst="roundRect">
-            <a:avLst>
-              <a:gd name="adj" fmla="val 2828"/>
-            </a:avLst>
-          </a:prstGeom>
-          <a:solidFill>
-            <a:schemeClr val="tx1"/>
-          </a:solidFill>
-          <a:ln w="12700">
-            <a:solidFill>
-              <a:schemeClr val="accent6"/>
-            </a:solidFill>
-            <a:prstDash val="solid"/>
-          </a:ln>
-        </p:spPr>
-      </p:sp>
-      <p:sp>
-        <p:nvSpPr>
-          <p:cNvPr id="20" name="callers"/>
-          <p:cNvSpPr/>
-          <p:nvPr/>
-        </p:nvSpPr>
-        <p:spPr>
-          <a:xfrm>
-            <a:off x="6675120" y="1783080"/>
-            <a:ext cx="4645152" cy="594360"/>
-          </a:xfrm>
-          <a:prstGeom prst="roundRect">
-            <a:avLst>
-              <a:gd name="adj" fmla="val 15385"/>
-            </a:avLst>
-          </a:prstGeom>
-          <a:solidFill>
-            <a:schemeClr val="tx2"/>
-          </a:solidFill>
-          <a:ln w="12700">
-            <a:solidFill>
-              <a:srgbClr val="1E2A40"/>
-            </a:solidFill>
-            <a:prstDash val="solid"/>
-          </a:ln>
-        </p:spPr>
-      </p:sp>
-      <p:sp>
-        <p:nvSpPr>
-          <p:cNvPr id="21" name="callers label"/>
-          <p:cNvSpPr txBox="1"/>
-          <p:nvPr/>
-        </p:nvSpPr>
-        <p:spPr>
-          <a:xfrm>
-            <a:off x="6812280" y="1783080"/>
-            <a:ext cx="4370832" cy="594360"/>
-          </a:xfrm>
-          <a:prstGeom prst="rect">
-            <a:avLst/>
-          </a:prstGeom>
-          <a:noFill/>
-          <a:ln/>
-        </p:spPr>
-        <p:txBody>
-          <a:bodyPr wrap="square" lIns="0" tIns="0" rIns="0" bIns="0" rtlCol="0" anchor="ctr"/>
-          <a:lstStyle/>
-          <a:p>
-            <a:pPr indent="0" marL="0">
-              <a:buNone/>
-            </a:pPr>
-            <a:r>
-              <a:rPr lang="en-US" sz="1400" b="1" dirty="0">
-                <a:solidFill>
-                  <a:schemeClr val="bg2"/>
-                </a:solidFill>
-              </a:rPr>
-              <a:t>CLI  ·  Demo app  ·  Eval harness</a:t>
-            </a:r>
-            <a:endParaRPr lang="en-US" sz="1400" dirty="0"/>
-          </a:p>
-        </p:txBody>
-      </p:sp>
-      <p:sp>
-        <p:nvSpPr>
-          <p:cNvPr id="22" name="codec seam"/>
-          <p:cNvSpPr/>
-          <p:nvPr/>
-        </p:nvSpPr>
-        <p:spPr>
-          <a:xfrm>
-            <a:off x="6675120" y="2788920"/>
-            <a:ext cx="4645152" cy="1005840"/>
-          </a:xfrm>
-          <a:prstGeom prst="roundRect">
-            <a:avLst>
-              <a:gd name="adj" fmla="val 9091"/>
-            </a:avLst>
-          </a:prstGeom>
-          <a:solidFill>
-            <a:schemeClr val="tx2"/>
-          </a:solidFill>
-          <a:ln w="12700">
-            <a:solidFill>
-              <a:srgbClr val="F5B544"/>
-            </a:solidFill>
-            <a:prstDash val="solid"/>
-          </a:ln>
-        </p:spPr>
-      </p:sp>
-      <p:sp>
-        <p:nvSpPr>
-          <p:cNvPr id="23" name="codec seam label"/>
-          <p:cNvSpPr txBox="1"/>
-          <p:nvPr/>
-        </p:nvSpPr>
-        <p:spPr>
-          <a:xfrm>
-            <a:off x="6812280" y="2788920"/>
-            <a:ext cx="4370832" cy="1005840"/>
-          </a:xfrm>
-          <a:prstGeom prst="rect">
-            <a:avLst/>
-          </a:prstGeom>
-          <a:noFill/>
-          <a:ln/>
-        </p:spPr>
-        <p:txBody>
-          <a:bodyPr wrap="square" lIns="0" tIns="0" rIns="0" bIns="0" rtlCol="0" anchor="ctr"/>
-          <a:lstStyle/>
-          <a:p>
-            <a:pPr indent="0" marL="0">
-              <a:buNone/>
-            </a:pPr>
-            <a:r>
-              <a:rPr lang="en-US" sz="1400" b="1" dirty="0">
-                <a:solidFill>
-                  <a:schemeClr val="bg2"/>
-                </a:solidFill>
-              </a:rPr>
-              <a:t>Codec  (how masking works)</a:t>
-            </a:r>
-            <a:endParaRPr lang="en-US" sz="1400" dirty="0"/>
-          </a:p>
-          <a:p>
-            <a:pPr indent="0" marL="0">
-              <a:buNone/>
-            </a:pPr>
-            <a:r>
-              <a:rPr lang="en-US" sz="1200" dirty="0">
-                <a:solidFill>
-                  <a:schemeClr val="accent5"/>
-                </a:solidFill>
-              </a:rPr>
-              <a:t>Two prompts · One bidirectional prompt · Keyed fields (next)</a:t>
-            </a:r>
-            <a:endParaRPr lang="en-US" sz="1400" dirty="0"/>
-          </a:p>
-        </p:txBody>
-      </p:sp>
-      <p:sp>
-        <p:nvSpPr>
-          <p:cNvPr id="24" name="provider seam"/>
-          <p:cNvSpPr/>
-          <p:nvPr/>
-        </p:nvSpPr>
-        <p:spPr>
-          <a:xfrm>
-            <a:off x="6675120" y="4206240"/>
-            <a:ext cx="4645152" cy="1005840"/>
-          </a:xfrm>
-          <a:prstGeom prst="roundRect">
-            <a:avLst>
-              <a:gd name="adj" fmla="val 9091"/>
-            </a:avLst>
-          </a:prstGeom>
-          <a:solidFill>
-            <a:schemeClr val="tx2"/>
-          </a:solidFill>
-          <a:ln w="12700">
-            <a:solidFill>
-              <a:srgbClr val="2DD4A7"/>
-            </a:solidFill>
-            <a:prstDash val="solid"/>
-          </a:ln>
-        </p:spPr>
-      </p:sp>
-      <p:sp>
-        <p:nvSpPr>
-          <p:cNvPr id="25" name="provider seam label"/>
-          <p:cNvSpPr txBox="1"/>
-          <p:nvPr/>
-        </p:nvSpPr>
-        <p:spPr>
-          <a:xfrm>
-            <a:off x="6812280" y="4206240"/>
-            <a:ext cx="4370832" cy="1005840"/>
-          </a:xfrm>
-          <a:prstGeom prst="rect">
-            <a:avLst/>
-          </a:prstGeom>
-          <a:noFill/>
-          <a:ln/>
-        </p:spPr>
-        <p:txBody>
-          <a:bodyPr wrap="square" lIns="0" tIns="0" rIns="0" bIns="0" rtlCol="0" anchor="ctr"/>
-          <a:lstStyle/>
-          <a:p>
-            <a:pPr indent="0" marL="0">
-              <a:buNone/>
-            </a:pPr>
-            <a:r>
-              <a:rPr lang="en-US" sz="1400" b="1" dirty="0">
-                <a:solidFill>
-                  <a:schemeClr val="bg2"/>
-                </a:solidFill>
-              </a:rPr>
-              <a:t>LLMProvider  (where text comes from)</a:t>
-            </a:r>
-            <a:endParaRPr lang="en-US" sz="1400" dirty="0"/>
-          </a:p>
-          <a:p>
-            <a:pPr indent="0" marL="0">
-              <a:buNone/>
-            </a:pPr>
-            <a:r>
-              <a:rPr lang="en-US" sz="1200" dirty="0">
-                <a:solidFill>
-                  <a:schemeClr val="accent5"/>
-                </a:solidFill>
-              </a:rPr>
-              <a:t>Ollama, local · Anthropic, cloud · Mock, tests</a:t>
-            </a:r>
-            <a:endParaRPr lang="en-US" sz="1400" dirty="0"/>
-          </a:p>
-        </p:txBody>
-      </p:sp>
-      <p:pic>
-        <p:nvPicPr>
-          <p:cNvPr id="26" name="flow arrow 2.62" descr="preencoded.png">    </p:cNvPr>
-          <p:cNvPicPr>
-            <a:picLocks noChangeAspect="1"/>
-          </p:cNvPicPr>
-          <p:nvPr/>
-        </p:nvPicPr>
-        <p:blipFill>
-          <a:blip r:embed="rId5"/>
-          <a:stretch>
-            <a:fillRect/>
-          </a:stretch>
-        </p:blipFill>
-        <p:spPr>
-          <a:xfrm>
-            <a:off x="8860536" y="2395728"/>
-            <a:ext cx="274320" cy="365760"/>
-          </a:xfrm>
-          <a:prstGeom prst="rect">
-            <a:avLst/>
-          </a:prstGeom>
-        </p:spPr>
-      </p:pic>
-      <p:pic>
-        <p:nvPicPr>
-          <p:cNvPr id="27" name="flow arrow 4.17" descr="preencoded.png">    </p:cNvPr>
-          <p:cNvPicPr>
-            <a:picLocks noChangeAspect="1"/>
-          </p:cNvPicPr>
-          <p:nvPr/>
-        </p:nvPicPr>
-        <p:blipFill>
-          <a:blip r:embed="rId6"/>
-          <a:stretch>
-            <a:fillRect/>
-          </a:stretch>
-        </p:blipFill>
-        <p:spPr>
-          <a:xfrm>
-            <a:off x="8860536" y="3813048"/>
-            <a:ext cx="274320" cy="365760"/>
-          </a:xfrm>
-          <a:prstGeom prst="rect">
-            <a:avLst/>
-          </a:prstGeom>
-        </p:spPr>
-      </p:pic>
-      <p:sp>
-        <p:nvSpPr>
-          <p:cNvPr id="28" name="arch caption"/>
-          <p:cNvSpPr txBox="1"/>
-          <p:nvPr/>
-        </p:nvSpPr>
-        <p:spPr>
-          <a:xfrm>
-            <a:off x="6675120" y="5394960"/>
-            <a:ext cx="4645152" cy="365760"/>
-          </a:xfrm>
-          <a:prstGeom prst="rect">
-            <a:avLst/>
-          </a:prstGeom>
-          <a:noFill/>
-          <a:ln/>
-        </p:spPr>
-        <p:txBody>
-          <a:bodyPr wrap="square" lIns="0" tIns="0" rIns="0" bIns="0" rtlCol="0" anchor="ctr"/>
-          <a:lstStyle/>
-          <a:p>
-            <a:pPr indent="0" marL="0">
-              <a:buNone/>
-            </a:pPr>
-            <a:r>
-              <a:rPr lang="en-US" sz="1200" dirty="0">
-                <a:solidFill>
-                  <a:schemeClr val="accent5"/>
-                </a:solidFill>
-              </a:rPr>
-              <a:t>Callers only ever touch the two interfaces.</a:t>
-            </a:r>
-            <a:endParaRPr lang="en-US" sz="1200" dirty="0"/>
-          </a:p>
-        </p:txBody>
-      </p:sp>
-      <p:sp>
-        <p:nvSpPr>
-          <p:cNvPr id="25" name="Slide Number Placeholder 0"/>
-          <p:cNvSpPr>
-            <a:spLocks noGrp="1"/>
-          </p:cNvSpPr>
-          <p:nvPr>
-            <p:ph type="sldNum" sz="quarter" idx="4294967295"/>
-          </p:nvPr>
-        </p:nvSpPr>
-        <p:spPr>
-          <a:xfrm>
-            <a:off x="11091672" y="6382512"/>
-            <a:ext cx="548640" cy="274320"/>
-          </a:xfrm>
-          <a:prstGeom prst="rect">
-            <a:avLst/>
-          </a:prstGeom>
-          <a:extLst>
-            <a:ext uri="{C572A759-6A51-4108-AA02-DFA0A04FC94B}">
-              <ma14:wrappingTextBoxFlag xmlns:ma14="http://schemas.microsoft.com/office/mac/drawingml/2011/main" val="0"/>
-            </a:ext>
-          </a:extLst>
-        </p:spPr>
-        <p:txBody>
-          <a:bodyPr/>
-          <a:lstStyle>
-            <a:lvl1pPr>
-              <a:defRPr sz="1000">
-                <a:solidFill>
-                  <a:srgbClr val="8B97AE"/>
-                </a:solidFill>
-              </a:defRPr>
-            </a:lvl1pPr>
-          </a:lstStyle>
-          <a:p>
-            <a:pPr algn="r"/>
-            <a:fld id="{F7021451-1387-4CA6-816F-3879F97B5CBC}" type="slidenum">
-              <a:rPr b="0" lang="en-US"/>
               <a:t>8</a:t>
             </a:fld>
             <a:endParaRPr lang="en-US"/>
@@ -10500,7 +11963,7 @@
                   <a:schemeClr val="bg2"/>
                 </a:solidFill>
               </a:rPr>
-              <a:t>What still breaks, and how we know</a:t>
+              <a:t>It runs on a laptop today: no cloud, no API key</a:t>
             </a:r>
             <a:endParaRPr lang="en-US" sz="3200" dirty="0"/>
           </a:p>
@@ -10508,22 +11971,494 @@
       </p:sp>
       <p:sp>
         <p:nvSpPr>
-          <p:cNvPr id="3" name="Vocabulary gaps card"/>
+          <p:cNvPr id="3" name="FiCpu circle"/>
           <p:cNvSpPr/>
           <p:nvPr/>
         </p:nvSpPr>
         <p:spPr>
           <a:xfrm>
-            <a:off x="548640" y="1463040"/>
-            <a:ext cx="5394960" cy="2057400"/>
+            <a:off x="548640" y="1508760"/>
+            <a:ext cx="566928" cy="566928"/>
+          </a:xfrm>
+          <a:prstGeom prst="ellipse">
+            <a:avLst/>
+          </a:prstGeom>
+          <a:solidFill>
+            <a:schemeClr val="accent2">
+              <a:alpha val="18000"/>
+            </a:schemeClr>
+          </a:solidFill>
+          <a:ln/>
+        </p:spPr>
+      </p:sp>
+      <p:pic>
+        <p:nvPicPr>
+          <p:cNvPr id="4" name="FiCpu icon" descr="preencoded.png">    </p:cNvPr>
+          <p:cNvPicPr>
+            <a:picLocks noChangeAspect="1"/>
+          </p:cNvPicPr>
+          <p:nvPr/>
+        </p:nvPicPr>
+        <p:blipFill>
+          <a:blip r:embed="rId1"/>
+          <a:stretch>
+            <a:fillRect/>
+          </a:stretch>
+        </p:blipFill>
+        <p:spPr>
+          <a:xfrm>
+            <a:off x="696041" y="1656161"/>
+            <a:ext cx="272125" cy="272125"/>
+          </a:xfrm>
+          <a:prstGeom prst="rect">
+            <a:avLst/>
+          </a:prstGeom>
+        </p:spPr>
+      </p:pic>
+      <p:sp>
+        <p:nvSpPr>
+          <p:cNvPr id="5" name="A 7B open model, on CPU header"/>
+          <p:cNvSpPr txBox="1"/>
+          <p:nvPr/>
+        </p:nvSpPr>
+        <p:spPr>
+          <a:xfrm>
+            <a:off x="1325880" y="1490472"/>
+            <a:ext cx="4617720" cy="329184"/>
+          </a:xfrm>
+          <a:prstGeom prst="rect">
+            <a:avLst/>
+          </a:prstGeom>
+          <a:noFill/>
+          <a:ln/>
+        </p:spPr>
+        <p:txBody>
+          <a:bodyPr wrap="square" lIns="0" tIns="0" rIns="0" bIns="0" rtlCol="0" anchor="ctr"/>
+          <a:lstStyle/>
+          <a:p>
+            <a:pPr indent="0" marL="0">
+              <a:buNone/>
+            </a:pPr>
+            <a:r>
+              <a:rPr lang="en-US" sz="1800" b="1" dirty="0">
+                <a:solidFill>
+                  <a:schemeClr val="bg2"/>
+                </a:solidFill>
+              </a:rPr>
+              <a:t>A 7B open model, on CPU</a:t>
+            </a:r>
+            <a:endParaRPr lang="en-US" sz="1800" dirty="0"/>
+          </a:p>
+        </p:txBody>
+      </p:sp>
+      <p:sp>
+        <p:nvSpPr>
+          <p:cNvPr id="6" name="A 7B open model, on CPU body"/>
+          <p:cNvSpPr txBox="1"/>
+          <p:nvPr/>
+        </p:nvSpPr>
+        <p:spPr>
+          <a:xfrm>
+            <a:off x="1325880" y="1837944"/>
+            <a:ext cx="4617720" cy="548640"/>
+          </a:xfrm>
+          <a:prstGeom prst="rect">
+            <a:avLst/>
+          </a:prstGeom>
+          <a:noFill/>
+          <a:ln/>
+        </p:spPr>
+        <p:txBody>
+          <a:bodyPr wrap="square" lIns="0" tIns="0" rIns="0" bIns="0" rtlCol="0" anchor="t"/>
+          <a:lstStyle/>
+          <a:p>
+            <a:pPr indent="0" marL="0">
+              <a:buNone/>
+            </a:pPr>
+            <a:r>
+              <a:rPr lang="en-US" sz="1500" dirty="0">
+                <a:solidFill>
+                  <a:schemeClr val="accent5"/>
+                </a:solidFill>
+              </a:rPr>
+              <a:t>qwen2.5:7b via Ollama: a 4.7 GB download, no GPU needed.</a:t>
+            </a:r>
+            <a:endParaRPr lang="en-US" sz="1500" dirty="0"/>
+          </a:p>
+        </p:txBody>
+      </p:sp>
+      <p:sp>
+        <p:nvSpPr>
+          <p:cNvPr id="7" name="FiClock circle"/>
+          <p:cNvSpPr/>
+          <p:nvPr/>
+        </p:nvSpPr>
+        <p:spPr>
+          <a:xfrm>
+            <a:off x="548640" y="2697480"/>
+            <a:ext cx="566928" cy="566928"/>
+          </a:xfrm>
+          <a:prstGeom prst="ellipse">
+            <a:avLst/>
+          </a:prstGeom>
+          <a:solidFill>
+            <a:schemeClr val="accent2">
+              <a:alpha val="18000"/>
+            </a:schemeClr>
+          </a:solidFill>
+          <a:ln/>
+        </p:spPr>
+      </p:sp>
+      <p:pic>
+        <p:nvPicPr>
+          <p:cNvPr id="8" name="FiClock icon" descr="preencoded.png">    </p:cNvPr>
+          <p:cNvPicPr>
+            <a:picLocks noChangeAspect="1"/>
+          </p:cNvPicPr>
+          <p:nvPr/>
+        </p:nvPicPr>
+        <p:blipFill>
+          <a:blip r:embed="rId2"/>
+          <a:stretch>
+            <a:fillRect/>
+          </a:stretch>
+        </p:blipFill>
+        <p:spPr>
+          <a:xfrm>
+            <a:off x="696041" y="2844881"/>
+            <a:ext cx="272125" cy="272125"/>
+          </a:xfrm>
+          <a:prstGeom prst="rect">
+            <a:avLst/>
+          </a:prstGeom>
+        </p:spPr>
+      </p:pic>
+      <p:sp>
+        <p:nvSpPr>
+          <p:cNvPr id="9" name="Usable speed header"/>
+          <p:cNvSpPr txBox="1"/>
+          <p:nvPr/>
+        </p:nvSpPr>
+        <p:spPr>
+          <a:xfrm>
+            <a:off x="1325880" y="2679192"/>
+            <a:ext cx="4617720" cy="329184"/>
+          </a:xfrm>
+          <a:prstGeom prst="rect">
+            <a:avLst/>
+          </a:prstGeom>
+          <a:noFill/>
+          <a:ln/>
+        </p:spPr>
+        <p:txBody>
+          <a:bodyPr wrap="square" lIns="0" tIns="0" rIns="0" bIns="0" rtlCol="0" anchor="ctr"/>
+          <a:lstStyle/>
+          <a:p>
+            <a:pPr indent="0" marL="0">
+              <a:buNone/>
+            </a:pPr>
+            <a:r>
+              <a:rPr lang="en-US" sz="1800" b="1" dirty="0">
+                <a:solidFill>
+                  <a:schemeClr val="bg2"/>
+                </a:solidFill>
+              </a:rPr>
+              <a:t>Usable speed</a:t>
+            </a:r>
+            <a:endParaRPr lang="en-US" sz="1800" dirty="0"/>
+          </a:p>
+        </p:txBody>
+      </p:sp>
+      <p:sp>
+        <p:nvSpPr>
+          <p:cNvPr id="10" name="Usable speed body"/>
+          <p:cNvSpPr txBox="1"/>
+          <p:nvPr/>
+        </p:nvSpPr>
+        <p:spPr>
+          <a:xfrm>
+            <a:off x="1325880" y="3026664"/>
+            <a:ext cx="4617720" cy="548640"/>
+          </a:xfrm>
+          <a:prstGeom prst="rect">
+            <a:avLst/>
+          </a:prstGeom>
+          <a:noFill/>
+          <a:ln/>
+        </p:spPr>
+        <p:txBody>
+          <a:bodyPr wrap="square" lIns="0" tIns="0" rIns="0" bIns="0" rtlCol="0" anchor="t"/>
+          <a:lstStyle/>
+          <a:p>
+            <a:pPr indent="0" marL="0">
+              <a:buNone/>
+            </a:pPr>
+            <a:r>
+              <a:rPr lang="en-US" sz="1500" dirty="0">
+                <a:solidFill>
+                  <a:schemeClr val="accent5"/>
+                </a:solidFill>
+              </a:rPr>
+              <a:t>About 17 seconds per round trip once warm, about 66 seconds cold.</a:t>
+            </a:r>
+            <a:endParaRPr lang="en-US" sz="1500" dirty="0"/>
+          </a:p>
+        </p:txBody>
+      </p:sp>
+      <p:sp>
+        <p:nvSpPr>
+          <p:cNvPr id="11" name="FiCloud circle"/>
+          <p:cNvSpPr/>
+          <p:nvPr/>
+        </p:nvSpPr>
+        <p:spPr>
+          <a:xfrm>
+            <a:off x="548640" y="3886200"/>
+            <a:ext cx="566928" cy="566928"/>
+          </a:xfrm>
+          <a:prstGeom prst="ellipse">
+            <a:avLst/>
+          </a:prstGeom>
+          <a:solidFill>
+            <a:schemeClr val="accent2">
+              <a:alpha val="18000"/>
+            </a:schemeClr>
+          </a:solidFill>
+          <a:ln/>
+        </p:spPr>
+      </p:sp>
+      <p:pic>
+        <p:nvPicPr>
+          <p:cNvPr id="12" name="FiCloud icon" descr="preencoded.png">    </p:cNvPr>
+          <p:cNvPicPr>
+            <a:picLocks noChangeAspect="1"/>
+          </p:cNvPicPr>
+          <p:nvPr/>
+        </p:nvPicPr>
+        <p:blipFill>
+          <a:blip r:embed="rId3"/>
+          <a:stretch>
+            <a:fillRect/>
+          </a:stretch>
+        </p:blipFill>
+        <p:spPr>
+          <a:xfrm>
+            <a:off x="696041" y="4033601"/>
+            <a:ext cx="272125" cy="272125"/>
+          </a:xfrm>
+          <a:prstGeom prst="rect">
+            <a:avLst/>
+          </a:prstGeom>
+        </p:spPr>
+      </p:pic>
+      <p:sp>
+        <p:nvSpPr>
+          <p:cNvPr id="13" name="Cloud is one setting away header"/>
+          <p:cNvSpPr txBox="1"/>
+          <p:nvPr/>
+        </p:nvSpPr>
+        <p:spPr>
+          <a:xfrm>
+            <a:off x="1325880" y="3867912"/>
+            <a:ext cx="4617720" cy="329184"/>
+          </a:xfrm>
+          <a:prstGeom prst="rect">
+            <a:avLst/>
+          </a:prstGeom>
+          <a:noFill/>
+          <a:ln/>
+        </p:spPr>
+        <p:txBody>
+          <a:bodyPr wrap="square" lIns="0" tIns="0" rIns="0" bIns="0" rtlCol="0" anchor="ctr"/>
+          <a:lstStyle/>
+          <a:p>
+            <a:pPr indent="0" marL="0">
+              <a:buNone/>
+            </a:pPr>
+            <a:r>
+              <a:rPr lang="en-US" sz="1800" b="1" dirty="0">
+                <a:solidFill>
+                  <a:schemeClr val="bg2"/>
+                </a:solidFill>
+              </a:rPr>
+              <a:t>Cloud is one setting away</a:t>
+            </a:r>
+            <a:endParaRPr lang="en-US" sz="1800" dirty="0"/>
+          </a:p>
+        </p:txBody>
+      </p:sp>
+      <p:sp>
+        <p:nvSpPr>
+          <p:cNvPr id="14" name="Cloud is one setting away body"/>
+          <p:cNvSpPr txBox="1"/>
+          <p:nvPr/>
+        </p:nvSpPr>
+        <p:spPr>
+          <a:xfrm>
+            <a:off x="1325880" y="4215384"/>
+            <a:ext cx="4617720" cy="548640"/>
+          </a:xfrm>
+          <a:prstGeom prst="rect">
+            <a:avLst/>
+          </a:prstGeom>
+          <a:noFill/>
+          <a:ln/>
+        </p:spPr>
+        <p:txBody>
+          <a:bodyPr wrap="square" lIns="0" tIns="0" rIns="0" bIns="0" rtlCol="0" anchor="t"/>
+          <a:lstStyle/>
+          <a:p>
+            <a:pPr indent="0" marL="0">
+              <a:buNone/>
+            </a:pPr>
+            <a:r>
+              <a:rPr lang="en-US" sz="1500" dirty="0">
+                <a:solidFill>
+                  <a:schemeClr val="accent5"/>
+                </a:solidFill>
+              </a:rPr>
+              <a:t>The same code runs against a hosted model by changing one line in .env.</a:t>
+            </a:r>
+            <a:endParaRPr lang="en-US" sz="1500" dirty="0"/>
+          </a:p>
+        </p:txBody>
+      </p:sp>
+      <p:sp>
+        <p:nvSpPr>
+          <p:cNvPr id="15" name="FiLayers circle"/>
+          <p:cNvSpPr/>
+          <p:nvPr/>
+        </p:nvSpPr>
+        <p:spPr>
+          <a:xfrm>
+            <a:off x="548640" y="5074920"/>
+            <a:ext cx="566928" cy="566928"/>
+          </a:xfrm>
+          <a:prstGeom prst="ellipse">
+            <a:avLst/>
+          </a:prstGeom>
+          <a:solidFill>
+            <a:schemeClr val="accent2">
+              <a:alpha val="18000"/>
+            </a:schemeClr>
+          </a:solidFill>
+          <a:ln/>
+        </p:spPr>
+      </p:sp>
+      <p:pic>
+        <p:nvPicPr>
+          <p:cNvPr id="16" name="FiLayers icon" descr="preencoded.png">    </p:cNvPr>
+          <p:cNvPicPr>
+            <a:picLocks noChangeAspect="1"/>
+          </p:cNvPicPr>
+          <p:nvPr/>
+        </p:nvPicPr>
+        <p:blipFill>
+          <a:blip r:embed="rId4"/>
+          <a:stretch>
+            <a:fillRect/>
+          </a:stretch>
+        </p:blipFill>
+        <p:spPr>
+          <a:xfrm>
+            <a:off x="696041" y="5222321"/>
+            <a:ext cx="272125" cy="272125"/>
+          </a:xfrm>
+          <a:prstGeom prst="rect">
+            <a:avLst/>
+          </a:prstGeom>
+        </p:spPr>
+      </p:pic>
+      <p:sp>
+        <p:nvSpPr>
+          <p:cNvPr id="17" name="Built to grow header"/>
+          <p:cNvSpPr txBox="1"/>
+          <p:nvPr/>
+        </p:nvSpPr>
+        <p:spPr>
+          <a:xfrm>
+            <a:off x="1325880" y="5056632"/>
+            <a:ext cx="4617720" cy="329184"/>
+          </a:xfrm>
+          <a:prstGeom prst="rect">
+            <a:avLst/>
+          </a:prstGeom>
+          <a:noFill/>
+          <a:ln/>
+        </p:spPr>
+        <p:txBody>
+          <a:bodyPr wrap="square" lIns="0" tIns="0" rIns="0" bIns="0" rtlCol="0" anchor="ctr"/>
+          <a:lstStyle/>
+          <a:p>
+            <a:pPr indent="0" marL="0">
+              <a:buNone/>
+            </a:pPr>
+            <a:r>
+              <a:rPr lang="en-US" sz="1800" b="1" dirty="0">
+                <a:solidFill>
+                  <a:schemeClr val="bg2"/>
+                </a:solidFill>
+              </a:rPr>
+              <a:t>Built to grow</a:t>
+            </a:r>
+            <a:endParaRPr lang="en-US" sz="1800" dirty="0"/>
+          </a:p>
+        </p:txBody>
+      </p:sp>
+      <p:sp>
+        <p:nvSpPr>
+          <p:cNvPr id="18" name="Built to grow body"/>
+          <p:cNvSpPr txBox="1"/>
+          <p:nvPr/>
+        </p:nvSpPr>
+        <p:spPr>
+          <a:xfrm>
+            <a:off x="1325880" y="5404104"/>
+            <a:ext cx="4617720" cy="548640"/>
+          </a:xfrm>
+          <a:prstGeom prst="rect">
+            <a:avLst/>
+          </a:prstGeom>
+          <a:noFill/>
+          <a:ln/>
+        </p:spPr>
+        <p:txBody>
+          <a:bodyPr wrap="square" lIns="0" tIns="0" rIns="0" bIns="0" rtlCol="0" anchor="t"/>
+          <a:lstStyle/>
+          <a:p>
+            <a:pPr indent="0" marL="0">
+              <a:buNone/>
+            </a:pPr>
+            <a:r>
+              <a:rPr lang="en-US" sz="1500" dirty="0">
+                <a:solidFill>
+                  <a:schemeClr val="accent5"/>
+                </a:solidFill>
+              </a:rPr>
+              <a:t>Every future feature is a new Provider or Codec, not a rewrite.</a:t>
+            </a:r>
+            <a:endParaRPr lang="en-US" sz="1500" dirty="0"/>
+          </a:p>
+        </p:txBody>
+      </p:sp>
+      <p:sp>
+        <p:nvSpPr>
+          <p:cNvPr id="19" name="architecture panel"/>
+          <p:cNvSpPr/>
+          <p:nvPr/>
+        </p:nvSpPr>
+        <p:spPr>
+          <a:xfrm>
+            <a:off x="6355080" y="1508760"/>
+            <a:ext cx="5285232" cy="4526280"/>
           </a:xfrm>
           <a:prstGeom prst="roundRect">
             <a:avLst>
-              <a:gd name="adj" fmla="val 6222"/>
+              <a:gd name="adj" fmla="val 2828"/>
             </a:avLst>
           </a:prstGeom>
           <a:solidFill>
-            <a:schemeClr val="tx2"/>
+            <a:schemeClr val="tx1"/>
           </a:solidFill>
           <a:ln w="12700">
             <a:solidFill>
@@ -10535,136 +12470,18 @@
       </p:sp>
       <p:sp>
         <p:nvSpPr>
-          <p:cNvPr id="4" name="FiAlertTriangle circle"/>
+          <p:cNvPr id="20" name="callers"/>
           <p:cNvSpPr/>
           <p:nvPr/>
         </p:nvSpPr>
         <p:spPr>
           <a:xfrm>
-            <a:off x="868680" y="1783080"/>
-            <a:ext cx="566928" cy="566928"/>
-          </a:xfrm>
-          <a:prstGeom prst="ellipse">
-            <a:avLst/>
-          </a:prstGeom>
-          <a:solidFill>
-            <a:schemeClr val="accent1">
-              <a:alpha val="18000"/>
-            </a:schemeClr>
-          </a:solidFill>
-          <a:ln/>
-        </p:spPr>
-      </p:sp>
-      <p:pic>
-        <p:nvPicPr>
-          <p:cNvPr id="5" name="FiAlertTriangle icon" descr="preencoded.png">    </p:cNvPr>
-          <p:cNvPicPr>
-            <a:picLocks noChangeAspect="1"/>
-          </p:cNvPicPr>
-          <p:nvPr/>
-        </p:nvPicPr>
-        <p:blipFill>
-          <a:blip r:embed="rId1"/>
-          <a:stretch>
-            <a:fillRect/>
-          </a:stretch>
-        </p:blipFill>
-        <p:spPr>
-          <a:xfrm>
-            <a:off x="1016081" y="1930481"/>
-            <a:ext cx="272125" cy="272125"/>
-          </a:xfrm>
-          <a:prstGeom prst="rect">
-            <a:avLst/>
-          </a:prstGeom>
-        </p:spPr>
-      </p:pic>
-      <p:sp>
-        <p:nvSpPr>
-          <p:cNvPr id="6" name="Vocabulary gaps"/>
-          <p:cNvSpPr txBox="1"/>
-          <p:nvPr/>
-        </p:nvSpPr>
-        <p:spPr>
-          <a:xfrm>
-            <a:off x="1645920" y="1828800"/>
-            <a:ext cx="4023360" cy="457200"/>
-          </a:xfrm>
-          <a:prstGeom prst="rect">
-            <a:avLst/>
-          </a:prstGeom>
-          <a:noFill/>
-          <a:ln/>
-        </p:spPr>
-        <p:txBody>
-          <a:bodyPr wrap="square" lIns="0" tIns="0" rIns="0" bIns="0" rtlCol="0" anchor="ctr"/>
-          <a:lstStyle/>
-          <a:p>
-            <a:pPr indent="0" marL="0">
-              <a:buNone/>
-            </a:pPr>
-            <a:r>
-              <a:rPr lang="en-US" sz="1900" b="1" dirty="0">
-                <a:solidFill>
-                  <a:schemeClr val="bg2"/>
-                </a:solidFill>
-              </a:rPr>
-              <a:t>Vocabulary gaps</a:t>
-            </a:r>
-            <a:endParaRPr lang="en-US" sz="1900" dirty="0"/>
-          </a:p>
-        </p:txBody>
-      </p:sp>
-      <p:sp>
-        <p:nvSpPr>
-          <p:cNvPr id="7" name="Vocabulary gaps body"/>
-          <p:cNvSpPr txBox="1"/>
-          <p:nvPr/>
-        </p:nvSpPr>
-        <p:spPr>
-          <a:xfrm>
-            <a:off x="1645920" y="2331720"/>
-            <a:ext cx="4023360" cy="1051560"/>
-          </a:xfrm>
-          <a:prstGeom prst="rect">
-            <a:avLst/>
-          </a:prstGeom>
-          <a:noFill/>
-          <a:ln/>
-        </p:spPr>
-        <p:txBody>
-          <a:bodyPr wrap="square" lIns="0" tIns="0" rIns="0" bIns="0" rtlCol="0" anchor="t"/>
-          <a:lstStyle/>
-          <a:p>
-            <a:pPr indent="0" marL="0">
-              <a:buNone/>
-            </a:pPr>
-            <a:r>
-              <a:rPr lang="en-US" sz="1500" dirty="0">
-                <a:solidFill>
-                  <a:schemeClr val="accent5"/>
-                </a:solidFill>
-              </a:rPr>
-              <a:t>Topic words outside the shared codebook can leak into the cover (“choir practice” got through once).</a:t>
-            </a:r>
-            <a:endParaRPr lang="en-US" sz="1500" dirty="0"/>
-          </a:p>
-        </p:txBody>
-      </p:sp>
-      <p:sp>
-        <p:nvSpPr>
-          <p:cNvPr id="8" name="Paraphrase drift card"/>
-          <p:cNvSpPr/>
-          <p:nvPr/>
-        </p:nvSpPr>
-        <p:spPr>
-          <a:xfrm>
-            <a:off x="6217920" y="1463040"/>
-            <a:ext cx="5394960" cy="2057400"/>
+            <a:off x="6675120" y="1737360"/>
+            <a:ext cx="4645152" cy="548640"/>
           </a:xfrm>
           <a:prstGeom prst="roundRect">
             <a:avLst>
-              <a:gd name="adj" fmla="val 6222"/>
+              <a:gd name="adj" fmla="val 16667"/>
             </a:avLst>
           </a:prstGeom>
           <a:solidFill>
@@ -10672,7 +12489,7 @@
           </a:solidFill>
           <a:ln w="12700">
             <a:solidFill>
-              <a:schemeClr val="accent6"/>
+              <a:srgbClr val="1E2A40"/>
             </a:solidFill>
             <a:prstDash val="solid"/>
           </a:ln>
@@ -10680,136 +12497,54 @@
       </p:sp>
       <p:sp>
         <p:nvSpPr>
-          <p:cNvPr id="9" name="FiAlertTriangle circle"/>
+          <p:cNvPr id="21" name="callers label"/>
+          <p:cNvSpPr txBox="1"/>
+          <p:nvPr/>
+        </p:nvSpPr>
+        <p:spPr>
+          <a:xfrm>
+            <a:off x="6812280" y="1737360"/>
+            <a:ext cx="4370832" cy="548640"/>
+          </a:xfrm>
+          <a:prstGeom prst="rect">
+            <a:avLst/>
+          </a:prstGeom>
+          <a:noFill/>
+          <a:ln/>
+        </p:spPr>
+        <p:txBody>
+          <a:bodyPr wrap="square" lIns="0" tIns="0" rIns="0" bIns="0" rtlCol="0" anchor="ctr"/>
+          <a:lstStyle/>
+          <a:p>
+            <a:pPr indent="0" marL="0">
+              <a:buNone/>
+            </a:pPr>
+            <a:r>
+              <a:rPr lang="en-US" sz="1400" b="1" dirty="0">
+                <a:solidFill>
+                  <a:schemeClr val="bg2"/>
+                </a:solidFill>
+              </a:rPr>
+              <a:t>CLI  ·  Demo app  ·  Eval harness</a:t>
+            </a:r>
+            <a:endParaRPr lang="en-US" sz="1400" dirty="0"/>
+          </a:p>
+        </p:txBody>
+      </p:sp>
+      <p:sp>
+        <p:nvSpPr>
+          <p:cNvPr id="22" name="codec seam"/>
           <p:cNvSpPr/>
           <p:nvPr/>
         </p:nvSpPr>
         <p:spPr>
           <a:xfrm>
-            <a:off x="6537960" y="1783080"/>
-            <a:ext cx="566928" cy="566928"/>
-          </a:xfrm>
-          <a:prstGeom prst="ellipse">
-            <a:avLst/>
-          </a:prstGeom>
-          <a:solidFill>
-            <a:schemeClr val="accent1">
-              <a:alpha val="18000"/>
-            </a:schemeClr>
-          </a:solidFill>
-          <a:ln/>
-        </p:spPr>
-      </p:sp>
-      <p:pic>
-        <p:nvPicPr>
-          <p:cNvPr id="10" name="FiAlertTriangle icon" descr="preencoded.png">    </p:cNvPr>
-          <p:cNvPicPr>
-            <a:picLocks noChangeAspect="1"/>
-          </p:cNvPicPr>
-          <p:nvPr/>
-        </p:nvPicPr>
-        <p:blipFill>
-          <a:blip r:embed="rId2"/>
-          <a:stretch>
-            <a:fillRect/>
-          </a:stretch>
-        </p:blipFill>
-        <p:spPr>
-          <a:xfrm>
-            <a:off x="6685361" y="1930481"/>
-            <a:ext cx="272125" cy="272125"/>
-          </a:xfrm>
-          <a:prstGeom prst="rect">
-            <a:avLst/>
-          </a:prstGeom>
-        </p:spPr>
-      </p:pic>
-      <p:sp>
-        <p:nvSpPr>
-          <p:cNvPr id="11" name="Paraphrase drift"/>
-          <p:cNvSpPr txBox="1"/>
-          <p:nvPr/>
-        </p:nvSpPr>
-        <p:spPr>
-          <a:xfrm>
-            <a:off x="7315200" y="1828800"/>
-            <a:ext cx="4023360" cy="457200"/>
-          </a:xfrm>
-          <a:prstGeom prst="rect">
-            <a:avLst/>
-          </a:prstGeom>
-          <a:noFill/>
-          <a:ln/>
-        </p:spPr>
-        <p:txBody>
-          <a:bodyPr wrap="square" lIns="0" tIns="0" rIns="0" bIns="0" rtlCol="0" anchor="ctr"/>
-          <a:lstStyle/>
-          <a:p>
-            <a:pPr indent="0" marL="0">
-              <a:buNone/>
-            </a:pPr>
-            <a:r>
-              <a:rPr lang="en-US" sz="1900" b="1" dirty="0">
-                <a:solidFill>
-                  <a:schemeClr val="bg2"/>
-                </a:solidFill>
-              </a:rPr>
-              <a:t>Paraphrase drift</a:t>
-            </a:r>
-            <a:endParaRPr lang="en-US" sz="1900" dirty="0"/>
-          </a:p>
-        </p:txBody>
-      </p:sp>
-      <p:sp>
-        <p:nvSpPr>
-          <p:cNvPr id="12" name="Paraphrase drift body"/>
-          <p:cNvSpPr txBox="1"/>
-          <p:nvPr/>
-        </p:nvSpPr>
-        <p:spPr>
-          <a:xfrm>
-            <a:off x="7315200" y="2331720"/>
-            <a:ext cx="4023360" cy="1051560"/>
-          </a:xfrm>
-          <a:prstGeom prst="rect">
-            <a:avLst/>
-          </a:prstGeom>
-          <a:noFill/>
-          <a:ln/>
-        </p:spPr>
-        <p:txBody>
-          <a:bodyPr wrap="square" lIns="0" tIns="0" rIns="0" bIns="0" rtlCol="0" anchor="t"/>
-          <a:lstStyle/>
-          <a:p>
-            <a:pPr indent="0" marL="0">
-              <a:buNone/>
-            </a:pPr>
-            <a:r>
-              <a:rPr lang="en-US" sz="1500" dirty="0">
-                <a:solidFill>
-                  <a:schemeClr val="accent5"/>
-                </a:solidFill>
-              </a:rPr>
-              <a:t>The model sometimes shifts times (1705 came back wrong) or invents places (“road work”). Our scorer checks exact fields, not the topic.</a:t>
-            </a:r>
-            <a:endParaRPr lang="en-US" sz="1500" dirty="0"/>
-          </a:p>
-        </p:txBody>
-      </p:sp>
-      <p:sp>
-        <p:nvSpPr>
-          <p:cNvPr id="13" name="Patterns card"/>
-          <p:cNvSpPr/>
-          <p:nvPr/>
-        </p:nvSpPr>
-        <p:spPr>
-          <a:xfrm>
-            <a:off x="548640" y="3794760"/>
-            <a:ext cx="5394960" cy="2057400"/>
+            <a:off x="6675120" y="2606040"/>
+            <a:ext cx="4645152" cy="868680"/>
           </a:xfrm>
           <a:prstGeom prst="roundRect">
             <a:avLst>
-              <a:gd name="adj" fmla="val 6222"/>
+              <a:gd name="adj" fmla="val 10526"/>
             </a:avLst>
           </a:prstGeom>
           <a:solidFill>
@@ -10817,7 +12552,7 @@
           </a:solidFill>
           <a:ln w="12700">
             <a:solidFill>
-              <a:schemeClr val="accent6"/>
+              <a:srgbClr val="F5B544"/>
             </a:solidFill>
             <a:prstDash val="solid"/>
           </a:ln>
@@ -10825,136 +12560,68 @@
       </p:sp>
       <p:sp>
         <p:nvSpPr>
-          <p:cNvPr id="14" name="FiAlertTriangle circle"/>
+          <p:cNvPr id="23" name="codec seam label"/>
+          <p:cNvSpPr txBox="1"/>
+          <p:nvPr/>
+        </p:nvSpPr>
+        <p:spPr>
+          <a:xfrm>
+            <a:off x="6812280" y="2606040"/>
+            <a:ext cx="4370832" cy="868680"/>
+          </a:xfrm>
+          <a:prstGeom prst="rect">
+            <a:avLst/>
+          </a:prstGeom>
+          <a:noFill/>
+          <a:ln/>
+        </p:spPr>
+        <p:txBody>
+          <a:bodyPr wrap="square" lIns="0" tIns="0" rIns="0" bIns="0" rtlCol="0" anchor="ctr"/>
+          <a:lstStyle/>
+          <a:p>
+            <a:pPr indent="0" marL="0">
+              <a:buNone/>
+            </a:pPr>
+            <a:r>
+              <a:rPr lang="en-US" sz="1400" b="1" dirty="0">
+                <a:solidFill>
+                  <a:schemeClr val="bg2"/>
+                </a:solidFill>
+              </a:rPr>
+              <a:t>Codec  (how masking works)</a:t>
+            </a:r>
+            <a:endParaRPr lang="en-US" sz="1400" dirty="0"/>
+          </a:p>
+          <a:p>
+            <a:pPr indent="0" marL="0">
+              <a:buNone/>
+            </a:pPr>
+            <a:r>
+              <a:rPr lang="en-US" sz="1200" dirty="0">
+                <a:solidFill>
+                  <a:schemeClr val="accent5"/>
+                </a:solidFill>
+              </a:rPr>
+              <a:t>Two prompts · One bidirectional prompt · Keyed fields (next)</a:t>
+            </a:r>
+            <a:endParaRPr lang="en-US" sz="1400" dirty="0"/>
+          </a:p>
+        </p:txBody>
+      </p:sp>
+      <p:sp>
+        <p:nvSpPr>
+          <p:cNvPr id="24" name="provider seam"/>
           <p:cNvSpPr/>
           <p:nvPr/>
         </p:nvSpPr>
         <p:spPr>
           <a:xfrm>
-            <a:off x="868680" y="4114800"/>
-            <a:ext cx="566928" cy="566928"/>
-          </a:xfrm>
-          <a:prstGeom prst="ellipse">
-            <a:avLst/>
-          </a:prstGeom>
-          <a:solidFill>
-            <a:schemeClr val="accent1">
-              <a:alpha val="18000"/>
-            </a:schemeClr>
-          </a:solidFill>
-          <a:ln/>
-        </p:spPr>
-      </p:sp>
-      <p:pic>
-        <p:nvPicPr>
-          <p:cNvPr id="15" name="FiAlertTriangle icon" descr="preencoded.png">    </p:cNvPr>
-          <p:cNvPicPr>
-            <a:picLocks noChangeAspect="1"/>
-          </p:cNvPicPr>
-          <p:nvPr/>
-        </p:nvPicPr>
-        <p:blipFill>
-          <a:blip r:embed="rId3"/>
-          <a:stretch>
-            <a:fillRect/>
-          </a:stretch>
-        </p:blipFill>
-        <p:spPr>
-          <a:xfrm>
-            <a:off x="1016081" y="4262201"/>
-            <a:ext cx="272125" cy="272125"/>
-          </a:xfrm>
-          <a:prstGeom prst="rect">
-            <a:avLst/>
-          </a:prstGeom>
-        </p:spPr>
-      </p:pic>
-      <p:sp>
-        <p:nvSpPr>
-          <p:cNvPr id="16" name="Patterns"/>
-          <p:cNvSpPr txBox="1"/>
-          <p:nvPr/>
-        </p:nvSpPr>
-        <p:spPr>
-          <a:xfrm>
-            <a:off x="1645920" y="4160520"/>
-            <a:ext cx="4023360" cy="457200"/>
-          </a:xfrm>
-          <a:prstGeom prst="rect">
-            <a:avLst/>
-          </a:prstGeom>
-          <a:noFill/>
-          <a:ln/>
-        </p:spPr>
-        <p:txBody>
-          <a:bodyPr wrap="square" lIns="0" tIns="0" rIns="0" bIns="0" rtlCol="0" anchor="ctr"/>
-          <a:lstStyle/>
-          <a:p>
-            <a:pPr indent="0" marL="0">
-              <a:buNone/>
-            </a:pPr>
-            <a:r>
-              <a:rPr lang="en-US" sz="1900" b="1" dirty="0">
-                <a:solidFill>
-                  <a:schemeClr val="bg2"/>
-                </a:solidFill>
-              </a:rPr>
-              <a:t>Patterns</a:t>
-            </a:r>
-            <a:endParaRPr lang="en-US" sz="1900" dirty="0"/>
-          </a:p>
-        </p:txBody>
-      </p:sp>
-      <p:sp>
-        <p:nvSpPr>
-          <p:cNvPr id="17" name="Patterns body"/>
-          <p:cNvSpPr txBox="1"/>
-          <p:nvPr/>
-        </p:nvSpPr>
-        <p:spPr>
-          <a:xfrm>
-            <a:off x="1645920" y="4663440"/>
-            <a:ext cx="4023360" cy="1051560"/>
-          </a:xfrm>
-          <a:prstGeom prst="rect">
-            <a:avLst/>
-          </a:prstGeom>
-          <a:noFill/>
-          <a:ln/>
-        </p:spPr>
-        <p:txBody>
-          <a:bodyPr wrap="square" lIns="0" tIns="0" rIns="0" bIns="0" rtlCol="0" anchor="t"/>
-          <a:lstStyle/>
-          <a:p>
-            <a:pPr indent="0" marL="0">
-              <a:buNone/>
-            </a:pPr>
-            <a:r>
-              <a:rPr lang="en-US" sz="1500" dirty="0">
-                <a:solidFill>
-                  <a:schemeClr val="accent5"/>
-                </a:solidFill>
-              </a:rPr>
-              <a:t>Temperature 0 means the same note always gives the same cover, and odd “gift codes” are a tell for a statistical analyst.</a:t>
-            </a:r>
-            <a:endParaRPr lang="en-US" sz="1500" dirty="0"/>
-          </a:p>
-        </p:txBody>
-      </p:sp>
-      <p:sp>
-        <p:nvSpPr>
-          <p:cNvPr id="18" name="The rules are static card"/>
-          <p:cNvSpPr/>
-          <p:nvPr/>
-        </p:nvSpPr>
-        <p:spPr>
-          <a:xfrm>
-            <a:off x="6217920" y="3794760"/>
-            <a:ext cx="5394960" cy="2057400"/>
+            <a:off x="6675120" y="3794760"/>
+            <a:ext cx="4645152" cy="868680"/>
           </a:xfrm>
           <a:prstGeom prst="roundRect">
             <a:avLst>
-              <a:gd name="adj" fmla="val 6222"/>
+              <a:gd name="adj" fmla="val 10526"/>
             </a:avLst>
           </a:prstGeom>
           <a:solidFill>
@@ -10962,7 +12629,7 @@
           </a:solidFill>
           <a:ln w="12700">
             <a:solidFill>
-              <a:schemeClr val="accent6"/>
+              <a:srgbClr val="2DD4A7"/>
             </a:solidFill>
             <a:prstDash val="solid"/>
           </a:ln>
@@ -10970,122 +12637,179 @@
       </p:sp>
       <p:sp>
         <p:nvSpPr>
-          <p:cNvPr id="19" name="FiAlertTriangle circle"/>
+          <p:cNvPr id="25" name="provider seam label"/>
+          <p:cNvSpPr txBox="1"/>
+          <p:nvPr/>
+        </p:nvSpPr>
+        <p:spPr>
+          <a:xfrm>
+            <a:off x="6812280" y="3794760"/>
+            <a:ext cx="4370832" cy="868680"/>
+          </a:xfrm>
+          <a:prstGeom prst="rect">
+            <a:avLst/>
+          </a:prstGeom>
+          <a:noFill/>
+          <a:ln/>
+        </p:spPr>
+        <p:txBody>
+          <a:bodyPr wrap="square" lIns="0" tIns="0" rIns="0" bIns="0" rtlCol="0" anchor="ctr"/>
+          <a:lstStyle/>
+          <a:p>
+            <a:pPr indent="0" marL="0">
+              <a:buNone/>
+            </a:pPr>
+            <a:r>
+              <a:rPr lang="en-US" sz="1400" b="1" dirty="0">
+                <a:solidFill>
+                  <a:schemeClr val="bg2"/>
+                </a:solidFill>
+              </a:rPr>
+              <a:t>LLMProvider  (where text comes from)</a:t>
+            </a:r>
+            <a:endParaRPr lang="en-US" sz="1400" dirty="0"/>
+          </a:p>
+          <a:p>
+            <a:pPr indent="0" marL="0">
+              <a:buNone/>
+            </a:pPr>
+            <a:r>
+              <a:rPr lang="en-US" sz="1200" dirty="0">
+                <a:solidFill>
+                  <a:schemeClr val="accent5"/>
+                </a:solidFill>
+              </a:rPr>
+              <a:t>Ollama, local · Anthropic, cloud · Mock, tests</a:t>
+            </a:r>
+            <a:endParaRPr lang="en-US" sz="1400" dirty="0"/>
+          </a:p>
+        </p:txBody>
+      </p:sp>
+      <p:sp>
+        <p:nvSpPr>
+          <p:cNvPr id="26" name="face vault"/>
           <p:cNvSpPr/>
           <p:nvPr/>
         </p:nvSpPr>
         <p:spPr>
           <a:xfrm>
-            <a:off x="6537960" y="4114800"/>
-            <a:ext cx="566928" cy="566928"/>
-          </a:xfrm>
-          <a:prstGeom prst="ellipse">
-            <a:avLst/>
+            <a:off x="6675120" y="4937760"/>
+            <a:ext cx="4645152" cy="822960"/>
+          </a:xfrm>
+          <a:prstGeom prst="roundRect">
+            <a:avLst>
+              <a:gd name="adj" fmla="val 11111"/>
+            </a:avLst>
           </a:prstGeom>
           <a:solidFill>
-            <a:schemeClr val="accent1">
-              <a:alpha val="18000"/>
-            </a:schemeClr>
+            <a:schemeClr val="tx2"/>
           </a:solidFill>
-          <a:ln/>
-        </p:spPr>
+          <a:ln w="12700">
+            <a:solidFill>
+              <a:srgbClr val="3B82F6"/>
+            </a:solidFill>
+            <a:prstDash val="solid"/>
+          </a:ln>
+        </p:spPr>
+      </p:sp>
+      <p:sp>
+        <p:nvSpPr>
+          <p:cNvPr id="27" name="face vault label"/>
+          <p:cNvSpPr txBox="1"/>
+          <p:nvPr/>
+        </p:nvSpPr>
+        <p:spPr>
+          <a:xfrm>
+            <a:off x="6812280" y="4937760"/>
+            <a:ext cx="4370832" cy="822960"/>
+          </a:xfrm>
+          <a:prstGeom prst="rect">
+            <a:avLst/>
+          </a:prstGeom>
+          <a:noFill/>
+          <a:ln/>
+        </p:spPr>
+        <p:txBody>
+          <a:bodyPr wrap="square" lIns="0" tIns="0" rIns="0" bIns="0" rtlCol="0" anchor="ctr"/>
+          <a:lstStyle/>
+          <a:p>
+            <a:pPr indent="0" marL="0">
+              <a:buNone/>
+            </a:pPr>
+            <a:r>
+              <a:rPr lang="en-US" sz="1400" b="1" dirty="0">
+                <a:solidFill>
+                  <a:schemeClr val="bg2"/>
+                </a:solidFill>
+              </a:rPr>
+              <a:t>Face vault  (where the shared key comes from)</a:t>
+            </a:r>
+            <a:endParaRPr lang="en-US" sz="1400" dirty="0"/>
+          </a:p>
+          <a:p>
+            <a:pPr indent="0" marL="0">
+              <a:buNone/>
+            </a:pPr>
+            <a:r>
+              <a:rPr lang="en-US" sz="1200" dirty="0">
+                <a:solidFill>
+                  <a:schemeClr val="accent5"/>
+                </a:solidFill>
+              </a:rPr>
+              <a:t>Optional: your face + PIN unlock it on the device</a:t>
+            </a:r>
+            <a:endParaRPr lang="en-US" sz="1400" dirty="0"/>
+          </a:p>
+        </p:txBody>
       </p:sp>
       <p:pic>
         <p:nvPicPr>
-          <p:cNvPr id="20" name="FiAlertTriangle icon" descr="preencoded.png">    </p:cNvPr>
+          <p:cNvPr id="28" name="flow arrow 2.47" descr="preencoded.png">    </p:cNvPr>
           <p:cNvPicPr>
             <a:picLocks noChangeAspect="1"/>
           </p:cNvPicPr>
           <p:nvPr/>
         </p:nvPicPr>
         <p:blipFill>
-          <a:blip r:embed="rId4"/>
+          <a:blip r:embed="rId5"/>
           <a:stretch>
             <a:fillRect/>
           </a:stretch>
         </p:blipFill>
         <p:spPr>
           <a:xfrm>
-            <a:off x="6685361" y="4262201"/>
-            <a:ext cx="272125" cy="272125"/>
+            <a:off x="8860536" y="2258568"/>
+            <a:ext cx="274320" cy="329184"/>
           </a:xfrm>
           <a:prstGeom prst="rect">
             <a:avLst/>
           </a:prstGeom>
         </p:spPr>
       </p:pic>
-      <p:sp>
-        <p:nvSpPr>
-          <p:cNvPr id="21" name="The rules are static"/>
-          <p:cNvSpPr txBox="1"/>
-          <p:nvPr/>
-        </p:nvSpPr>
-        <p:spPr>
-          <a:xfrm>
-            <a:off x="7315200" y="4160520"/>
-            <a:ext cx="4023360" cy="457200"/>
-          </a:xfrm>
-          <a:prstGeom prst="rect">
-            <a:avLst/>
-          </a:prstGeom>
-          <a:noFill/>
-          <a:ln/>
-        </p:spPr>
-        <p:txBody>
-          <a:bodyPr wrap="square" lIns="0" tIns="0" rIns="0" bIns="0" rtlCol="0" anchor="ctr"/>
-          <a:lstStyle/>
-          <a:p>
-            <a:pPr indent="0" marL="0">
-              <a:buNone/>
-            </a:pPr>
-            <a:r>
-              <a:rPr lang="en-US" sz="1900" b="1" dirty="0">
-                <a:solidFill>
-                  <a:schemeClr val="bg2"/>
-                </a:solidFill>
-              </a:rPr>
-              <a:t>The rules are static</a:t>
-            </a:r>
-            <a:endParaRPr lang="en-US" sz="1900" dirty="0"/>
-          </a:p>
-        </p:txBody>
-      </p:sp>
-      <p:sp>
-        <p:nvSpPr>
-          <p:cNvPr id="22" name="The rules are static body"/>
-          <p:cNvSpPr txBox="1"/>
-          <p:nvPr/>
-        </p:nvSpPr>
-        <p:spPr>
-          <a:xfrm>
-            <a:off x="7315200" y="4663440"/>
-            <a:ext cx="4023360" cy="1051560"/>
-          </a:xfrm>
-          <a:prstGeom prst="rect">
-            <a:avLst/>
-          </a:prstGeom>
-          <a:noFill/>
-          <a:ln/>
-        </p:spPr>
-        <p:txBody>
-          <a:bodyPr wrap="square" lIns="0" tIns="0" rIns="0" bIns="0" rtlCol="0" anchor="t"/>
-          <a:lstStyle/>
-          <a:p>
-            <a:pPr indent="0" marL="0">
-              <a:buNone/>
-            </a:pPr>
-            <a:r>
-              <a:rPr lang="en-US" sz="1500" dirty="0">
-                <a:solidFill>
-                  <a:schemeClr val="accent5"/>
-                </a:solidFill>
-              </a:rPr>
-              <a:t>Seize the prompt and you can decode everything sent with it. Per-user keyed codebooks are the fix.</a:t>
-            </a:r>
-            <a:endParaRPr lang="en-US" sz="1500" dirty="0"/>
-          </a:p>
-        </p:txBody>
-      </p:sp>
+      <p:pic>
+        <p:nvPicPr>
+          <p:cNvPr id="29" name="flow arrow 3.77" descr="preencoded.png">    </p:cNvPr>
+          <p:cNvPicPr>
+            <a:picLocks noChangeAspect="1"/>
+          </p:cNvPicPr>
+          <p:nvPr/>
+        </p:nvPicPr>
+        <p:blipFill>
+          <a:blip r:embed="rId6"/>
+          <a:stretch>
+            <a:fillRect/>
+          </a:stretch>
+        </p:blipFill>
+        <p:spPr>
+          <a:xfrm>
+            <a:off x="8860536" y="3447288"/>
+            <a:ext cx="274320" cy="329184"/>
+          </a:xfrm>
+          <a:prstGeom prst="rect">
+            <a:avLst/>
+          </a:prstGeom>
+        </p:spPr>
+      </p:pic>
       <p:sp>
         <p:nvSpPr>
           <p:cNvPr id="25" name="Slide Number Placeholder 0"/>
